--- a/연구일지/Paradox_연구발표.pptx
+++ b/연구일지/Paradox_연구발표.pptx
@@ -5,7 +5,7 @@
     <p:sldMasterId id="2147483648" r:id="rId1"/>
   </p:sldMasterIdLst>
   <p:notesMasterIdLst>
-    <p:notesMasterId r:id="rId14"/>
+    <p:notesMasterId r:id="rId15"/>
   </p:notesMasterIdLst>
   <p:sldIdLst>
     <p:sldId id="256" r:id="rId2"/>
@@ -20,6 +20,7 @@
     <p:sldId id="265" r:id="rId11"/>
     <p:sldId id="266" r:id="rId12"/>
     <p:sldId id="267" r:id="rId13"/>
+    <p:sldId id="269" r:id="rId14"/>
   </p:sldIdLst>
   <p:sldSz cx="12192000" cy="6858000"/>
   <p:notesSz cx="6858000" cy="12192000"/>
@@ -575,6 +576,90 @@
     <p:extLst>
       <p:ext uri="{BB962C8B-B14F-4D97-AF65-F5344CB8AC3E}">
         <p14:creationId xmlns:p14="http://schemas.microsoft.com/office/powerpoint/2010/main" val="1024086991"/>
+      </p:ext>
+    </p:extLst>
+  </p:cSld>
+  <p:clrMapOvr>
+    <a:masterClrMapping/>
+  </p:clrMapOvr>
+</p:notes>
+</file>
+
+<file path=ppt/notesSlides/notesSlide13.xml><?xml version="1.0" encoding="utf-8"?>
+<p:notes xmlns:a="http://schemas.openxmlformats.org/drawingml/2006/main" xmlns:r="http://schemas.openxmlformats.org/officeDocument/2006/relationships" xmlns:p="http://schemas.openxmlformats.org/presentationml/2006/main">
+  <p:cSld>
+    <p:spTree>
+      <p:nvGrpSpPr>
+        <p:cNvPr id="1" name=""/>
+        <p:cNvGrpSpPr/>
+        <p:nvPr/>
+      </p:nvGrpSpPr>
+      <p:grpSpPr>
+        <a:xfrm>
+          <a:off x="0" y="0"/>
+          <a:ext cx="0" cy="0"/>
+          <a:chOff x="0" y="0"/>
+          <a:chExt cx="0" cy="0"/>
+        </a:xfrm>
+      </p:grpSpPr>
+      <p:sp>
+        <p:nvSpPr>
+          <p:cNvPr id="2" name="Slide Image Placeholder 1"/>
+          <p:cNvSpPr>
+            <a:spLocks noGrp="1" noRot="1" noChangeAspect="1"/>
+          </p:cNvSpPr>
+          <p:nvPr>
+            <p:ph type="sldImg"/>
+          </p:nvPr>
+        </p:nvSpPr>
+        <p:spPr/>
+      </p:sp>
+      <p:sp>
+        <p:nvSpPr>
+          <p:cNvPr id="3" name="Notes Placeholder 2"/>
+          <p:cNvSpPr>
+            <a:spLocks noGrp="1"/>
+          </p:cNvSpPr>
+          <p:nvPr>
+            <p:ph type="body" idx="1"/>
+          </p:nvPr>
+        </p:nvSpPr>
+        <p:spPr/>
+        <p:txBody>
+          <a:bodyPr/>
+          <a:lstStyle/>
+          <a:p>
+            <a:endParaRPr lang="en-US" dirty="0"/>
+          </a:p>
+        </p:txBody>
+      </p:sp>
+      <p:sp>
+        <p:nvSpPr>
+          <p:cNvPr id="4" name="Slide Number Placeholder 3"/>
+          <p:cNvSpPr>
+            <a:spLocks noGrp="1"/>
+          </p:cNvSpPr>
+          <p:nvPr>
+            <p:ph type="sldNum" sz="quarter" idx="10"/>
+          </p:nvPr>
+        </p:nvSpPr>
+        <p:spPr/>
+        <p:txBody>
+          <a:bodyPr/>
+          <a:lstStyle/>
+          <a:p>
+            <a:fld id="{F7021451-1387-4CA6-816F-3879F97B5CBC}" type="slidenum">
+              <a:rPr lang="en-US"/>
+              <a:t>13</a:t>
+            </a:fld>
+            <a:endParaRPr lang="en-US"/>
+          </a:p>
+        </p:txBody>
+      </p:sp>
+    </p:spTree>
+    <p:extLst>
+      <p:ext uri="{BB962C8B-B14F-4D97-AF65-F5344CB8AC3E}">
+        <p14:creationId xmlns:p14="http://schemas.microsoft.com/office/powerpoint/2010/main" val="721530053"/>
       </p:ext>
     </p:extLst>
   </p:cSld>
@@ -3952,6 +4037,233 @@
         </p:txBody>
       </p:sp>
     </p:spTree>
+  </p:cSld>
+  <p:clrMapOvr>
+    <a:masterClrMapping/>
+  </p:clrMapOvr>
+</p:sld>
+</file>
+
+<file path=ppt/slides/slide13.xml><?xml version="1.0" encoding="utf-8"?>
+<p:sld xmlns:a="http://schemas.openxmlformats.org/drawingml/2006/main" xmlns:r="http://schemas.openxmlformats.org/officeDocument/2006/relationships" xmlns:p="http://schemas.openxmlformats.org/presentationml/2006/main">
+  <p:cSld>
+    <p:bg>
+      <p:bgPr>
+        <a:solidFill>
+          <a:schemeClr val="tx1"/>
+        </a:solidFill>
+        <a:effectLst/>
+      </p:bgPr>
+    </p:bg>
+    <p:spTree>
+      <p:nvGrpSpPr>
+        <p:cNvPr id="1" name=""/>
+        <p:cNvGrpSpPr/>
+        <p:nvPr/>
+      </p:nvGrpSpPr>
+      <p:grpSpPr>
+        <a:xfrm>
+          <a:off x="0" y="0"/>
+          <a:ext cx="0" cy="0"/>
+          <a:chOff x="0" y="0"/>
+          <a:chExt cx="0" cy="0"/>
+        </a:xfrm>
+      </p:grpSpPr>
+      <p:sp>
+        <p:nvSpPr>
+          <p:cNvPr id="3" name="Text 1"/>
+          <p:cNvSpPr/>
+          <p:nvPr/>
+        </p:nvSpPr>
+        <p:spPr>
+          <a:xfrm>
+            <a:off x="548640" y="2282092"/>
+            <a:ext cx="10972800" cy="1195754"/>
+          </a:xfrm>
+          <a:prstGeom prst="rect">
+            <a:avLst/>
+          </a:prstGeom>
+          <a:noFill/>
+          <a:ln/>
+        </p:spPr>
+        <p:txBody>
+          <a:bodyPr wrap="square" rtlCol="0" anchor="ctr"/>
+          <a:lstStyle/>
+          <a:p>
+            <a:pPr marL="0" indent="0" algn="ctr">
+              <a:buNone/>
+            </a:pPr>
+            <a:r>
+              <a:rPr lang="ko-KR" altLang="en-US" sz="7200" b="1" dirty="0">
+                <a:solidFill>
+                  <a:srgbClr val="8B5CF6"/>
+                </a:solidFill>
+                <a:latin typeface="한컴 울주 천전리 각석체" panose="020B0503000000000000" pitchFamily="50" charset="-127"/>
+                <a:ea typeface="한컴 울주 천전리 각석체" panose="020B0503000000000000" pitchFamily="50" charset="-127"/>
+              </a:rPr>
+              <a:t>감사합니다</a:t>
+            </a:r>
+            <a:endParaRPr lang="en-US" altLang="ko-KR" sz="7200" b="1" dirty="0">
+              <a:solidFill>
+                <a:srgbClr val="8B5CF6"/>
+              </a:solidFill>
+              <a:latin typeface="한컴 울주 천전리 각석체" panose="020B0503000000000000" pitchFamily="50" charset="-127"/>
+              <a:ea typeface="한컴 울주 천전리 각석체" panose="020B0503000000000000" pitchFamily="50" charset="-127"/>
+            </a:endParaRPr>
+          </a:p>
+        </p:txBody>
+      </p:sp>
+      <p:sp>
+        <p:nvSpPr>
+          <p:cNvPr id="4" name="Text 2"/>
+          <p:cNvSpPr/>
+          <p:nvPr/>
+        </p:nvSpPr>
+        <p:spPr>
+          <a:xfrm>
+            <a:off x="548640" y="2926080"/>
+            <a:ext cx="10972800" cy="457200"/>
+          </a:xfrm>
+          <a:prstGeom prst="rect">
+            <a:avLst/>
+          </a:prstGeom>
+          <a:noFill/>
+          <a:ln/>
+        </p:spPr>
+        <p:txBody>
+          <a:bodyPr wrap="square" rtlCol="0" anchor="ctr"/>
+          <a:lstStyle/>
+          <a:p>
+            <a:pPr marL="0" indent="0" algn="ctr">
+              <a:buNone/>
+            </a:pPr>
+            <a:endParaRPr lang="en-US" sz="1800" dirty="0"/>
+          </a:p>
+        </p:txBody>
+      </p:sp>
+      <p:sp>
+        <p:nvSpPr>
+          <p:cNvPr id="5" name="Text 3"/>
+          <p:cNvSpPr/>
+          <p:nvPr/>
+        </p:nvSpPr>
+        <p:spPr>
+          <a:xfrm>
+            <a:off x="548640" y="4114800"/>
+            <a:ext cx="10972800" cy="457200"/>
+          </a:xfrm>
+          <a:prstGeom prst="rect">
+            <a:avLst/>
+          </a:prstGeom>
+          <a:noFill/>
+          <a:ln/>
+        </p:spPr>
+        <p:txBody>
+          <a:bodyPr wrap="square" rtlCol="0" anchor="ctr"/>
+          <a:lstStyle/>
+          <a:p>
+            <a:pPr marL="0" indent="0" algn="ctr">
+              <a:buNone/>
+            </a:pPr>
+            <a:endParaRPr lang="en-US" sz="2200" dirty="0"/>
+          </a:p>
+        </p:txBody>
+      </p:sp>
+      <p:sp>
+        <p:nvSpPr>
+          <p:cNvPr id="6" name="Text 4"/>
+          <p:cNvSpPr/>
+          <p:nvPr/>
+        </p:nvSpPr>
+        <p:spPr>
+          <a:xfrm>
+            <a:off x="548640" y="4846320"/>
+            <a:ext cx="10972800" cy="365760"/>
+          </a:xfrm>
+          <a:prstGeom prst="rect">
+            <a:avLst/>
+          </a:prstGeom>
+          <a:noFill/>
+          <a:ln/>
+        </p:spPr>
+        <p:txBody>
+          <a:bodyPr wrap="square" rtlCol="0" anchor="ctr"/>
+          <a:lstStyle/>
+          <a:p>
+            <a:pPr marL="0" indent="0" algn="ctr">
+              <a:buNone/>
+            </a:pPr>
+            <a:r>
+              <a:rPr lang="en-US" sz="1600" dirty="0" err="1">
+                <a:solidFill>
+                  <a:srgbClr val="FFFFFF"/>
+                </a:solidFill>
+                <a:latin typeface="Malgun Gothic" pitchFamily="34" charset="0"/>
+                <a:ea typeface="Malgun Gothic" pitchFamily="34" charset="-122"/>
+                <a:cs typeface="Malgun Gothic" pitchFamily="34" charset="-120"/>
+              </a:rPr>
+              <a:t>이현준</a:t>
+            </a:r>
+            <a:r>
+              <a:rPr lang="en-US" sz="1600" dirty="0">
+                <a:solidFill>
+                  <a:srgbClr val="FFFFFF"/>
+                </a:solidFill>
+                <a:latin typeface="Malgun Gothic" pitchFamily="34" charset="0"/>
+                <a:ea typeface="Malgun Gothic" pitchFamily="34" charset="-122"/>
+                <a:cs typeface="Malgun Gothic" pitchFamily="34" charset="-120"/>
+              </a:rPr>
+              <a:t> · </a:t>
+            </a:r>
+            <a:r>
+              <a:rPr lang="en-US" sz="1600" dirty="0" err="1">
+                <a:solidFill>
+                  <a:srgbClr val="FFFFFF"/>
+                </a:solidFill>
+                <a:latin typeface="Malgun Gothic" pitchFamily="34" charset="0"/>
+                <a:ea typeface="Malgun Gothic" pitchFamily="34" charset="-122"/>
+                <a:cs typeface="Malgun Gothic" pitchFamily="34" charset="-120"/>
+              </a:rPr>
+              <a:t>배도훈</a:t>
+            </a:r>
+            <a:endParaRPr lang="en-US" sz="1600" dirty="0"/>
+          </a:p>
+        </p:txBody>
+      </p:sp>
+      <p:sp>
+        <p:nvSpPr>
+          <p:cNvPr id="7" name="Text 5"/>
+          <p:cNvSpPr/>
+          <p:nvPr/>
+        </p:nvSpPr>
+        <p:spPr>
+          <a:xfrm>
+            <a:off x="548640" y="5303520"/>
+            <a:ext cx="10972800" cy="365760"/>
+          </a:xfrm>
+          <a:prstGeom prst="rect">
+            <a:avLst/>
+          </a:prstGeom>
+          <a:noFill/>
+          <a:ln/>
+        </p:spPr>
+        <p:txBody>
+          <a:bodyPr wrap="square" rtlCol="0" anchor="ctr"/>
+          <a:lstStyle/>
+          <a:p>
+            <a:pPr marL="0" indent="0" algn="ctr">
+              <a:buNone/>
+            </a:pPr>
+            <a:endParaRPr lang="en-US" sz="1200" dirty="0"/>
+          </a:p>
+        </p:txBody>
+      </p:sp>
+    </p:spTree>
+    <p:extLst>
+      <p:ext uri="{BB962C8B-B14F-4D97-AF65-F5344CB8AC3E}">
+        <p14:creationId xmlns:p14="http://schemas.microsoft.com/office/powerpoint/2010/main" val="930842366"/>
+      </p:ext>
+    </p:extLst>
   </p:cSld>
   <p:clrMapOvr>
     <a:masterClrMapping/>

--- a/연구일지/Paradox_연구발표.pptx
+++ b/연구일지/Paradox_연구발표.pptx
@@ -2,30 +2,34 @@
 <file path=ppt/presentation.xml><?xml version="1.0" encoding="utf-8"?>
 <p:presentation xmlns:a="http://schemas.openxmlformats.org/drawingml/2006/main" xmlns:r="http://schemas.openxmlformats.org/officeDocument/2006/relationships" xmlns:p="http://schemas.openxmlformats.org/presentationml/2006/main" saveSubsetFonts="1" autoCompressPictures="0">
   <p:sldMasterIdLst>
-    <p:sldMasterId id="2147483648" r:id="rId1"/>
+    <p:sldMasterId id="2147483650" r:id="rId1"/>
   </p:sldMasterIdLst>
   <p:notesMasterIdLst>
-    <p:notesMasterId r:id="rId15"/>
+    <p:notesMasterId r:id="rId16"/>
   </p:notesMasterIdLst>
   <p:sldIdLst>
     <p:sldId id="256" r:id="rId2"/>
-    <p:sldId id="257" r:id="rId3"/>
-    <p:sldId id="258" r:id="rId4"/>
-    <p:sldId id="259" r:id="rId5"/>
-    <p:sldId id="260" r:id="rId6"/>
-    <p:sldId id="261" r:id="rId7"/>
-    <p:sldId id="262" r:id="rId8"/>
-    <p:sldId id="263" r:id="rId9"/>
-    <p:sldId id="264" r:id="rId10"/>
-    <p:sldId id="265" r:id="rId11"/>
-    <p:sldId id="266" r:id="rId12"/>
-    <p:sldId id="267" r:id="rId13"/>
-    <p:sldId id="269" r:id="rId14"/>
+    <p:sldId id="270" r:id="rId3"/>
+    <p:sldId id="257" r:id="rId4"/>
+    <p:sldId id="258" r:id="rId5"/>
+    <p:sldId id="259" r:id="rId6"/>
+    <p:sldId id="260" r:id="rId7"/>
+    <p:sldId id="261" r:id="rId8"/>
+    <p:sldId id="262" r:id="rId9"/>
+    <p:sldId id="263" r:id="rId10"/>
+    <p:sldId id="264" r:id="rId11"/>
+    <p:sldId id="265" r:id="rId12"/>
+    <p:sldId id="266" r:id="rId13"/>
+    <p:sldId id="267" r:id="rId14"/>
+    <p:sldId id="269" r:id="rId15"/>
   </p:sldIdLst>
   <p:sldSz cx="12192000" cy="6858000"/>
   <p:notesSz cx="6858000" cy="12192000"/>
   <p:defaultTextStyle>
-    <a:lvl1pPr marL="0" algn="l" defTabSz="914400" rtl="0" eaLnBrk="1" latinLnBrk="0" hangingPunct="1">
+    <a:defPPr>
+      <a:defRPr lang="en-US"/>
+    </a:defPPr>
+    <a:lvl1pPr marL="0" algn="l" defTabSz="457200" rtl="0" eaLnBrk="1" latinLnBrk="0" hangingPunct="1">
       <a:defRPr sz="1800" kern="1200">
         <a:solidFill>
           <a:schemeClr val="tx1"/>
@@ -35,7 +39,7 @@
         <a:cs typeface="+mn-cs"/>
       </a:defRPr>
     </a:lvl1pPr>
-    <a:lvl2pPr marL="457200" algn="l" defTabSz="914400" rtl="0" eaLnBrk="1" latinLnBrk="0" hangingPunct="1">
+    <a:lvl2pPr marL="457200" algn="l" defTabSz="457200" rtl="0" eaLnBrk="1" latinLnBrk="0" hangingPunct="1">
       <a:defRPr sz="1800" kern="1200">
         <a:solidFill>
           <a:schemeClr val="tx1"/>
@@ -45,7 +49,7 @@
         <a:cs typeface="+mn-cs"/>
       </a:defRPr>
     </a:lvl2pPr>
-    <a:lvl3pPr marL="914400" algn="l" defTabSz="914400" rtl="0" eaLnBrk="1" latinLnBrk="0" hangingPunct="1">
+    <a:lvl3pPr marL="914400" algn="l" defTabSz="457200" rtl="0" eaLnBrk="1" latinLnBrk="0" hangingPunct="1">
       <a:defRPr sz="1800" kern="1200">
         <a:solidFill>
           <a:schemeClr val="tx1"/>
@@ -55,7 +59,7 @@
         <a:cs typeface="+mn-cs"/>
       </a:defRPr>
     </a:lvl3pPr>
-    <a:lvl4pPr marL="1371600" algn="l" defTabSz="914400" rtl="0" eaLnBrk="1" latinLnBrk="0" hangingPunct="1">
+    <a:lvl4pPr marL="1371600" algn="l" defTabSz="457200" rtl="0" eaLnBrk="1" latinLnBrk="0" hangingPunct="1">
       <a:defRPr sz="1800" kern="1200">
         <a:solidFill>
           <a:schemeClr val="tx1"/>
@@ -65,7 +69,7 @@
         <a:cs typeface="+mn-cs"/>
       </a:defRPr>
     </a:lvl4pPr>
-    <a:lvl5pPr marL="1828800" algn="l" defTabSz="914400" rtl="0" eaLnBrk="1" latinLnBrk="0" hangingPunct="1">
+    <a:lvl5pPr marL="1828800" algn="l" defTabSz="457200" rtl="0" eaLnBrk="1" latinLnBrk="0" hangingPunct="1">
       <a:defRPr sz="1800" kern="1200">
         <a:solidFill>
           <a:schemeClr val="tx1"/>
@@ -75,7 +79,7 @@
         <a:cs typeface="+mn-cs"/>
       </a:defRPr>
     </a:lvl5pPr>
-    <a:lvl6pPr marL="2286000" algn="l" defTabSz="914400" rtl="0" eaLnBrk="1" latinLnBrk="0" hangingPunct="1">
+    <a:lvl6pPr marL="2286000" algn="l" defTabSz="457200" rtl="0" eaLnBrk="1" latinLnBrk="0" hangingPunct="1">
       <a:defRPr sz="1800" kern="1200">
         <a:solidFill>
           <a:schemeClr val="tx1"/>
@@ -85,7 +89,7 @@
         <a:cs typeface="+mn-cs"/>
       </a:defRPr>
     </a:lvl6pPr>
-    <a:lvl7pPr marL="2743200" algn="l" defTabSz="914400" rtl="0" eaLnBrk="1" latinLnBrk="0" hangingPunct="1">
+    <a:lvl7pPr marL="2743200" algn="l" defTabSz="457200" rtl="0" eaLnBrk="1" latinLnBrk="0" hangingPunct="1">
       <a:defRPr sz="1800" kern="1200">
         <a:solidFill>
           <a:schemeClr val="tx1"/>
@@ -95,7 +99,7 @@
         <a:cs typeface="+mn-cs"/>
       </a:defRPr>
     </a:lvl7pPr>
-    <a:lvl8pPr marL="3200400" algn="l" defTabSz="914400" rtl="0" eaLnBrk="1" latinLnBrk="0" hangingPunct="1">
+    <a:lvl8pPr marL="3200400" algn="l" defTabSz="457200" rtl="0" eaLnBrk="1" latinLnBrk="0" hangingPunct="1">
       <a:defRPr sz="1800" kern="1200">
         <a:solidFill>
           <a:schemeClr val="tx1"/>
@@ -105,7 +109,7 @@
         <a:cs typeface="+mn-cs"/>
       </a:defRPr>
     </a:lvl8pPr>
-    <a:lvl9pPr marL="3657600" algn="l" defTabSz="914400" rtl="0" eaLnBrk="1" latinLnBrk="0" hangingPunct="1">
+    <a:lvl9pPr marL="3657600" algn="l" defTabSz="457200" rtl="0" eaLnBrk="1" latinLnBrk="0" hangingPunct="1">
       <a:defRPr sz="1800" kern="1200">
         <a:solidFill>
           <a:schemeClr val="tx1"/>
@@ -659,6 +663,90 @@
     </p:spTree>
     <p:extLst>
       <p:ext uri="{BB962C8B-B14F-4D97-AF65-F5344CB8AC3E}">
+        <p14:creationId xmlns:p14="http://schemas.microsoft.com/office/powerpoint/2010/main" val="1024086991"/>
+      </p:ext>
+    </p:extLst>
+  </p:cSld>
+  <p:clrMapOvr>
+    <a:masterClrMapping/>
+  </p:clrMapOvr>
+</p:notes>
+</file>
+
+<file path=ppt/notesSlides/notesSlide14.xml><?xml version="1.0" encoding="utf-8"?>
+<p:notes xmlns:a="http://schemas.openxmlformats.org/drawingml/2006/main" xmlns:r="http://schemas.openxmlformats.org/officeDocument/2006/relationships" xmlns:p="http://schemas.openxmlformats.org/presentationml/2006/main">
+  <p:cSld>
+    <p:spTree>
+      <p:nvGrpSpPr>
+        <p:cNvPr id="1" name=""/>
+        <p:cNvGrpSpPr/>
+        <p:nvPr/>
+      </p:nvGrpSpPr>
+      <p:grpSpPr>
+        <a:xfrm>
+          <a:off x="0" y="0"/>
+          <a:ext cx="0" cy="0"/>
+          <a:chOff x="0" y="0"/>
+          <a:chExt cx="0" cy="0"/>
+        </a:xfrm>
+      </p:grpSpPr>
+      <p:sp>
+        <p:nvSpPr>
+          <p:cNvPr id="2" name="Slide Image Placeholder 1"/>
+          <p:cNvSpPr>
+            <a:spLocks noGrp="1" noRot="1" noChangeAspect="1"/>
+          </p:cNvSpPr>
+          <p:nvPr>
+            <p:ph type="sldImg"/>
+          </p:nvPr>
+        </p:nvSpPr>
+        <p:spPr/>
+      </p:sp>
+      <p:sp>
+        <p:nvSpPr>
+          <p:cNvPr id="3" name="Notes Placeholder 2"/>
+          <p:cNvSpPr>
+            <a:spLocks noGrp="1"/>
+          </p:cNvSpPr>
+          <p:nvPr>
+            <p:ph type="body" idx="1"/>
+          </p:nvPr>
+        </p:nvSpPr>
+        <p:spPr/>
+        <p:txBody>
+          <a:bodyPr/>
+          <a:lstStyle/>
+          <a:p>
+            <a:endParaRPr lang="en-US" dirty="0"/>
+          </a:p>
+        </p:txBody>
+      </p:sp>
+      <p:sp>
+        <p:nvSpPr>
+          <p:cNvPr id="4" name="Slide Number Placeholder 3"/>
+          <p:cNvSpPr>
+            <a:spLocks noGrp="1"/>
+          </p:cNvSpPr>
+          <p:nvPr>
+            <p:ph type="sldNum" sz="quarter" idx="10"/>
+          </p:nvPr>
+        </p:nvSpPr>
+        <p:spPr/>
+        <p:txBody>
+          <a:bodyPr/>
+          <a:lstStyle/>
+          <a:p>
+            <a:fld id="{F7021451-1387-4CA6-816F-3879F97B5CBC}" type="slidenum">
+              <a:rPr lang="en-US"/>
+              <a:t>14</a:t>
+            </a:fld>
+            <a:endParaRPr lang="en-US"/>
+          </a:p>
+        </p:txBody>
+      </p:sp>
+    </p:spTree>
+    <p:extLst>
+      <p:ext uri="{BB962C8B-B14F-4D97-AF65-F5344CB8AC3E}">
         <p14:creationId xmlns:p14="http://schemas.microsoft.com/office/powerpoint/2010/main" val="721530053"/>
       </p:ext>
     </p:extLst>
@@ -743,7 +831,7 @@
     </p:spTree>
     <p:extLst>
       <p:ext uri="{BB962C8B-B14F-4D97-AF65-F5344CB8AC3E}">
-        <p14:creationId xmlns:p14="http://schemas.microsoft.com/office/powerpoint/2010/main" val="1024086991"/>
+        <p14:creationId xmlns:p14="http://schemas.microsoft.com/office/powerpoint/2010/main" val="3273122199"/>
       </p:ext>
     </p:extLst>
   </p:cSld>
@@ -1342,7 +1430,552 @@
 </file>
 
 <file path=ppt/slideLayouts/slideLayout1.xml><?xml version="1.0" encoding="utf-8"?>
-<p:sldLayout xmlns:a="http://schemas.openxmlformats.org/drawingml/2006/main" xmlns:r="http://schemas.openxmlformats.org/officeDocument/2006/relationships" xmlns:p="http://schemas.openxmlformats.org/presentationml/2006/main" preserve="1">
+<p:sldLayout xmlns:a="http://schemas.openxmlformats.org/drawingml/2006/main" xmlns:r="http://schemas.openxmlformats.org/officeDocument/2006/relationships" xmlns:p="http://schemas.openxmlformats.org/presentationml/2006/main" type="title" preserve="1">
+  <p:cSld name="제목 슬라이드">
+    <p:spTree>
+      <p:nvGrpSpPr>
+        <p:cNvPr id="1" name=""/>
+        <p:cNvGrpSpPr/>
+        <p:nvPr/>
+      </p:nvGrpSpPr>
+      <p:grpSpPr>
+        <a:xfrm>
+          <a:off x="0" y="0"/>
+          <a:ext cx="0" cy="0"/>
+          <a:chOff x="0" y="0"/>
+          <a:chExt cx="0" cy="0"/>
+        </a:xfrm>
+      </p:grpSpPr>
+      <p:sp>
+        <p:nvSpPr>
+          <p:cNvPr id="2" name="Title 1"/>
+          <p:cNvSpPr>
+            <a:spLocks noGrp="1"/>
+          </p:cNvSpPr>
+          <p:nvPr>
+            <p:ph type="ctrTitle"/>
+          </p:nvPr>
+        </p:nvSpPr>
+        <p:spPr>
+          <a:xfrm>
+            <a:off x="1524000" y="1122363"/>
+            <a:ext cx="9144000" cy="2387600"/>
+          </a:xfrm>
+        </p:spPr>
+        <p:txBody>
+          <a:bodyPr anchor="b"/>
+          <a:lstStyle>
+            <a:lvl1pPr algn="ctr">
+              <a:defRPr sz="6000"/>
+            </a:lvl1pPr>
+          </a:lstStyle>
+          <a:p>
+            <a:r>
+              <a:rPr lang="ko-KR" altLang="en-US"/>
+              <a:t>마스터 제목 스타일 편집</a:t>
+            </a:r>
+            <a:endParaRPr lang="en-US" dirty="0"/>
+          </a:p>
+        </p:txBody>
+      </p:sp>
+      <p:sp>
+        <p:nvSpPr>
+          <p:cNvPr id="3" name="Subtitle 2"/>
+          <p:cNvSpPr>
+            <a:spLocks noGrp="1"/>
+          </p:cNvSpPr>
+          <p:nvPr>
+            <p:ph type="subTitle" idx="1"/>
+          </p:nvPr>
+        </p:nvSpPr>
+        <p:spPr>
+          <a:xfrm>
+            <a:off x="1524000" y="3602038"/>
+            <a:ext cx="9144000" cy="1655762"/>
+          </a:xfrm>
+        </p:spPr>
+        <p:txBody>
+          <a:bodyPr/>
+          <a:lstStyle>
+            <a:lvl1pPr marL="0" indent="0" algn="ctr">
+              <a:buNone/>
+              <a:defRPr sz="2400"/>
+            </a:lvl1pPr>
+            <a:lvl2pPr marL="457200" indent="0" algn="ctr">
+              <a:buNone/>
+              <a:defRPr sz="2000"/>
+            </a:lvl2pPr>
+            <a:lvl3pPr marL="914400" indent="0" algn="ctr">
+              <a:buNone/>
+              <a:defRPr sz="1800"/>
+            </a:lvl3pPr>
+            <a:lvl4pPr marL="1371600" indent="0" algn="ctr">
+              <a:buNone/>
+              <a:defRPr sz="1600"/>
+            </a:lvl4pPr>
+            <a:lvl5pPr marL="1828800" indent="0" algn="ctr">
+              <a:buNone/>
+              <a:defRPr sz="1600"/>
+            </a:lvl5pPr>
+            <a:lvl6pPr marL="2286000" indent="0" algn="ctr">
+              <a:buNone/>
+              <a:defRPr sz="1600"/>
+            </a:lvl6pPr>
+            <a:lvl7pPr marL="2743200" indent="0" algn="ctr">
+              <a:buNone/>
+              <a:defRPr sz="1600"/>
+            </a:lvl7pPr>
+            <a:lvl8pPr marL="3200400" indent="0" algn="ctr">
+              <a:buNone/>
+              <a:defRPr sz="1600"/>
+            </a:lvl8pPr>
+            <a:lvl9pPr marL="3657600" indent="0" algn="ctr">
+              <a:buNone/>
+              <a:defRPr sz="1600"/>
+            </a:lvl9pPr>
+          </a:lstStyle>
+          <a:p>
+            <a:r>
+              <a:rPr lang="ko-KR" altLang="en-US"/>
+              <a:t>클릭하여 마스터 부제목 스타일 편집</a:t>
+            </a:r>
+            <a:endParaRPr lang="en-US" dirty="0"/>
+          </a:p>
+        </p:txBody>
+      </p:sp>
+      <p:sp>
+        <p:nvSpPr>
+          <p:cNvPr id="4" name="Date Placeholder 3"/>
+          <p:cNvSpPr>
+            <a:spLocks noGrp="1"/>
+          </p:cNvSpPr>
+          <p:nvPr>
+            <p:ph type="dt" sz="half" idx="10"/>
+          </p:nvPr>
+        </p:nvSpPr>
+        <p:spPr/>
+        <p:txBody>
+          <a:bodyPr/>
+          <a:lstStyle/>
+          <a:p>
+            <a:fld id="{C764DE79-268F-4C1A-8933-263129D2AF90}" type="datetimeFigureOut">
+              <a:rPr lang="en-US" dirty="0"/>
+              <a:t>5/16/2026</a:t>
+            </a:fld>
+            <a:endParaRPr lang="en-US" dirty="0"/>
+          </a:p>
+        </p:txBody>
+      </p:sp>
+      <p:sp>
+        <p:nvSpPr>
+          <p:cNvPr id="5" name="Footer Placeholder 4"/>
+          <p:cNvSpPr>
+            <a:spLocks noGrp="1"/>
+          </p:cNvSpPr>
+          <p:nvPr>
+            <p:ph type="ftr" sz="quarter" idx="11"/>
+          </p:nvPr>
+        </p:nvSpPr>
+        <p:spPr/>
+        <p:txBody>
+          <a:bodyPr/>
+          <a:lstStyle/>
+          <a:p>
+            <a:endParaRPr lang="en-US" dirty="0"/>
+          </a:p>
+        </p:txBody>
+      </p:sp>
+      <p:sp>
+        <p:nvSpPr>
+          <p:cNvPr id="6" name="Slide Number Placeholder 5"/>
+          <p:cNvSpPr>
+            <a:spLocks noGrp="1"/>
+          </p:cNvSpPr>
+          <p:nvPr>
+            <p:ph type="sldNum" sz="quarter" idx="12"/>
+          </p:nvPr>
+        </p:nvSpPr>
+        <p:spPr/>
+        <p:txBody>
+          <a:bodyPr/>
+          <a:lstStyle/>
+          <a:p>
+            <a:fld id="{48F63A3B-78C7-47BE-AE5E-E10140E04643}" type="slidenum">
+              <a:rPr lang="en-US" dirty="0"/>
+              <a:t>‹#›</a:t>
+            </a:fld>
+            <a:endParaRPr lang="en-US" dirty="0"/>
+          </a:p>
+        </p:txBody>
+      </p:sp>
+    </p:spTree>
+    <p:extLst>
+      <p:ext uri="{BB962C8B-B14F-4D97-AF65-F5344CB8AC3E}">
+        <p14:creationId xmlns:p14="http://schemas.microsoft.com/office/powerpoint/2010/main" val="394027803"/>
+      </p:ext>
+    </p:extLst>
+  </p:cSld>
+  <p:clrMapOvr>
+    <a:masterClrMapping/>
+  </p:clrMapOvr>
+  <p:hf sldNum="0" hdr="0" ftr="0" dt="0"/>
+</p:sldLayout>
+</file>
+
+<file path=ppt/slideLayouts/slideLayout10.xml><?xml version="1.0" encoding="utf-8"?>
+<p:sldLayout xmlns:a="http://schemas.openxmlformats.org/drawingml/2006/main" xmlns:r="http://schemas.openxmlformats.org/officeDocument/2006/relationships" xmlns:p="http://schemas.openxmlformats.org/presentationml/2006/main" type="vertTx" preserve="1">
+  <p:cSld name="제목 및 세로 텍스트">
+    <p:spTree>
+      <p:nvGrpSpPr>
+        <p:cNvPr id="1" name=""/>
+        <p:cNvGrpSpPr/>
+        <p:nvPr/>
+      </p:nvGrpSpPr>
+      <p:grpSpPr>
+        <a:xfrm>
+          <a:off x="0" y="0"/>
+          <a:ext cx="0" cy="0"/>
+          <a:chOff x="0" y="0"/>
+          <a:chExt cx="0" cy="0"/>
+        </a:xfrm>
+      </p:grpSpPr>
+      <p:sp>
+        <p:nvSpPr>
+          <p:cNvPr id="2" name="Title 1"/>
+          <p:cNvSpPr>
+            <a:spLocks noGrp="1"/>
+          </p:cNvSpPr>
+          <p:nvPr>
+            <p:ph type="title"/>
+          </p:nvPr>
+        </p:nvSpPr>
+        <p:spPr/>
+        <p:txBody>
+          <a:bodyPr/>
+          <a:lstStyle/>
+          <a:p>
+            <a:r>
+              <a:rPr lang="ko-KR" altLang="en-US"/>
+              <a:t>마스터 제목 스타일 편집</a:t>
+            </a:r>
+            <a:endParaRPr lang="en-US" dirty="0"/>
+          </a:p>
+        </p:txBody>
+      </p:sp>
+      <p:sp>
+        <p:nvSpPr>
+          <p:cNvPr id="3" name="Vertical Text Placeholder 2"/>
+          <p:cNvSpPr>
+            <a:spLocks noGrp="1"/>
+          </p:cNvSpPr>
+          <p:nvPr>
+            <p:ph type="body" orient="vert" idx="1"/>
+          </p:nvPr>
+        </p:nvSpPr>
+        <p:spPr/>
+        <p:txBody>
+          <a:bodyPr vert="eaVert"/>
+          <a:lstStyle/>
+          <a:p>
+            <a:pPr lvl="0"/>
+            <a:r>
+              <a:rPr lang="ko-KR" altLang="en-US"/>
+              <a:t>마스터 텍스트 스타일을 편집하려면 클릭</a:t>
+            </a:r>
+          </a:p>
+          <a:p>
+            <a:pPr lvl="1"/>
+            <a:r>
+              <a:rPr lang="ko-KR" altLang="en-US"/>
+              <a:t>두 번째 수준</a:t>
+            </a:r>
+          </a:p>
+          <a:p>
+            <a:pPr lvl="2"/>
+            <a:r>
+              <a:rPr lang="ko-KR" altLang="en-US"/>
+              <a:t>세 번째 수준</a:t>
+            </a:r>
+          </a:p>
+          <a:p>
+            <a:pPr lvl="3"/>
+            <a:r>
+              <a:rPr lang="ko-KR" altLang="en-US"/>
+              <a:t>네 번째 수준</a:t>
+            </a:r>
+          </a:p>
+          <a:p>
+            <a:pPr lvl="4"/>
+            <a:r>
+              <a:rPr lang="ko-KR" altLang="en-US"/>
+              <a:t>다섯 번째 수준</a:t>
+            </a:r>
+            <a:endParaRPr lang="en-US" dirty="0"/>
+          </a:p>
+        </p:txBody>
+      </p:sp>
+      <p:sp>
+        <p:nvSpPr>
+          <p:cNvPr id="4" name="Date Placeholder 3"/>
+          <p:cNvSpPr>
+            <a:spLocks noGrp="1"/>
+          </p:cNvSpPr>
+          <p:nvPr>
+            <p:ph type="dt" sz="half" idx="10"/>
+          </p:nvPr>
+        </p:nvSpPr>
+        <p:spPr/>
+        <p:txBody>
+          <a:bodyPr/>
+          <a:lstStyle/>
+          <a:p>
+            <a:fld id="{C764DE79-268F-4C1A-8933-263129D2AF90}" type="datetimeFigureOut">
+              <a:rPr lang="en-US" dirty="0"/>
+              <a:t>5/16/2026</a:t>
+            </a:fld>
+            <a:endParaRPr lang="en-US" dirty="0"/>
+          </a:p>
+        </p:txBody>
+      </p:sp>
+      <p:sp>
+        <p:nvSpPr>
+          <p:cNvPr id="5" name="Footer Placeholder 4"/>
+          <p:cNvSpPr>
+            <a:spLocks noGrp="1"/>
+          </p:cNvSpPr>
+          <p:nvPr>
+            <p:ph type="ftr" sz="quarter" idx="11"/>
+          </p:nvPr>
+        </p:nvSpPr>
+        <p:spPr/>
+        <p:txBody>
+          <a:bodyPr/>
+          <a:lstStyle/>
+          <a:p>
+            <a:endParaRPr lang="en-US" dirty="0"/>
+          </a:p>
+        </p:txBody>
+      </p:sp>
+      <p:sp>
+        <p:nvSpPr>
+          <p:cNvPr id="6" name="Slide Number Placeholder 5"/>
+          <p:cNvSpPr>
+            <a:spLocks noGrp="1"/>
+          </p:cNvSpPr>
+          <p:nvPr>
+            <p:ph type="sldNum" sz="quarter" idx="12"/>
+          </p:nvPr>
+        </p:nvSpPr>
+        <p:spPr/>
+        <p:txBody>
+          <a:bodyPr/>
+          <a:lstStyle/>
+          <a:p>
+            <a:fld id="{48F63A3B-78C7-47BE-AE5E-E10140E04643}" type="slidenum">
+              <a:rPr lang="en-US" dirty="0"/>
+              <a:t>‹#›</a:t>
+            </a:fld>
+            <a:endParaRPr lang="en-US" dirty="0"/>
+          </a:p>
+        </p:txBody>
+      </p:sp>
+    </p:spTree>
+    <p:extLst>
+      <p:ext uri="{BB962C8B-B14F-4D97-AF65-F5344CB8AC3E}">
+        <p14:creationId xmlns:p14="http://schemas.microsoft.com/office/powerpoint/2010/main" val="3151611896"/>
+      </p:ext>
+    </p:extLst>
+  </p:cSld>
+  <p:clrMapOvr>
+    <a:masterClrMapping/>
+  </p:clrMapOvr>
+  <p:hf sldNum="0" hdr="0" ftr="0" dt="0"/>
+</p:sldLayout>
+</file>
+
+<file path=ppt/slideLayouts/slideLayout11.xml><?xml version="1.0" encoding="utf-8"?>
+<p:sldLayout xmlns:a="http://schemas.openxmlformats.org/drawingml/2006/main" xmlns:r="http://schemas.openxmlformats.org/officeDocument/2006/relationships" xmlns:p="http://schemas.openxmlformats.org/presentationml/2006/main" type="vertTitleAndTx" preserve="1">
+  <p:cSld name="세로 제목 및 텍스트">
+    <p:spTree>
+      <p:nvGrpSpPr>
+        <p:cNvPr id="1" name=""/>
+        <p:cNvGrpSpPr/>
+        <p:nvPr/>
+      </p:nvGrpSpPr>
+      <p:grpSpPr>
+        <a:xfrm>
+          <a:off x="0" y="0"/>
+          <a:ext cx="0" cy="0"/>
+          <a:chOff x="0" y="0"/>
+          <a:chExt cx="0" cy="0"/>
+        </a:xfrm>
+      </p:grpSpPr>
+      <p:sp>
+        <p:nvSpPr>
+          <p:cNvPr id="2" name="Vertical Title 1"/>
+          <p:cNvSpPr>
+            <a:spLocks noGrp="1"/>
+          </p:cNvSpPr>
+          <p:nvPr>
+            <p:ph type="title" orient="vert"/>
+          </p:nvPr>
+        </p:nvSpPr>
+        <p:spPr>
+          <a:xfrm>
+            <a:off x="8724900" y="365125"/>
+            <a:ext cx="2628900" cy="5811838"/>
+          </a:xfrm>
+        </p:spPr>
+        <p:txBody>
+          <a:bodyPr vert="eaVert"/>
+          <a:lstStyle/>
+          <a:p>
+            <a:r>
+              <a:rPr lang="ko-KR" altLang="en-US"/>
+              <a:t>마스터 제목 스타일 편집</a:t>
+            </a:r>
+            <a:endParaRPr lang="en-US" dirty="0"/>
+          </a:p>
+        </p:txBody>
+      </p:sp>
+      <p:sp>
+        <p:nvSpPr>
+          <p:cNvPr id="3" name="Vertical Text Placeholder 2"/>
+          <p:cNvSpPr>
+            <a:spLocks noGrp="1"/>
+          </p:cNvSpPr>
+          <p:nvPr>
+            <p:ph type="body" orient="vert" idx="1"/>
+          </p:nvPr>
+        </p:nvSpPr>
+        <p:spPr>
+          <a:xfrm>
+            <a:off x="838200" y="365125"/>
+            <a:ext cx="7734300" cy="5811838"/>
+          </a:xfrm>
+        </p:spPr>
+        <p:txBody>
+          <a:bodyPr vert="eaVert"/>
+          <a:lstStyle/>
+          <a:p>
+            <a:pPr lvl="0"/>
+            <a:r>
+              <a:rPr lang="ko-KR" altLang="en-US"/>
+              <a:t>마스터 텍스트 스타일을 편집하려면 클릭</a:t>
+            </a:r>
+          </a:p>
+          <a:p>
+            <a:pPr lvl="1"/>
+            <a:r>
+              <a:rPr lang="ko-KR" altLang="en-US"/>
+              <a:t>두 번째 수준</a:t>
+            </a:r>
+          </a:p>
+          <a:p>
+            <a:pPr lvl="2"/>
+            <a:r>
+              <a:rPr lang="ko-KR" altLang="en-US"/>
+              <a:t>세 번째 수준</a:t>
+            </a:r>
+          </a:p>
+          <a:p>
+            <a:pPr lvl="3"/>
+            <a:r>
+              <a:rPr lang="ko-KR" altLang="en-US"/>
+              <a:t>네 번째 수준</a:t>
+            </a:r>
+          </a:p>
+          <a:p>
+            <a:pPr lvl="4"/>
+            <a:r>
+              <a:rPr lang="ko-KR" altLang="en-US"/>
+              <a:t>다섯 번째 수준</a:t>
+            </a:r>
+            <a:endParaRPr lang="en-US" dirty="0"/>
+          </a:p>
+        </p:txBody>
+      </p:sp>
+      <p:sp>
+        <p:nvSpPr>
+          <p:cNvPr id="4" name="Date Placeholder 3"/>
+          <p:cNvSpPr>
+            <a:spLocks noGrp="1"/>
+          </p:cNvSpPr>
+          <p:nvPr>
+            <p:ph type="dt" sz="half" idx="10"/>
+          </p:nvPr>
+        </p:nvSpPr>
+        <p:spPr/>
+        <p:txBody>
+          <a:bodyPr/>
+          <a:lstStyle/>
+          <a:p>
+            <a:fld id="{C764DE79-268F-4C1A-8933-263129D2AF90}" type="datetimeFigureOut">
+              <a:rPr lang="en-US" dirty="0"/>
+              <a:t>5/16/2026</a:t>
+            </a:fld>
+            <a:endParaRPr lang="en-US" dirty="0"/>
+          </a:p>
+        </p:txBody>
+      </p:sp>
+      <p:sp>
+        <p:nvSpPr>
+          <p:cNvPr id="5" name="Footer Placeholder 4"/>
+          <p:cNvSpPr>
+            <a:spLocks noGrp="1"/>
+          </p:cNvSpPr>
+          <p:nvPr>
+            <p:ph type="ftr" sz="quarter" idx="11"/>
+          </p:nvPr>
+        </p:nvSpPr>
+        <p:spPr/>
+        <p:txBody>
+          <a:bodyPr/>
+          <a:lstStyle/>
+          <a:p>
+            <a:endParaRPr lang="en-US" dirty="0"/>
+          </a:p>
+        </p:txBody>
+      </p:sp>
+      <p:sp>
+        <p:nvSpPr>
+          <p:cNvPr id="6" name="Slide Number Placeholder 5"/>
+          <p:cNvSpPr>
+            <a:spLocks noGrp="1"/>
+          </p:cNvSpPr>
+          <p:nvPr>
+            <p:ph type="sldNum" sz="quarter" idx="12"/>
+          </p:nvPr>
+        </p:nvSpPr>
+        <p:spPr/>
+        <p:txBody>
+          <a:bodyPr/>
+          <a:lstStyle/>
+          <a:p>
+            <a:fld id="{48F63A3B-78C7-47BE-AE5E-E10140E04643}" type="slidenum">
+              <a:rPr lang="en-US" dirty="0"/>
+              <a:t>‹#›</a:t>
+            </a:fld>
+            <a:endParaRPr lang="en-US" dirty="0"/>
+          </a:p>
+        </p:txBody>
+      </p:sp>
+    </p:spTree>
+    <p:extLst>
+      <p:ext uri="{BB962C8B-B14F-4D97-AF65-F5344CB8AC3E}">
+        <p14:creationId xmlns:p14="http://schemas.microsoft.com/office/powerpoint/2010/main" val="1449344520"/>
+      </p:ext>
+    </p:extLst>
+  </p:cSld>
+  <p:clrMapOvr>
+    <a:masterClrMapping/>
+  </p:clrMapOvr>
+  <p:hf sldNum="0" hdr="0" ftr="0" dt="0"/>
+</p:sldLayout>
+</file>
+
+<file path=ppt/slideLayouts/slideLayout12.xml><?xml version="1.0" encoding="utf-8"?>
+<p:sldLayout xmlns:a="http://schemas.openxmlformats.org/drawingml/2006/main" xmlns:r="http://schemas.openxmlformats.org/officeDocument/2006/relationships" xmlns:p="http://schemas.openxmlformats.org/presentationml/2006/main">
   <p:cSld name="DEFAULT">
     <p:bg>
       <p:bgRef idx="1001">
@@ -1364,10 +1997,1785 @@
         </a:xfrm>
       </p:grpSpPr>
     </p:spTree>
+    <p:extLst>
+      <p:ext uri="{BB962C8B-B14F-4D97-AF65-F5344CB8AC3E}">
+        <p14:creationId xmlns:p14="http://schemas.microsoft.com/office/powerpoint/2010/main" val="446069657"/>
+      </p:ext>
+    </p:extLst>
   </p:cSld>
   <p:clrMapOvr>
     <a:masterClrMapping/>
   </p:clrMapOvr>
+</p:sldLayout>
+</file>
+
+<file path=ppt/slideLayouts/slideLayout2.xml><?xml version="1.0" encoding="utf-8"?>
+<p:sldLayout xmlns:a="http://schemas.openxmlformats.org/drawingml/2006/main" xmlns:r="http://schemas.openxmlformats.org/officeDocument/2006/relationships" xmlns:p="http://schemas.openxmlformats.org/presentationml/2006/main" type="obj" preserve="1">
+  <p:cSld name="제목 및 내용">
+    <p:spTree>
+      <p:nvGrpSpPr>
+        <p:cNvPr id="1" name=""/>
+        <p:cNvGrpSpPr/>
+        <p:nvPr/>
+      </p:nvGrpSpPr>
+      <p:grpSpPr>
+        <a:xfrm>
+          <a:off x="0" y="0"/>
+          <a:ext cx="0" cy="0"/>
+          <a:chOff x="0" y="0"/>
+          <a:chExt cx="0" cy="0"/>
+        </a:xfrm>
+      </p:grpSpPr>
+      <p:sp>
+        <p:nvSpPr>
+          <p:cNvPr id="2" name="Title 1"/>
+          <p:cNvSpPr>
+            <a:spLocks noGrp="1"/>
+          </p:cNvSpPr>
+          <p:nvPr>
+            <p:ph type="title"/>
+          </p:nvPr>
+        </p:nvSpPr>
+        <p:spPr/>
+        <p:txBody>
+          <a:bodyPr/>
+          <a:lstStyle/>
+          <a:p>
+            <a:r>
+              <a:rPr lang="ko-KR" altLang="en-US"/>
+              <a:t>마스터 제목 스타일 편집</a:t>
+            </a:r>
+            <a:endParaRPr lang="en-US" dirty="0"/>
+          </a:p>
+        </p:txBody>
+      </p:sp>
+      <p:sp>
+        <p:nvSpPr>
+          <p:cNvPr id="3" name="Content Placeholder 2"/>
+          <p:cNvSpPr>
+            <a:spLocks noGrp="1"/>
+          </p:cNvSpPr>
+          <p:nvPr>
+            <p:ph idx="1"/>
+          </p:nvPr>
+        </p:nvSpPr>
+        <p:spPr/>
+        <p:txBody>
+          <a:bodyPr/>
+          <a:lstStyle/>
+          <a:p>
+            <a:pPr lvl="0"/>
+            <a:r>
+              <a:rPr lang="ko-KR" altLang="en-US"/>
+              <a:t>마스터 텍스트 스타일을 편집하려면 클릭</a:t>
+            </a:r>
+          </a:p>
+          <a:p>
+            <a:pPr lvl="1"/>
+            <a:r>
+              <a:rPr lang="ko-KR" altLang="en-US"/>
+              <a:t>두 번째 수준</a:t>
+            </a:r>
+          </a:p>
+          <a:p>
+            <a:pPr lvl="2"/>
+            <a:r>
+              <a:rPr lang="ko-KR" altLang="en-US"/>
+              <a:t>세 번째 수준</a:t>
+            </a:r>
+          </a:p>
+          <a:p>
+            <a:pPr lvl="3"/>
+            <a:r>
+              <a:rPr lang="ko-KR" altLang="en-US"/>
+              <a:t>네 번째 수준</a:t>
+            </a:r>
+          </a:p>
+          <a:p>
+            <a:pPr lvl="4"/>
+            <a:r>
+              <a:rPr lang="ko-KR" altLang="en-US"/>
+              <a:t>다섯 번째 수준</a:t>
+            </a:r>
+            <a:endParaRPr lang="en-US" dirty="0"/>
+          </a:p>
+        </p:txBody>
+      </p:sp>
+      <p:sp>
+        <p:nvSpPr>
+          <p:cNvPr id="4" name="Date Placeholder 3"/>
+          <p:cNvSpPr>
+            <a:spLocks noGrp="1"/>
+          </p:cNvSpPr>
+          <p:nvPr>
+            <p:ph type="dt" sz="half" idx="10"/>
+          </p:nvPr>
+        </p:nvSpPr>
+        <p:spPr/>
+        <p:txBody>
+          <a:bodyPr/>
+          <a:lstStyle/>
+          <a:p>
+            <a:fld id="{C764DE79-268F-4C1A-8933-263129D2AF90}" type="datetimeFigureOut">
+              <a:rPr lang="en-US" dirty="0"/>
+              <a:t>5/16/2026</a:t>
+            </a:fld>
+            <a:endParaRPr lang="en-US" dirty="0"/>
+          </a:p>
+        </p:txBody>
+      </p:sp>
+      <p:sp>
+        <p:nvSpPr>
+          <p:cNvPr id="5" name="Footer Placeholder 4"/>
+          <p:cNvSpPr>
+            <a:spLocks noGrp="1"/>
+          </p:cNvSpPr>
+          <p:nvPr>
+            <p:ph type="ftr" sz="quarter" idx="11"/>
+          </p:nvPr>
+        </p:nvSpPr>
+        <p:spPr/>
+        <p:txBody>
+          <a:bodyPr/>
+          <a:lstStyle/>
+          <a:p>
+            <a:endParaRPr lang="en-US" dirty="0"/>
+          </a:p>
+        </p:txBody>
+      </p:sp>
+      <p:sp>
+        <p:nvSpPr>
+          <p:cNvPr id="6" name="Slide Number Placeholder 5"/>
+          <p:cNvSpPr>
+            <a:spLocks noGrp="1"/>
+          </p:cNvSpPr>
+          <p:nvPr>
+            <p:ph type="sldNum" sz="quarter" idx="12"/>
+          </p:nvPr>
+        </p:nvSpPr>
+        <p:spPr/>
+        <p:txBody>
+          <a:bodyPr/>
+          <a:lstStyle/>
+          <a:p>
+            <a:fld id="{48F63A3B-78C7-47BE-AE5E-E10140E04643}" type="slidenum">
+              <a:rPr lang="en-US" dirty="0"/>
+              <a:t>‹#›</a:t>
+            </a:fld>
+            <a:endParaRPr lang="en-US" dirty="0"/>
+          </a:p>
+        </p:txBody>
+      </p:sp>
+    </p:spTree>
+    <p:extLst>
+      <p:ext uri="{BB962C8B-B14F-4D97-AF65-F5344CB8AC3E}">
+        <p14:creationId xmlns:p14="http://schemas.microsoft.com/office/powerpoint/2010/main" val="3813780873"/>
+      </p:ext>
+    </p:extLst>
+  </p:cSld>
+  <p:clrMapOvr>
+    <a:masterClrMapping/>
+  </p:clrMapOvr>
+  <p:hf sldNum="0" hdr="0" ftr="0" dt="0"/>
+</p:sldLayout>
+</file>
+
+<file path=ppt/slideLayouts/slideLayout3.xml><?xml version="1.0" encoding="utf-8"?>
+<p:sldLayout xmlns:a="http://schemas.openxmlformats.org/drawingml/2006/main" xmlns:r="http://schemas.openxmlformats.org/officeDocument/2006/relationships" xmlns:p="http://schemas.openxmlformats.org/presentationml/2006/main" type="secHead" preserve="1">
+  <p:cSld name="구역 머리글">
+    <p:spTree>
+      <p:nvGrpSpPr>
+        <p:cNvPr id="1" name=""/>
+        <p:cNvGrpSpPr/>
+        <p:nvPr/>
+      </p:nvGrpSpPr>
+      <p:grpSpPr>
+        <a:xfrm>
+          <a:off x="0" y="0"/>
+          <a:ext cx="0" cy="0"/>
+          <a:chOff x="0" y="0"/>
+          <a:chExt cx="0" cy="0"/>
+        </a:xfrm>
+      </p:grpSpPr>
+      <p:sp>
+        <p:nvSpPr>
+          <p:cNvPr id="2" name="Title 1"/>
+          <p:cNvSpPr>
+            <a:spLocks noGrp="1"/>
+          </p:cNvSpPr>
+          <p:nvPr>
+            <p:ph type="title"/>
+          </p:nvPr>
+        </p:nvSpPr>
+        <p:spPr>
+          <a:xfrm>
+            <a:off x="831850" y="1709738"/>
+            <a:ext cx="10515600" cy="2852737"/>
+          </a:xfrm>
+        </p:spPr>
+        <p:txBody>
+          <a:bodyPr anchor="b"/>
+          <a:lstStyle>
+            <a:lvl1pPr>
+              <a:defRPr sz="6000"/>
+            </a:lvl1pPr>
+          </a:lstStyle>
+          <a:p>
+            <a:r>
+              <a:rPr lang="ko-KR" altLang="en-US"/>
+              <a:t>마스터 제목 스타일 편집</a:t>
+            </a:r>
+            <a:endParaRPr lang="en-US" dirty="0"/>
+          </a:p>
+        </p:txBody>
+      </p:sp>
+      <p:sp>
+        <p:nvSpPr>
+          <p:cNvPr id="3" name="Text Placeholder 2"/>
+          <p:cNvSpPr>
+            <a:spLocks noGrp="1"/>
+          </p:cNvSpPr>
+          <p:nvPr>
+            <p:ph type="body" idx="1"/>
+          </p:nvPr>
+        </p:nvSpPr>
+        <p:spPr>
+          <a:xfrm>
+            <a:off x="831850" y="4589463"/>
+            <a:ext cx="10515600" cy="1500187"/>
+          </a:xfrm>
+        </p:spPr>
+        <p:txBody>
+          <a:bodyPr/>
+          <a:lstStyle>
+            <a:lvl1pPr marL="0" indent="0">
+              <a:buNone/>
+              <a:defRPr sz="2400">
+                <a:solidFill>
+                  <a:schemeClr val="tx1">
+                    <a:tint val="75000"/>
+                  </a:schemeClr>
+                </a:solidFill>
+              </a:defRPr>
+            </a:lvl1pPr>
+            <a:lvl2pPr marL="457200" indent="0">
+              <a:buNone/>
+              <a:defRPr sz="2000">
+                <a:solidFill>
+                  <a:schemeClr val="tx1">
+                    <a:tint val="75000"/>
+                  </a:schemeClr>
+                </a:solidFill>
+              </a:defRPr>
+            </a:lvl2pPr>
+            <a:lvl3pPr marL="914400" indent="0">
+              <a:buNone/>
+              <a:defRPr sz="1800">
+                <a:solidFill>
+                  <a:schemeClr val="tx1">
+                    <a:tint val="75000"/>
+                  </a:schemeClr>
+                </a:solidFill>
+              </a:defRPr>
+            </a:lvl3pPr>
+            <a:lvl4pPr marL="1371600" indent="0">
+              <a:buNone/>
+              <a:defRPr sz="1600">
+                <a:solidFill>
+                  <a:schemeClr val="tx1">
+                    <a:tint val="75000"/>
+                  </a:schemeClr>
+                </a:solidFill>
+              </a:defRPr>
+            </a:lvl4pPr>
+            <a:lvl5pPr marL="1828800" indent="0">
+              <a:buNone/>
+              <a:defRPr sz="1600">
+                <a:solidFill>
+                  <a:schemeClr val="tx1">
+                    <a:tint val="75000"/>
+                  </a:schemeClr>
+                </a:solidFill>
+              </a:defRPr>
+            </a:lvl5pPr>
+            <a:lvl6pPr marL="2286000" indent="0">
+              <a:buNone/>
+              <a:defRPr sz="1600">
+                <a:solidFill>
+                  <a:schemeClr val="tx1">
+                    <a:tint val="75000"/>
+                  </a:schemeClr>
+                </a:solidFill>
+              </a:defRPr>
+            </a:lvl6pPr>
+            <a:lvl7pPr marL="2743200" indent="0">
+              <a:buNone/>
+              <a:defRPr sz="1600">
+                <a:solidFill>
+                  <a:schemeClr val="tx1">
+                    <a:tint val="75000"/>
+                  </a:schemeClr>
+                </a:solidFill>
+              </a:defRPr>
+            </a:lvl7pPr>
+            <a:lvl8pPr marL="3200400" indent="0">
+              <a:buNone/>
+              <a:defRPr sz="1600">
+                <a:solidFill>
+                  <a:schemeClr val="tx1">
+                    <a:tint val="75000"/>
+                  </a:schemeClr>
+                </a:solidFill>
+              </a:defRPr>
+            </a:lvl8pPr>
+            <a:lvl9pPr marL="3657600" indent="0">
+              <a:buNone/>
+              <a:defRPr sz="1600">
+                <a:solidFill>
+                  <a:schemeClr val="tx1">
+                    <a:tint val="75000"/>
+                  </a:schemeClr>
+                </a:solidFill>
+              </a:defRPr>
+            </a:lvl9pPr>
+          </a:lstStyle>
+          <a:p>
+            <a:pPr lvl="0"/>
+            <a:r>
+              <a:rPr lang="ko-KR" altLang="en-US"/>
+              <a:t>마스터 텍스트 스타일을 편집하려면 클릭</a:t>
+            </a:r>
+          </a:p>
+        </p:txBody>
+      </p:sp>
+      <p:sp>
+        <p:nvSpPr>
+          <p:cNvPr id="4" name="Date Placeholder 3"/>
+          <p:cNvSpPr>
+            <a:spLocks noGrp="1"/>
+          </p:cNvSpPr>
+          <p:nvPr>
+            <p:ph type="dt" sz="half" idx="10"/>
+          </p:nvPr>
+        </p:nvSpPr>
+        <p:spPr/>
+        <p:txBody>
+          <a:bodyPr/>
+          <a:lstStyle/>
+          <a:p>
+            <a:fld id="{C764DE79-268F-4C1A-8933-263129D2AF90}" type="datetimeFigureOut">
+              <a:rPr lang="en-US" dirty="0"/>
+              <a:t>5/16/2026</a:t>
+            </a:fld>
+            <a:endParaRPr lang="en-US" dirty="0"/>
+          </a:p>
+        </p:txBody>
+      </p:sp>
+      <p:sp>
+        <p:nvSpPr>
+          <p:cNvPr id="5" name="Footer Placeholder 4"/>
+          <p:cNvSpPr>
+            <a:spLocks noGrp="1"/>
+          </p:cNvSpPr>
+          <p:nvPr>
+            <p:ph type="ftr" sz="quarter" idx="11"/>
+          </p:nvPr>
+        </p:nvSpPr>
+        <p:spPr/>
+        <p:txBody>
+          <a:bodyPr/>
+          <a:lstStyle/>
+          <a:p>
+            <a:endParaRPr lang="en-US" dirty="0"/>
+          </a:p>
+        </p:txBody>
+      </p:sp>
+      <p:sp>
+        <p:nvSpPr>
+          <p:cNvPr id="6" name="Slide Number Placeholder 5"/>
+          <p:cNvSpPr>
+            <a:spLocks noGrp="1"/>
+          </p:cNvSpPr>
+          <p:nvPr>
+            <p:ph type="sldNum" sz="quarter" idx="12"/>
+          </p:nvPr>
+        </p:nvSpPr>
+        <p:spPr/>
+        <p:txBody>
+          <a:bodyPr/>
+          <a:lstStyle/>
+          <a:p>
+            <a:fld id="{48F63A3B-78C7-47BE-AE5E-E10140E04643}" type="slidenum">
+              <a:rPr lang="en-US" dirty="0"/>
+              <a:t>‹#›</a:t>
+            </a:fld>
+            <a:endParaRPr lang="en-US" dirty="0"/>
+          </a:p>
+        </p:txBody>
+      </p:sp>
+    </p:spTree>
+    <p:extLst>
+      <p:ext uri="{BB962C8B-B14F-4D97-AF65-F5344CB8AC3E}">
+        <p14:creationId xmlns:p14="http://schemas.microsoft.com/office/powerpoint/2010/main" val="4243823331"/>
+      </p:ext>
+    </p:extLst>
+  </p:cSld>
+  <p:clrMapOvr>
+    <a:masterClrMapping/>
+  </p:clrMapOvr>
+  <p:hf sldNum="0" hdr="0" ftr="0" dt="0"/>
+</p:sldLayout>
+</file>
+
+<file path=ppt/slideLayouts/slideLayout4.xml><?xml version="1.0" encoding="utf-8"?>
+<p:sldLayout xmlns:a="http://schemas.openxmlformats.org/drawingml/2006/main" xmlns:r="http://schemas.openxmlformats.org/officeDocument/2006/relationships" xmlns:p="http://schemas.openxmlformats.org/presentationml/2006/main" type="twoObj" preserve="1">
+  <p:cSld name="콘텐츠 2개">
+    <p:spTree>
+      <p:nvGrpSpPr>
+        <p:cNvPr id="1" name=""/>
+        <p:cNvGrpSpPr/>
+        <p:nvPr/>
+      </p:nvGrpSpPr>
+      <p:grpSpPr>
+        <a:xfrm>
+          <a:off x="0" y="0"/>
+          <a:ext cx="0" cy="0"/>
+          <a:chOff x="0" y="0"/>
+          <a:chExt cx="0" cy="0"/>
+        </a:xfrm>
+      </p:grpSpPr>
+      <p:sp>
+        <p:nvSpPr>
+          <p:cNvPr id="2" name="Title 1"/>
+          <p:cNvSpPr>
+            <a:spLocks noGrp="1"/>
+          </p:cNvSpPr>
+          <p:nvPr>
+            <p:ph type="title"/>
+          </p:nvPr>
+        </p:nvSpPr>
+        <p:spPr/>
+        <p:txBody>
+          <a:bodyPr/>
+          <a:lstStyle/>
+          <a:p>
+            <a:r>
+              <a:rPr lang="ko-KR" altLang="en-US"/>
+              <a:t>마스터 제목 스타일 편집</a:t>
+            </a:r>
+            <a:endParaRPr lang="en-US" dirty="0"/>
+          </a:p>
+        </p:txBody>
+      </p:sp>
+      <p:sp>
+        <p:nvSpPr>
+          <p:cNvPr id="3" name="Content Placeholder 2"/>
+          <p:cNvSpPr>
+            <a:spLocks noGrp="1"/>
+          </p:cNvSpPr>
+          <p:nvPr>
+            <p:ph sz="half" idx="1"/>
+          </p:nvPr>
+        </p:nvSpPr>
+        <p:spPr>
+          <a:xfrm>
+            <a:off x="838200" y="1825625"/>
+            <a:ext cx="5181600" cy="4351338"/>
+          </a:xfrm>
+        </p:spPr>
+        <p:txBody>
+          <a:bodyPr/>
+          <a:lstStyle/>
+          <a:p>
+            <a:pPr lvl="0"/>
+            <a:r>
+              <a:rPr lang="ko-KR" altLang="en-US"/>
+              <a:t>마스터 텍스트 스타일을 편집하려면 클릭</a:t>
+            </a:r>
+          </a:p>
+          <a:p>
+            <a:pPr lvl="1"/>
+            <a:r>
+              <a:rPr lang="ko-KR" altLang="en-US"/>
+              <a:t>두 번째 수준</a:t>
+            </a:r>
+          </a:p>
+          <a:p>
+            <a:pPr lvl="2"/>
+            <a:r>
+              <a:rPr lang="ko-KR" altLang="en-US"/>
+              <a:t>세 번째 수준</a:t>
+            </a:r>
+          </a:p>
+          <a:p>
+            <a:pPr lvl="3"/>
+            <a:r>
+              <a:rPr lang="ko-KR" altLang="en-US"/>
+              <a:t>네 번째 수준</a:t>
+            </a:r>
+          </a:p>
+          <a:p>
+            <a:pPr lvl="4"/>
+            <a:r>
+              <a:rPr lang="ko-KR" altLang="en-US"/>
+              <a:t>다섯 번째 수준</a:t>
+            </a:r>
+            <a:endParaRPr lang="en-US" dirty="0"/>
+          </a:p>
+        </p:txBody>
+      </p:sp>
+      <p:sp>
+        <p:nvSpPr>
+          <p:cNvPr id="4" name="Content Placeholder 3"/>
+          <p:cNvSpPr>
+            <a:spLocks noGrp="1"/>
+          </p:cNvSpPr>
+          <p:nvPr>
+            <p:ph sz="half" idx="2"/>
+          </p:nvPr>
+        </p:nvSpPr>
+        <p:spPr>
+          <a:xfrm>
+            <a:off x="6172200" y="1825625"/>
+            <a:ext cx="5181600" cy="4351338"/>
+          </a:xfrm>
+        </p:spPr>
+        <p:txBody>
+          <a:bodyPr/>
+          <a:lstStyle/>
+          <a:p>
+            <a:pPr lvl="0"/>
+            <a:r>
+              <a:rPr lang="ko-KR" altLang="en-US"/>
+              <a:t>마스터 텍스트 스타일을 편집하려면 클릭</a:t>
+            </a:r>
+          </a:p>
+          <a:p>
+            <a:pPr lvl="1"/>
+            <a:r>
+              <a:rPr lang="ko-KR" altLang="en-US"/>
+              <a:t>두 번째 수준</a:t>
+            </a:r>
+          </a:p>
+          <a:p>
+            <a:pPr lvl="2"/>
+            <a:r>
+              <a:rPr lang="ko-KR" altLang="en-US"/>
+              <a:t>세 번째 수준</a:t>
+            </a:r>
+          </a:p>
+          <a:p>
+            <a:pPr lvl="3"/>
+            <a:r>
+              <a:rPr lang="ko-KR" altLang="en-US"/>
+              <a:t>네 번째 수준</a:t>
+            </a:r>
+          </a:p>
+          <a:p>
+            <a:pPr lvl="4"/>
+            <a:r>
+              <a:rPr lang="ko-KR" altLang="en-US"/>
+              <a:t>다섯 번째 수준</a:t>
+            </a:r>
+            <a:endParaRPr lang="en-US" dirty="0"/>
+          </a:p>
+        </p:txBody>
+      </p:sp>
+      <p:sp>
+        <p:nvSpPr>
+          <p:cNvPr id="5" name="Date Placeholder 4"/>
+          <p:cNvSpPr>
+            <a:spLocks noGrp="1"/>
+          </p:cNvSpPr>
+          <p:nvPr>
+            <p:ph type="dt" sz="half" idx="10"/>
+          </p:nvPr>
+        </p:nvSpPr>
+        <p:spPr/>
+        <p:txBody>
+          <a:bodyPr/>
+          <a:lstStyle/>
+          <a:p>
+            <a:fld id="{C764DE79-268F-4C1A-8933-263129D2AF90}" type="datetimeFigureOut">
+              <a:rPr lang="en-US" dirty="0"/>
+              <a:t>5/16/2026</a:t>
+            </a:fld>
+            <a:endParaRPr lang="en-US" dirty="0"/>
+          </a:p>
+        </p:txBody>
+      </p:sp>
+      <p:sp>
+        <p:nvSpPr>
+          <p:cNvPr id="6" name="Footer Placeholder 5"/>
+          <p:cNvSpPr>
+            <a:spLocks noGrp="1"/>
+          </p:cNvSpPr>
+          <p:nvPr>
+            <p:ph type="ftr" sz="quarter" idx="11"/>
+          </p:nvPr>
+        </p:nvSpPr>
+        <p:spPr/>
+        <p:txBody>
+          <a:bodyPr/>
+          <a:lstStyle/>
+          <a:p>
+            <a:endParaRPr lang="en-US" dirty="0"/>
+          </a:p>
+        </p:txBody>
+      </p:sp>
+      <p:sp>
+        <p:nvSpPr>
+          <p:cNvPr id="7" name="Slide Number Placeholder 6"/>
+          <p:cNvSpPr>
+            <a:spLocks noGrp="1"/>
+          </p:cNvSpPr>
+          <p:nvPr>
+            <p:ph type="sldNum" sz="quarter" idx="12"/>
+          </p:nvPr>
+        </p:nvSpPr>
+        <p:spPr/>
+        <p:txBody>
+          <a:bodyPr/>
+          <a:lstStyle/>
+          <a:p>
+            <a:fld id="{48F63A3B-78C7-47BE-AE5E-E10140E04643}" type="slidenum">
+              <a:rPr lang="en-US" dirty="0"/>
+              <a:t>‹#›</a:t>
+            </a:fld>
+            <a:endParaRPr lang="en-US" dirty="0"/>
+          </a:p>
+        </p:txBody>
+      </p:sp>
+    </p:spTree>
+    <p:extLst>
+      <p:ext uri="{BB962C8B-B14F-4D97-AF65-F5344CB8AC3E}">
+        <p14:creationId xmlns:p14="http://schemas.microsoft.com/office/powerpoint/2010/main" val="3751274066"/>
+      </p:ext>
+    </p:extLst>
+  </p:cSld>
+  <p:clrMapOvr>
+    <a:masterClrMapping/>
+  </p:clrMapOvr>
+  <p:hf sldNum="0" hdr="0" ftr="0" dt="0"/>
+</p:sldLayout>
+</file>
+
+<file path=ppt/slideLayouts/slideLayout5.xml><?xml version="1.0" encoding="utf-8"?>
+<p:sldLayout xmlns:a="http://schemas.openxmlformats.org/drawingml/2006/main" xmlns:r="http://schemas.openxmlformats.org/officeDocument/2006/relationships" xmlns:p="http://schemas.openxmlformats.org/presentationml/2006/main" type="twoTxTwoObj" preserve="1">
+  <p:cSld name="비교">
+    <p:spTree>
+      <p:nvGrpSpPr>
+        <p:cNvPr id="1" name=""/>
+        <p:cNvGrpSpPr/>
+        <p:nvPr/>
+      </p:nvGrpSpPr>
+      <p:grpSpPr>
+        <a:xfrm>
+          <a:off x="0" y="0"/>
+          <a:ext cx="0" cy="0"/>
+          <a:chOff x="0" y="0"/>
+          <a:chExt cx="0" cy="0"/>
+        </a:xfrm>
+      </p:grpSpPr>
+      <p:sp>
+        <p:nvSpPr>
+          <p:cNvPr id="2" name="Title 1"/>
+          <p:cNvSpPr>
+            <a:spLocks noGrp="1"/>
+          </p:cNvSpPr>
+          <p:nvPr>
+            <p:ph type="title"/>
+          </p:nvPr>
+        </p:nvSpPr>
+        <p:spPr>
+          <a:xfrm>
+            <a:off x="839788" y="365125"/>
+            <a:ext cx="10515600" cy="1325563"/>
+          </a:xfrm>
+        </p:spPr>
+        <p:txBody>
+          <a:bodyPr/>
+          <a:lstStyle/>
+          <a:p>
+            <a:r>
+              <a:rPr lang="ko-KR" altLang="en-US"/>
+              <a:t>마스터 제목 스타일 편집</a:t>
+            </a:r>
+            <a:endParaRPr lang="en-US" dirty="0"/>
+          </a:p>
+        </p:txBody>
+      </p:sp>
+      <p:sp>
+        <p:nvSpPr>
+          <p:cNvPr id="3" name="Text Placeholder 2"/>
+          <p:cNvSpPr>
+            <a:spLocks noGrp="1"/>
+          </p:cNvSpPr>
+          <p:nvPr>
+            <p:ph type="body" idx="1"/>
+          </p:nvPr>
+        </p:nvSpPr>
+        <p:spPr>
+          <a:xfrm>
+            <a:off x="839788" y="1681163"/>
+            <a:ext cx="5157787" cy="823912"/>
+          </a:xfrm>
+        </p:spPr>
+        <p:txBody>
+          <a:bodyPr anchor="b"/>
+          <a:lstStyle>
+            <a:lvl1pPr marL="0" indent="0">
+              <a:buNone/>
+              <a:defRPr sz="2400" b="1"/>
+            </a:lvl1pPr>
+            <a:lvl2pPr marL="457200" indent="0">
+              <a:buNone/>
+              <a:defRPr sz="2000" b="1"/>
+            </a:lvl2pPr>
+            <a:lvl3pPr marL="914400" indent="0">
+              <a:buNone/>
+              <a:defRPr sz="1800" b="1"/>
+            </a:lvl3pPr>
+            <a:lvl4pPr marL="1371600" indent="0">
+              <a:buNone/>
+              <a:defRPr sz="1600" b="1"/>
+            </a:lvl4pPr>
+            <a:lvl5pPr marL="1828800" indent="0">
+              <a:buNone/>
+              <a:defRPr sz="1600" b="1"/>
+            </a:lvl5pPr>
+            <a:lvl6pPr marL="2286000" indent="0">
+              <a:buNone/>
+              <a:defRPr sz="1600" b="1"/>
+            </a:lvl6pPr>
+            <a:lvl7pPr marL="2743200" indent="0">
+              <a:buNone/>
+              <a:defRPr sz="1600" b="1"/>
+            </a:lvl7pPr>
+            <a:lvl8pPr marL="3200400" indent="0">
+              <a:buNone/>
+              <a:defRPr sz="1600" b="1"/>
+            </a:lvl8pPr>
+            <a:lvl9pPr marL="3657600" indent="0">
+              <a:buNone/>
+              <a:defRPr sz="1600" b="1"/>
+            </a:lvl9pPr>
+          </a:lstStyle>
+          <a:p>
+            <a:pPr lvl="0"/>
+            <a:r>
+              <a:rPr lang="ko-KR" altLang="en-US"/>
+              <a:t>마스터 텍스트 스타일을 편집하려면 클릭</a:t>
+            </a:r>
+          </a:p>
+        </p:txBody>
+      </p:sp>
+      <p:sp>
+        <p:nvSpPr>
+          <p:cNvPr id="4" name="Content Placeholder 3"/>
+          <p:cNvSpPr>
+            <a:spLocks noGrp="1"/>
+          </p:cNvSpPr>
+          <p:nvPr>
+            <p:ph sz="half" idx="2"/>
+          </p:nvPr>
+        </p:nvSpPr>
+        <p:spPr>
+          <a:xfrm>
+            <a:off x="839788" y="2505075"/>
+            <a:ext cx="5157787" cy="3684588"/>
+          </a:xfrm>
+        </p:spPr>
+        <p:txBody>
+          <a:bodyPr/>
+          <a:lstStyle/>
+          <a:p>
+            <a:pPr lvl="0"/>
+            <a:r>
+              <a:rPr lang="ko-KR" altLang="en-US"/>
+              <a:t>마스터 텍스트 스타일을 편집하려면 클릭</a:t>
+            </a:r>
+          </a:p>
+          <a:p>
+            <a:pPr lvl="1"/>
+            <a:r>
+              <a:rPr lang="ko-KR" altLang="en-US"/>
+              <a:t>두 번째 수준</a:t>
+            </a:r>
+          </a:p>
+          <a:p>
+            <a:pPr lvl="2"/>
+            <a:r>
+              <a:rPr lang="ko-KR" altLang="en-US"/>
+              <a:t>세 번째 수준</a:t>
+            </a:r>
+          </a:p>
+          <a:p>
+            <a:pPr lvl="3"/>
+            <a:r>
+              <a:rPr lang="ko-KR" altLang="en-US"/>
+              <a:t>네 번째 수준</a:t>
+            </a:r>
+          </a:p>
+          <a:p>
+            <a:pPr lvl="4"/>
+            <a:r>
+              <a:rPr lang="ko-KR" altLang="en-US"/>
+              <a:t>다섯 번째 수준</a:t>
+            </a:r>
+            <a:endParaRPr lang="en-US" dirty="0"/>
+          </a:p>
+        </p:txBody>
+      </p:sp>
+      <p:sp>
+        <p:nvSpPr>
+          <p:cNvPr id="5" name="Text Placeholder 4"/>
+          <p:cNvSpPr>
+            <a:spLocks noGrp="1"/>
+          </p:cNvSpPr>
+          <p:nvPr>
+            <p:ph type="body" sz="quarter" idx="3"/>
+          </p:nvPr>
+        </p:nvSpPr>
+        <p:spPr>
+          <a:xfrm>
+            <a:off x="6172200" y="1681163"/>
+            <a:ext cx="5183188" cy="823912"/>
+          </a:xfrm>
+        </p:spPr>
+        <p:txBody>
+          <a:bodyPr anchor="b"/>
+          <a:lstStyle>
+            <a:lvl1pPr marL="0" indent="0">
+              <a:buNone/>
+              <a:defRPr sz="2400" b="1"/>
+            </a:lvl1pPr>
+            <a:lvl2pPr marL="457200" indent="0">
+              <a:buNone/>
+              <a:defRPr sz="2000" b="1"/>
+            </a:lvl2pPr>
+            <a:lvl3pPr marL="914400" indent="0">
+              <a:buNone/>
+              <a:defRPr sz="1800" b="1"/>
+            </a:lvl3pPr>
+            <a:lvl4pPr marL="1371600" indent="0">
+              <a:buNone/>
+              <a:defRPr sz="1600" b="1"/>
+            </a:lvl4pPr>
+            <a:lvl5pPr marL="1828800" indent="0">
+              <a:buNone/>
+              <a:defRPr sz="1600" b="1"/>
+            </a:lvl5pPr>
+            <a:lvl6pPr marL="2286000" indent="0">
+              <a:buNone/>
+              <a:defRPr sz="1600" b="1"/>
+            </a:lvl6pPr>
+            <a:lvl7pPr marL="2743200" indent="0">
+              <a:buNone/>
+              <a:defRPr sz="1600" b="1"/>
+            </a:lvl7pPr>
+            <a:lvl8pPr marL="3200400" indent="0">
+              <a:buNone/>
+              <a:defRPr sz="1600" b="1"/>
+            </a:lvl8pPr>
+            <a:lvl9pPr marL="3657600" indent="0">
+              <a:buNone/>
+              <a:defRPr sz="1600" b="1"/>
+            </a:lvl9pPr>
+          </a:lstStyle>
+          <a:p>
+            <a:pPr lvl="0"/>
+            <a:r>
+              <a:rPr lang="ko-KR" altLang="en-US"/>
+              <a:t>마스터 텍스트 스타일을 편집하려면 클릭</a:t>
+            </a:r>
+          </a:p>
+        </p:txBody>
+      </p:sp>
+      <p:sp>
+        <p:nvSpPr>
+          <p:cNvPr id="6" name="Content Placeholder 5"/>
+          <p:cNvSpPr>
+            <a:spLocks noGrp="1"/>
+          </p:cNvSpPr>
+          <p:nvPr>
+            <p:ph sz="quarter" idx="4"/>
+          </p:nvPr>
+        </p:nvSpPr>
+        <p:spPr>
+          <a:xfrm>
+            <a:off x="6172200" y="2505075"/>
+            <a:ext cx="5183188" cy="3684588"/>
+          </a:xfrm>
+        </p:spPr>
+        <p:txBody>
+          <a:bodyPr/>
+          <a:lstStyle/>
+          <a:p>
+            <a:pPr lvl="0"/>
+            <a:r>
+              <a:rPr lang="ko-KR" altLang="en-US"/>
+              <a:t>마스터 텍스트 스타일을 편집하려면 클릭</a:t>
+            </a:r>
+          </a:p>
+          <a:p>
+            <a:pPr lvl="1"/>
+            <a:r>
+              <a:rPr lang="ko-KR" altLang="en-US"/>
+              <a:t>두 번째 수준</a:t>
+            </a:r>
+          </a:p>
+          <a:p>
+            <a:pPr lvl="2"/>
+            <a:r>
+              <a:rPr lang="ko-KR" altLang="en-US"/>
+              <a:t>세 번째 수준</a:t>
+            </a:r>
+          </a:p>
+          <a:p>
+            <a:pPr lvl="3"/>
+            <a:r>
+              <a:rPr lang="ko-KR" altLang="en-US"/>
+              <a:t>네 번째 수준</a:t>
+            </a:r>
+          </a:p>
+          <a:p>
+            <a:pPr lvl="4"/>
+            <a:r>
+              <a:rPr lang="ko-KR" altLang="en-US"/>
+              <a:t>다섯 번째 수준</a:t>
+            </a:r>
+            <a:endParaRPr lang="en-US" dirty="0"/>
+          </a:p>
+        </p:txBody>
+      </p:sp>
+      <p:sp>
+        <p:nvSpPr>
+          <p:cNvPr id="7" name="Date Placeholder 6"/>
+          <p:cNvSpPr>
+            <a:spLocks noGrp="1"/>
+          </p:cNvSpPr>
+          <p:nvPr>
+            <p:ph type="dt" sz="half" idx="10"/>
+          </p:nvPr>
+        </p:nvSpPr>
+        <p:spPr/>
+        <p:txBody>
+          <a:bodyPr/>
+          <a:lstStyle/>
+          <a:p>
+            <a:fld id="{C764DE79-268F-4C1A-8933-263129D2AF90}" type="datetimeFigureOut">
+              <a:rPr lang="en-US" dirty="0"/>
+              <a:t>5/16/2026</a:t>
+            </a:fld>
+            <a:endParaRPr lang="en-US" dirty="0"/>
+          </a:p>
+        </p:txBody>
+      </p:sp>
+      <p:sp>
+        <p:nvSpPr>
+          <p:cNvPr id="8" name="Footer Placeholder 7"/>
+          <p:cNvSpPr>
+            <a:spLocks noGrp="1"/>
+          </p:cNvSpPr>
+          <p:nvPr>
+            <p:ph type="ftr" sz="quarter" idx="11"/>
+          </p:nvPr>
+        </p:nvSpPr>
+        <p:spPr/>
+        <p:txBody>
+          <a:bodyPr/>
+          <a:lstStyle/>
+          <a:p>
+            <a:endParaRPr lang="en-US" dirty="0"/>
+          </a:p>
+        </p:txBody>
+      </p:sp>
+      <p:sp>
+        <p:nvSpPr>
+          <p:cNvPr id="9" name="Slide Number Placeholder 8"/>
+          <p:cNvSpPr>
+            <a:spLocks noGrp="1"/>
+          </p:cNvSpPr>
+          <p:nvPr>
+            <p:ph type="sldNum" sz="quarter" idx="12"/>
+          </p:nvPr>
+        </p:nvSpPr>
+        <p:spPr/>
+        <p:txBody>
+          <a:bodyPr/>
+          <a:lstStyle/>
+          <a:p>
+            <a:fld id="{48F63A3B-78C7-47BE-AE5E-E10140E04643}" type="slidenum">
+              <a:rPr lang="en-US" dirty="0"/>
+              <a:t>‹#›</a:t>
+            </a:fld>
+            <a:endParaRPr lang="en-US" dirty="0"/>
+          </a:p>
+        </p:txBody>
+      </p:sp>
+    </p:spTree>
+    <p:extLst>
+      <p:ext uri="{BB962C8B-B14F-4D97-AF65-F5344CB8AC3E}">
+        <p14:creationId xmlns:p14="http://schemas.microsoft.com/office/powerpoint/2010/main" val="1551089929"/>
+      </p:ext>
+    </p:extLst>
+  </p:cSld>
+  <p:clrMapOvr>
+    <a:masterClrMapping/>
+  </p:clrMapOvr>
+  <p:hf sldNum="0" hdr="0" ftr="0" dt="0"/>
+</p:sldLayout>
+</file>
+
+<file path=ppt/slideLayouts/slideLayout6.xml><?xml version="1.0" encoding="utf-8"?>
+<p:sldLayout xmlns:a="http://schemas.openxmlformats.org/drawingml/2006/main" xmlns:r="http://schemas.openxmlformats.org/officeDocument/2006/relationships" xmlns:p="http://schemas.openxmlformats.org/presentationml/2006/main" type="titleOnly" preserve="1">
+  <p:cSld name="제목만">
+    <p:spTree>
+      <p:nvGrpSpPr>
+        <p:cNvPr id="1" name=""/>
+        <p:cNvGrpSpPr/>
+        <p:nvPr/>
+      </p:nvGrpSpPr>
+      <p:grpSpPr>
+        <a:xfrm>
+          <a:off x="0" y="0"/>
+          <a:ext cx="0" cy="0"/>
+          <a:chOff x="0" y="0"/>
+          <a:chExt cx="0" cy="0"/>
+        </a:xfrm>
+      </p:grpSpPr>
+      <p:sp>
+        <p:nvSpPr>
+          <p:cNvPr id="2" name="Title 1"/>
+          <p:cNvSpPr>
+            <a:spLocks noGrp="1"/>
+          </p:cNvSpPr>
+          <p:nvPr>
+            <p:ph type="title"/>
+          </p:nvPr>
+        </p:nvSpPr>
+        <p:spPr/>
+        <p:txBody>
+          <a:bodyPr/>
+          <a:lstStyle/>
+          <a:p>
+            <a:r>
+              <a:rPr lang="ko-KR" altLang="en-US"/>
+              <a:t>마스터 제목 스타일 편집</a:t>
+            </a:r>
+            <a:endParaRPr lang="en-US" dirty="0"/>
+          </a:p>
+        </p:txBody>
+      </p:sp>
+      <p:sp>
+        <p:nvSpPr>
+          <p:cNvPr id="3" name="Date Placeholder 2"/>
+          <p:cNvSpPr>
+            <a:spLocks noGrp="1"/>
+          </p:cNvSpPr>
+          <p:nvPr>
+            <p:ph type="dt" sz="half" idx="10"/>
+          </p:nvPr>
+        </p:nvSpPr>
+        <p:spPr/>
+        <p:txBody>
+          <a:bodyPr/>
+          <a:lstStyle/>
+          <a:p>
+            <a:fld id="{C764DE79-268F-4C1A-8933-263129D2AF90}" type="datetimeFigureOut">
+              <a:rPr lang="en-US" dirty="0"/>
+              <a:t>5/16/2026</a:t>
+            </a:fld>
+            <a:endParaRPr lang="en-US" dirty="0"/>
+          </a:p>
+        </p:txBody>
+      </p:sp>
+      <p:sp>
+        <p:nvSpPr>
+          <p:cNvPr id="4" name="Footer Placeholder 3"/>
+          <p:cNvSpPr>
+            <a:spLocks noGrp="1"/>
+          </p:cNvSpPr>
+          <p:nvPr>
+            <p:ph type="ftr" sz="quarter" idx="11"/>
+          </p:nvPr>
+        </p:nvSpPr>
+        <p:spPr/>
+        <p:txBody>
+          <a:bodyPr/>
+          <a:lstStyle/>
+          <a:p>
+            <a:endParaRPr lang="en-US" dirty="0"/>
+          </a:p>
+        </p:txBody>
+      </p:sp>
+      <p:sp>
+        <p:nvSpPr>
+          <p:cNvPr id="5" name="Slide Number Placeholder 4"/>
+          <p:cNvSpPr>
+            <a:spLocks noGrp="1"/>
+          </p:cNvSpPr>
+          <p:nvPr>
+            <p:ph type="sldNum" sz="quarter" idx="12"/>
+          </p:nvPr>
+        </p:nvSpPr>
+        <p:spPr/>
+        <p:txBody>
+          <a:bodyPr/>
+          <a:lstStyle/>
+          <a:p>
+            <a:fld id="{48F63A3B-78C7-47BE-AE5E-E10140E04643}" type="slidenum">
+              <a:rPr lang="en-US" dirty="0"/>
+              <a:t>‹#›</a:t>
+            </a:fld>
+            <a:endParaRPr lang="en-US" dirty="0"/>
+          </a:p>
+        </p:txBody>
+      </p:sp>
+    </p:spTree>
+    <p:extLst>
+      <p:ext uri="{BB962C8B-B14F-4D97-AF65-F5344CB8AC3E}">
+        <p14:creationId xmlns:p14="http://schemas.microsoft.com/office/powerpoint/2010/main" val="3598482301"/>
+      </p:ext>
+    </p:extLst>
+  </p:cSld>
+  <p:clrMapOvr>
+    <a:masterClrMapping/>
+  </p:clrMapOvr>
+  <p:hf sldNum="0" hdr="0" ftr="0" dt="0"/>
+</p:sldLayout>
+</file>
+
+<file path=ppt/slideLayouts/slideLayout7.xml><?xml version="1.0" encoding="utf-8"?>
+<p:sldLayout xmlns:a="http://schemas.openxmlformats.org/drawingml/2006/main" xmlns:r="http://schemas.openxmlformats.org/officeDocument/2006/relationships" xmlns:p="http://schemas.openxmlformats.org/presentationml/2006/main" type="blank" preserve="1">
+  <p:cSld name="빈 화면">
+    <p:spTree>
+      <p:nvGrpSpPr>
+        <p:cNvPr id="1" name=""/>
+        <p:cNvGrpSpPr/>
+        <p:nvPr/>
+      </p:nvGrpSpPr>
+      <p:grpSpPr>
+        <a:xfrm>
+          <a:off x="0" y="0"/>
+          <a:ext cx="0" cy="0"/>
+          <a:chOff x="0" y="0"/>
+          <a:chExt cx="0" cy="0"/>
+        </a:xfrm>
+      </p:grpSpPr>
+      <p:sp>
+        <p:nvSpPr>
+          <p:cNvPr id="2" name="Date Placeholder 1"/>
+          <p:cNvSpPr>
+            <a:spLocks noGrp="1"/>
+          </p:cNvSpPr>
+          <p:nvPr>
+            <p:ph type="dt" sz="half" idx="10"/>
+          </p:nvPr>
+        </p:nvSpPr>
+        <p:spPr/>
+        <p:txBody>
+          <a:bodyPr/>
+          <a:lstStyle/>
+          <a:p>
+            <a:fld id="{C764DE79-268F-4C1A-8933-263129D2AF90}" type="datetimeFigureOut">
+              <a:rPr lang="en-US" dirty="0"/>
+              <a:t>5/16/2026</a:t>
+            </a:fld>
+            <a:endParaRPr lang="en-US" dirty="0"/>
+          </a:p>
+        </p:txBody>
+      </p:sp>
+      <p:sp>
+        <p:nvSpPr>
+          <p:cNvPr id="3" name="Footer Placeholder 2"/>
+          <p:cNvSpPr>
+            <a:spLocks noGrp="1"/>
+          </p:cNvSpPr>
+          <p:nvPr>
+            <p:ph type="ftr" sz="quarter" idx="11"/>
+          </p:nvPr>
+        </p:nvSpPr>
+        <p:spPr/>
+        <p:txBody>
+          <a:bodyPr/>
+          <a:lstStyle/>
+          <a:p>
+            <a:endParaRPr lang="en-US" dirty="0"/>
+          </a:p>
+        </p:txBody>
+      </p:sp>
+      <p:sp>
+        <p:nvSpPr>
+          <p:cNvPr id="4" name="Slide Number Placeholder 3"/>
+          <p:cNvSpPr>
+            <a:spLocks noGrp="1"/>
+          </p:cNvSpPr>
+          <p:nvPr>
+            <p:ph type="sldNum" sz="quarter" idx="12"/>
+          </p:nvPr>
+        </p:nvSpPr>
+        <p:spPr/>
+        <p:txBody>
+          <a:bodyPr/>
+          <a:lstStyle/>
+          <a:p>
+            <a:fld id="{48F63A3B-78C7-47BE-AE5E-E10140E04643}" type="slidenum">
+              <a:rPr lang="en-US" dirty="0"/>
+              <a:t>‹#›</a:t>
+            </a:fld>
+            <a:endParaRPr lang="en-US" dirty="0"/>
+          </a:p>
+        </p:txBody>
+      </p:sp>
+    </p:spTree>
+    <p:extLst>
+      <p:ext uri="{BB962C8B-B14F-4D97-AF65-F5344CB8AC3E}">
+        <p14:creationId xmlns:p14="http://schemas.microsoft.com/office/powerpoint/2010/main" val="4036396428"/>
+      </p:ext>
+    </p:extLst>
+  </p:cSld>
+  <p:clrMapOvr>
+    <a:masterClrMapping/>
+  </p:clrMapOvr>
+  <p:hf sldNum="0" hdr="0" ftr="0" dt="0"/>
+</p:sldLayout>
+</file>
+
+<file path=ppt/slideLayouts/slideLayout8.xml><?xml version="1.0" encoding="utf-8"?>
+<p:sldLayout xmlns:a="http://schemas.openxmlformats.org/drawingml/2006/main" xmlns:r="http://schemas.openxmlformats.org/officeDocument/2006/relationships" xmlns:p="http://schemas.openxmlformats.org/presentationml/2006/main" type="objTx" preserve="1">
+  <p:cSld name="캡션 있는 콘텐츠">
+    <p:spTree>
+      <p:nvGrpSpPr>
+        <p:cNvPr id="1" name=""/>
+        <p:cNvGrpSpPr/>
+        <p:nvPr/>
+      </p:nvGrpSpPr>
+      <p:grpSpPr>
+        <a:xfrm>
+          <a:off x="0" y="0"/>
+          <a:ext cx="0" cy="0"/>
+          <a:chOff x="0" y="0"/>
+          <a:chExt cx="0" cy="0"/>
+        </a:xfrm>
+      </p:grpSpPr>
+      <p:sp>
+        <p:nvSpPr>
+          <p:cNvPr id="2" name="Title 1"/>
+          <p:cNvSpPr>
+            <a:spLocks noGrp="1"/>
+          </p:cNvSpPr>
+          <p:nvPr>
+            <p:ph type="title"/>
+          </p:nvPr>
+        </p:nvSpPr>
+        <p:spPr>
+          <a:xfrm>
+            <a:off x="839788" y="457200"/>
+            <a:ext cx="3932237" cy="1600200"/>
+          </a:xfrm>
+        </p:spPr>
+        <p:txBody>
+          <a:bodyPr anchor="b"/>
+          <a:lstStyle>
+            <a:lvl1pPr>
+              <a:defRPr sz="3200"/>
+            </a:lvl1pPr>
+          </a:lstStyle>
+          <a:p>
+            <a:r>
+              <a:rPr lang="ko-KR" altLang="en-US"/>
+              <a:t>마스터 제목 스타일 편집</a:t>
+            </a:r>
+            <a:endParaRPr lang="en-US" dirty="0"/>
+          </a:p>
+        </p:txBody>
+      </p:sp>
+      <p:sp>
+        <p:nvSpPr>
+          <p:cNvPr id="3" name="Content Placeholder 2"/>
+          <p:cNvSpPr>
+            <a:spLocks noGrp="1"/>
+          </p:cNvSpPr>
+          <p:nvPr>
+            <p:ph idx="1"/>
+          </p:nvPr>
+        </p:nvSpPr>
+        <p:spPr>
+          <a:xfrm>
+            <a:off x="5183188" y="987425"/>
+            <a:ext cx="6172200" cy="4873625"/>
+          </a:xfrm>
+        </p:spPr>
+        <p:txBody>
+          <a:bodyPr/>
+          <a:lstStyle>
+            <a:lvl1pPr>
+              <a:defRPr sz="3200"/>
+            </a:lvl1pPr>
+            <a:lvl2pPr>
+              <a:defRPr sz="2800"/>
+            </a:lvl2pPr>
+            <a:lvl3pPr>
+              <a:defRPr sz="2400"/>
+            </a:lvl3pPr>
+            <a:lvl4pPr>
+              <a:defRPr sz="2000"/>
+            </a:lvl4pPr>
+            <a:lvl5pPr>
+              <a:defRPr sz="2000"/>
+            </a:lvl5pPr>
+            <a:lvl6pPr>
+              <a:defRPr sz="2000"/>
+            </a:lvl6pPr>
+            <a:lvl7pPr>
+              <a:defRPr sz="2000"/>
+            </a:lvl7pPr>
+            <a:lvl8pPr>
+              <a:defRPr sz="2000"/>
+            </a:lvl8pPr>
+            <a:lvl9pPr>
+              <a:defRPr sz="2000"/>
+            </a:lvl9pPr>
+          </a:lstStyle>
+          <a:p>
+            <a:pPr lvl="0"/>
+            <a:r>
+              <a:rPr lang="ko-KR" altLang="en-US"/>
+              <a:t>마스터 텍스트 스타일을 편집하려면 클릭</a:t>
+            </a:r>
+          </a:p>
+          <a:p>
+            <a:pPr lvl="1"/>
+            <a:r>
+              <a:rPr lang="ko-KR" altLang="en-US"/>
+              <a:t>두 번째 수준</a:t>
+            </a:r>
+          </a:p>
+          <a:p>
+            <a:pPr lvl="2"/>
+            <a:r>
+              <a:rPr lang="ko-KR" altLang="en-US"/>
+              <a:t>세 번째 수준</a:t>
+            </a:r>
+          </a:p>
+          <a:p>
+            <a:pPr lvl="3"/>
+            <a:r>
+              <a:rPr lang="ko-KR" altLang="en-US"/>
+              <a:t>네 번째 수준</a:t>
+            </a:r>
+          </a:p>
+          <a:p>
+            <a:pPr lvl="4"/>
+            <a:r>
+              <a:rPr lang="ko-KR" altLang="en-US"/>
+              <a:t>다섯 번째 수준</a:t>
+            </a:r>
+            <a:endParaRPr lang="en-US" dirty="0"/>
+          </a:p>
+        </p:txBody>
+      </p:sp>
+      <p:sp>
+        <p:nvSpPr>
+          <p:cNvPr id="4" name="Text Placeholder 3"/>
+          <p:cNvSpPr>
+            <a:spLocks noGrp="1"/>
+          </p:cNvSpPr>
+          <p:nvPr>
+            <p:ph type="body" sz="half" idx="2"/>
+          </p:nvPr>
+        </p:nvSpPr>
+        <p:spPr>
+          <a:xfrm>
+            <a:off x="839788" y="2057400"/>
+            <a:ext cx="3932237" cy="3811588"/>
+          </a:xfrm>
+        </p:spPr>
+        <p:txBody>
+          <a:bodyPr/>
+          <a:lstStyle>
+            <a:lvl1pPr marL="0" indent="0">
+              <a:buNone/>
+              <a:defRPr sz="1600"/>
+            </a:lvl1pPr>
+            <a:lvl2pPr marL="457200" indent="0">
+              <a:buNone/>
+              <a:defRPr sz="1400"/>
+            </a:lvl2pPr>
+            <a:lvl3pPr marL="914400" indent="0">
+              <a:buNone/>
+              <a:defRPr sz="1200"/>
+            </a:lvl3pPr>
+            <a:lvl4pPr marL="1371600" indent="0">
+              <a:buNone/>
+              <a:defRPr sz="1000"/>
+            </a:lvl4pPr>
+            <a:lvl5pPr marL="1828800" indent="0">
+              <a:buNone/>
+              <a:defRPr sz="1000"/>
+            </a:lvl5pPr>
+            <a:lvl6pPr marL="2286000" indent="0">
+              <a:buNone/>
+              <a:defRPr sz="1000"/>
+            </a:lvl6pPr>
+            <a:lvl7pPr marL="2743200" indent="0">
+              <a:buNone/>
+              <a:defRPr sz="1000"/>
+            </a:lvl7pPr>
+            <a:lvl8pPr marL="3200400" indent="0">
+              <a:buNone/>
+              <a:defRPr sz="1000"/>
+            </a:lvl8pPr>
+            <a:lvl9pPr marL="3657600" indent="0">
+              <a:buNone/>
+              <a:defRPr sz="1000"/>
+            </a:lvl9pPr>
+          </a:lstStyle>
+          <a:p>
+            <a:pPr lvl="0"/>
+            <a:r>
+              <a:rPr lang="ko-KR" altLang="en-US"/>
+              <a:t>마스터 텍스트 스타일을 편집하려면 클릭</a:t>
+            </a:r>
+          </a:p>
+        </p:txBody>
+      </p:sp>
+      <p:sp>
+        <p:nvSpPr>
+          <p:cNvPr id="5" name="Date Placeholder 4"/>
+          <p:cNvSpPr>
+            <a:spLocks noGrp="1"/>
+          </p:cNvSpPr>
+          <p:nvPr>
+            <p:ph type="dt" sz="half" idx="10"/>
+          </p:nvPr>
+        </p:nvSpPr>
+        <p:spPr/>
+        <p:txBody>
+          <a:bodyPr/>
+          <a:lstStyle/>
+          <a:p>
+            <a:fld id="{C764DE79-268F-4C1A-8933-263129D2AF90}" type="datetimeFigureOut">
+              <a:rPr lang="en-US" dirty="0"/>
+              <a:t>5/16/2026</a:t>
+            </a:fld>
+            <a:endParaRPr lang="en-US" dirty="0"/>
+          </a:p>
+        </p:txBody>
+      </p:sp>
+      <p:sp>
+        <p:nvSpPr>
+          <p:cNvPr id="6" name="Footer Placeholder 5"/>
+          <p:cNvSpPr>
+            <a:spLocks noGrp="1"/>
+          </p:cNvSpPr>
+          <p:nvPr>
+            <p:ph type="ftr" sz="quarter" idx="11"/>
+          </p:nvPr>
+        </p:nvSpPr>
+        <p:spPr/>
+        <p:txBody>
+          <a:bodyPr/>
+          <a:lstStyle/>
+          <a:p>
+            <a:endParaRPr lang="en-US" dirty="0"/>
+          </a:p>
+        </p:txBody>
+      </p:sp>
+      <p:sp>
+        <p:nvSpPr>
+          <p:cNvPr id="7" name="Slide Number Placeholder 6"/>
+          <p:cNvSpPr>
+            <a:spLocks noGrp="1"/>
+          </p:cNvSpPr>
+          <p:nvPr>
+            <p:ph type="sldNum" sz="quarter" idx="12"/>
+          </p:nvPr>
+        </p:nvSpPr>
+        <p:spPr/>
+        <p:txBody>
+          <a:bodyPr/>
+          <a:lstStyle/>
+          <a:p>
+            <a:fld id="{48F63A3B-78C7-47BE-AE5E-E10140E04643}" type="slidenum">
+              <a:rPr lang="en-US" dirty="0"/>
+              <a:t>‹#›</a:t>
+            </a:fld>
+            <a:endParaRPr lang="en-US" dirty="0"/>
+          </a:p>
+        </p:txBody>
+      </p:sp>
+    </p:spTree>
+    <p:extLst>
+      <p:ext uri="{BB962C8B-B14F-4D97-AF65-F5344CB8AC3E}">
+        <p14:creationId xmlns:p14="http://schemas.microsoft.com/office/powerpoint/2010/main" val="594946312"/>
+      </p:ext>
+    </p:extLst>
+  </p:cSld>
+  <p:clrMapOvr>
+    <a:masterClrMapping/>
+  </p:clrMapOvr>
+  <p:hf sldNum="0" hdr="0" ftr="0" dt="0"/>
+</p:sldLayout>
+</file>
+
+<file path=ppt/slideLayouts/slideLayout9.xml><?xml version="1.0" encoding="utf-8"?>
+<p:sldLayout xmlns:a="http://schemas.openxmlformats.org/drawingml/2006/main" xmlns:r="http://schemas.openxmlformats.org/officeDocument/2006/relationships" xmlns:p="http://schemas.openxmlformats.org/presentationml/2006/main" type="picTx" preserve="1">
+  <p:cSld name="캡션 있는 그림">
+    <p:spTree>
+      <p:nvGrpSpPr>
+        <p:cNvPr id="1" name=""/>
+        <p:cNvGrpSpPr/>
+        <p:nvPr/>
+      </p:nvGrpSpPr>
+      <p:grpSpPr>
+        <a:xfrm>
+          <a:off x="0" y="0"/>
+          <a:ext cx="0" cy="0"/>
+          <a:chOff x="0" y="0"/>
+          <a:chExt cx="0" cy="0"/>
+        </a:xfrm>
+      </p:grpSpPr>
+      <p:sp>
+        <p:nvSpPr>
+          <p:cNvPr id="2" name="Title 1"/>
+          <p:cNvSpPr>
+            <a:spLocks noGrp="1"/>
+          </p:cNvSpPr>
+          <p:nvPr>
+            <p:ph type="title"/>
+          </p:nvPr>
+        </p:nvSpPr>
+        <p:spPr>
+          <a:xfrm>
+            <a:off x="839788" y="457200"/>
+            <a:ext cx="3932237" cy="1600200"/>
+          </a:xfrm>
+        </p:spPr>
+        <p:txBody>
+          <a:bodyPr anchor="b"/>
+          <a:lstStyle>
+            <a:lvl1pPr>
+              <a:defRPr sz="3200"/>
+            </a:lvl1pPr>
+          </a:lstStyle>
+          <a:p>
+            <a:r>
+              <a:rPr lang="ko-KR" altLang="en-US"/>
+              <a:t>마스터 제목 스타일 편집</a:t>
+            </a:r>
+            <a:endParaRPr lang="en-US" dirty="0"/>
+          </a:p>
+        </p:txBody>
+      </p:sp>
+      <p:sp>
+        <p:nvSpPr>
+          <p:cNvPr id="3" name="Picture Placeholder 2"/>
+          <p:cNvSpPr>
+            <a:spLocks noGrp="1" noChangeAspect="1"/>
+          </p:cNvSpPr>
+          <p:nvPr>
+            <p:ph type="pic" idx="1"/>
+          </p:nvPr>
+        </p:nvSpPr>
+        <p:spPr>
+          <a:xfrm>
+            <a:off x="5183188" y="987425"/>
+            <a:ext cx="6172200" cy="4873625"/>
+          </a:xfrm>
+        </p:spPr>
+        <p:txBody>
+          <a:bodyPr anchor="t"/>
+          <a:lstStyle>
+            <a:lvl1pPr marL="0" indent="0">
+              <a:buNone/>
+              <a:defRPr sz="3200"/>
+            </a:lvl1pPr>
+            <a:lvl2pPr marL="457200" indent="0">
+              <a:buNone/>
+              <a:defRPr sz="2800"/>
+            </a:lvl2pPr>
+            <a:lvl3pPr marL="914400" indent="0">
+              <a:buNone/>
+              <a:defRPr sz="2400"/>
+            </a:lvl3pPr>
+            <a:lvl4pPr marL="1371600" indent="0">
+              <a:buNone/>
+              <a:defRPr sz="2000"/>
+            </a:lvl4pPr>
+            <a:lvl5pPr marL="1828800" indent="0">
+              <a:buNone/>
+              <a:defRPr sz="2000"/>
+            </a:lvl5pPr>
+            <a:lvl6pPr marL="2286000" indent="0">
+              <a:buNone/>
+              <a:defRPr sz="2000"/>
+            </a:lvl6pPr>
+            <a:lvl7pPr marL="2743200" indent="0">
+              <a:buNone/>
+              <a:defRPr sz="2000"/>
+            </a:lvl7pPr>
+            <a:lvl8pPr marL="3200400" indent="0">
+              <a:buNone/>
+              <a:defRPr sz="2000"/>
+            </a:lvl8pPr>
+            <a:lvl9pPr marL="3657600" indent="0">
+              <a:buNone/>
+              <a:defRPr sz="2000"/>
+            </a:lvl9pPr>
+          </a:lstStyle>
+          <a:p>
+            <a:r>
+              <a:rPr lang="ko-KR" altLang="en-US"/>
+              <a:t>그림을 추가하려면 아이콘을 클릭하십시오</a:t>
+            </a:r>
+            <a:endParaRPr lang="en-US" dirty="0"/>
+          </a:p>
+        </p:txBody>
+      </p:sp>
+      <p:sp>
+        <p:nvSpPr>
+          <p:cNvPr id="4" name="Text Placeholder 3"/>
+          <p:cNvSpPr>
+            <a:spLocks noGrp="1"/>
+          </p:cNvSpPr>
+          <p:nvPr>
+            <p:ph type="body" sz="half" idx="2"/>
+          </p:nvPr>
+        </p:nvSpPr>
+        <p:spPr>
+          <a:xfrm>
+            <a:off x="839788" y="2057400"/>
+            <a:ext cx="3932237" cy="3811588"/>
+          </a:xfrm>
+        </p:spPr>
+        <p:txBody>
+          <a:bodyPr/>
+          <a:lstStyle>
+            <a:lvl1pPr marL="0" indent="0">
+              <a:buNone/>
+              <a:defRPr sz="1600"/>
+            </a:lvl1pPr>
+            <a:lvl2pPr marL="457200" indent="0">
+              <a:buNone/>
+              <a:defRPr sz="1400"/>
+            </a:lvl2pPr>
+            <a:lvl3pPr marL="914400" indent="0">
+              <a:buNone/>
+              <a:defRPr sz="1200"/>
+            </a:lvl3pPr>
+            <a:lvl4pPr marL="1371600" indent="0">
+              <a:buNone/>
+              <a:defRPr sz="1000"/>
+            </a:lvl4pPr>
+            <a:lvl5pPr marL="1828800" indent="0">
+              <a:buNone/>
+              <a:defRPr sz="1000"/>
+            </a:lvl5pPr>
+            <a:lvl6pPr marL="2286000" indent="0">
+              <a:buNone/>
+              <a:defRPr sz="1000"/>
+            </a:lvl6pPr>
+            <a:lvl7pPr marL="2743200" indent="0">
+              <a:buNone/>
+              <a:defRPr sz="1000"/>
+            </a:lvl7pPr>
+            <a:lvl8pPr marL="3200400" indent="0">
+              <a:buNone/>
+              <a:defRPr sz="1000"/>
+            </a:lvl8pPr>
+            <a:lvl9pPr marL="3657600" indent="0">
+              <a:buNone/>
+              <a:defRPr sz="1000"/>
+            </a:lvl9pPr>
+          </a:lstStyle>
+          <a:p>
+            <a:pPr lvl="0"/>
+            <a:r>
+              <a:rPr lang="ko-KR" altLang="en-US"/>
+              <a:t>마스터 텍스트 스타일을 편집하려면 클릭</a:t>
+            </a:r>
+          </a:p>
+        </p:txBody>
+      </p:sp>
+      <p:sp>
+        <p:nvSpPr>
+          <p:cNvPr id="5" name="Date Placeholder 4"/>
+          <p:cNvSpPr>
+            <a:spLocks noGrp="1"/>
+          </p:cNvSpPr>
+          <p:nvPr>
+            <p:ph type="dt" sz="half" idx="10"/>
+          </p:nvPr>
+        </p:nvSpPr>
+        <p:spPr/>
+        <p:txBody>
+          <a:bodyPr/>
+          <a:lstStyle/>
+          <a:p>
+            <a:fld id="{C764DE79-268F-4C1A-8933-263129D2AF90}" type="datetimeFigureOut">
+              <a:rPr lang="en-US" dirty="0"/>
+              <a:t>5/16/2026</a:t>
+            </a:fld>
+            <a:endParaRPr lang="en-US" dirty="0"/>
+          </a:p>
+        </p:txBody>
+      </p:sp>
+      <p:sp>
+        <p:nvSpPr>
+          <p:cNvPr id="6" name="Footer Placeholder 5"/>
+          <p:cNvSpPr>
+            <a:spLocks noGrp="1"/>
+          </p:cNvSpPr>
+          <p:nvPr>
+            <p:ph type="ftr" sz="quarter" idx="11"/>
+          </p:nvPr>
+        </p:nvSpPr>
+        <p:spPr/>
+        <p:txBody>
+          <a:bodyPr/>
+          <a:lstStyle/>
+          <a:p>
+            <a:endParaRPr lang="en-US" dirty="0"/>
+          </a:p>
+        </p:txBody>
+      </p:sp>
+      <p:sp>
+        <p:nvSpPr>
+          <p:cNvPr id="7" name="Slide Number Placeholder 6"/>
+          <p:cNvSpPr>
+            <a:spLocks noGrp="1"/>
+          </p:cNvSpPr>
+          <p:nvPr>
+            <p:ph type="sldNum" sz="quarter" idx="12"/>
+          </p:nvPr>
+        </p:nvSpPr>
+        <p:spPr/>
+        <p:txBody>
+          <a:bodyPr/>
+          <a:lstStyle/>
+          <a:p>
+            <a:fld id="{48F63A3B-78C7-47BE-AE5E-E10140E04643}" type="slidenum">
+              <a:rPr lang="en-US" dirty="0"/>
+              <a:t>‹#›</a:t>
+            </a:fld>
+            <a:endParaRPr lang="en-US" dirty="0"/>
+          </a:p>
+        </p:txBody>
+      </p:sp>
+    </p:spTree>
+    <p:extLst>
+      <p:ext uri="{BB962C8B-B14F-4D97-AF65-F5344CB8AC3E}">
+        <p14:creationId xmlns:p14="http://schemas.microsoft.com/office/powerpoint/2010/main" val="1471144474"/>
+      </p:ext>
+    </p:extLst>
+  </p:cSld>
+  <p:clrMapOvr>
+    <a:masterClrMapping/>
+  </p:clrMapOvr>
+  <p:hf sldNum="0" hdr="0" ftr="0" dt="0"/>
 </p:sldLayout>
 </file>
 
@@ -1393,16 +3801,249 @@
           <a:chExt cx="0" cy="0"/>
         </a:xfrm>
       </p:grpSpPr>
+      <p:sp>
+        <p:nvSpPr>
+          <p:cNvPr id="2" name="Title Placeholder 1"/>
+          <p:cNvSpPr>
+            <a:spLocks noGrp="1"/>
+          </p:cNvSpPr>
+          <p:nvPr>
+            <p:ph type="title"/>
+          </p:nvPr>
+        </p:nvSpPr>
+        <p:spPr>
+          <a:xfrm>
+            <a:off x="838200" y="365125"/>
+            <a:ext cx="10515600" cy="1325563"/>
+          </a:xfrm>
+          <a:prstGeom prst="rect">
+            <a:avLst/>
+          </a:prstGeom>
+        </p:spPr>
+        <p:txBody>
+          <a:bodyPr vert="horz" lIns="91440" tIns="45720" rIns="91440" bIns="45720" rtlCol="0" anchor="ctr">
+            <a:normAutofit/>
+          </a:bodyPr>
+          <a:lstStyle/>
+          <a:p>
+            <a:r>
+              <a:rPr lang="ko-KR" altLang="en-US"/>
+              <a:t>마스터 제목 스타일 편집</a:t>
+            </a:r>
+            <a:endParaRPr lang="en-US" dirty="0"/>
+          </a:p>
+        </p:txBody>
+      </p:sp>
+      <p:sp>
+        <p:nvSpPr>
+          <p:cNvPr id="3" name="Text Placeholder 2"/>
+          <p:cNvSpPr>
+            <a:spLocks noGrp="1"/>
+          </p:cNvSpPr>
+          <p:nvPr>
+            <p:ph type="body" idx="1"/>
+          </p:nvPr>
+        </p:nvSpPr>
+        <p:spPr>
+          <a:xfrm>
+            <a:off x="838200" y="1825625"/>
+            <a:ext cx="10515600" cy="4351338"/>
+          </a:xfrm>
+          <a:prstGeom prst="rect">
+            <a:avLst/>
+          </a:prstGeom>
+        </p:spPr>
+        <p:txBody>
+          <a:bodyPr vert="horz" lIns="91440" tIns="45720" rIns="91440" bIns="45720" rtlCol="0">
+            <a:normAutofit/>
+          </a:bodyPr>
+          <a:lstStyle/>
+          <a:p>
+            <a:pPr lvl="0"/>
+            <a:r>
+              <a:rPr lang="ko-KR" altLang="en-US"/>
+              <a:t>마스터 텍스트 스타일을 편집하려면 클릭</a:t>
+            </a:r>
+          </a:p>
+          <a:p>
+            <a:pPr lvl="1"/>
+            <a:r>
+              <a:rPr lang="ko-KR" altLang="en-US"/>
+              <a:t>두 번째 수준</a:t>
+            </a:r>
+          </a:p>
+          <a:p>
+            <a:pPr lvl="2"/>
+            <a:r>
+              <a:rPr lang="ko-KR" altLang="en-US"/>
+              <a:t>세 번째 수준</a:t>
+            </a:r>
+          </a:p>
+          <a:p>
+            <a:pPr lvl="3"/>
+            <a:r>
+              <a:rPr lang="ko-KR" altLang="en-US"/>
+              <a:t>네 번째 수준</a:t>
+            </a:r>
+          </a:p>
+          <a:p>
+            <a:pPr lvl="4"/>
+            <a:r>
+              <a:rPr lang="ko-KR" altLang="en-US"/>
+              <a:t>다섯 번째 수준</a:t>
+            </a:r>
+            <a:endParaRPr lang="en-US" dirty="0"/>
+          </a:p>
+        </p:txBody>
+      </p:sp>
+      <p:sp>
+        <p:nvSpPr>
+          <p:cNvPr id="4" name="Date Placeholder 3"/>
+          <p:cNvSpPr>
+            <a:spLocks noGrp="1"/>
+          </p:cNvSpPr>
+          <p:nvPr>
+            <p:ph type="dt" sz="half" idx="2"/>
+          </p:nvPr>
+        </p:nvSpPr>
+        <p:spPr>
+          <a:xfrm>
+            <a:off x="838200" y="6356350"/>
+            <a:ext cx="2743200" cy="365125"/>
+          </a:xfrm>
+          <a:prstGeom prst="rect">
+            <a:avLst/>
+          </a:prstGeom>
+        </p:spPr>
+        <p:txBody>
+          <a:bodyPr vert="horz" lIns="91440" tIns="45720" rIns="91440" bIns="45720" rtlCol="0" anchor="ctr"/>
+          <a:lstStyle>
+            <a:lvl1pPr algn="l">
+              <a:defRPr sz="1200">
+                <a:solidFill>
+                  <a:schemeClr val="tx1">
+                    <a:tint val="75000"/>
+                  </a:schemeClr>
+                </a:solidFill>
+              </a:defRPr>
+            </a:lvl1pPr>
+          </a:lstStyle>
+          <a:p>
+            <a:fld id="{C764DE79-268F-4C1A-8933-263129D2AF90}" type="datetimeFigureOut">
+              <a:rPr lang="en-US" dirty="0"/>
+              <a:t>5/16/2026</a:t>
+            </a:fld>
+            <a:endParaRPr lang="en-US" dirty="0"/>
+          </a:p>
+        </p:txBody>
+      </p:sp>
+      <p:sp>
+        <p:nvSpPr>
+          <p:cNvPr id="5" name="Footer Placeholder 4"/>
+          <p:cNvSpPr>
+            <a:spLocks noGrp="1"/>
+          </p:cNvSpPr>
+          <p:nvPr>
+            <p:ph type="ftr" sz="quarter" idx="3"/>
+          </p:nvPr>
+        </p:nvSpPr>
+        <p:spPr>
+          <a:xfrm>
+            <a:off x="4038600" y="6356350"/>
+            <a:ext cx="4114800" cy="365125"/>
+          </a:xfrm>
+          <a:prstGeom prst="rect">
+            <a:avLst/>
+          </a:prstGeom>
+        </p:spPr>
+        <p:txBody>
+          <a:bodyPr vert="horz" lIns="91440" tIns="45720" rIns="91440" bIns="45720" rtlCol="0" anchor="ctr"/>
+          <a:lstStyle>
+            <a:lvl1pPr algn="ctr">
+              <a:defRPr sz="1200">
+                <a:solidFill>
+                  <a:schemeClr val="tx1">
+                    <a:tint val="75000"/>
+                  </a:schemeClr>
+                </a:solidFill>
+              </a:defRPr>
+            </a:lvl1pPr>
+          </a:lstStyle>
+          <a:p>
+            <a:endParaRPr lang="en-US" dirty="0"/>
+          </a:p>
+        </p:txBody>
+      </p:sp>
+      <p:sp>
+        <p:nvSpPr>
+          <p:cNvPr id="6" name="Slide Number Placeholder 5"/>
+          <p:cNvSpPr>
+            <a:spLocks noGrp="1"/>
+          </p:cNvSpPr>
+          <p:nvPr>
+            <p:ph type="sldNum" sz="quarter" idx="4"/>
+          </p:nvPr>
+        </p:nvSpPr>
+        <p:spPr>
+          <a:xfrm>
+            <a:off x="8610600" y="6356350"/>
+            <a:ext cx="2743200" cy="365125"/>
+          </a:xfrm>
+          <a:prstGeom prst="rect">
+            <a:avLst/>
+          </a:prstGeom>
+        </p:spPr>
+        <p:txBody>
+          <a:bodyPr vert="horz" lIns="91440" tIns="45720" rIns="91440" bIns="45720" rtlCol="0" anchor="ctr"/>
+          <a:lstStyle>
+            <a:lvl1pPr algn="r">
+              <a:defRPr sz="1200">
+                <a:solidFill>
+                  <a:schemeClr val="tx1">
+                    <a:tint val="75000"/>
+                  </a:schemeClr>
+                </a:solidFill>
+              </a:defRPr>
+            </a:lvl1pPr>
+          </a:lstStyle>
+          <a:p>
+            <a:fld id="{48F63A3B-78C7-47BE-AE5E-E10140E04643}" type="slidenum">
+              <a:rPr lang="en-US" dirty="0"/>
+              <a:t>‹#›</a:t>
+            </a:fld>
+            <a:endParaRPr lang="en-US" dirty="0"/>
+          </a:p>
+        </p:txBody>
+      </p:sp>
     </p:spTree>
+    <p:extLst>
+      <p:ext uri="{BB962C8B-B14F-4D97-AF65-F5344CB8AC3E}">
+        <p14:creationId xmlns:p14="http://schemas.microsoft.com/office/powerpoint/2010/main" val="1586839801"/>
+      </p:ext>
+    </p:extLst>
   </p:cSld>
-  <p:clrMap bg1="lt1" tx1="dk1" bg2="lt2" tx2="dk2" accent1="accent1" accent2="accent2" accent3="accent3" accent4="accent4" accent5="accent5" accent6="accent6" hlink="hlink" folHlink="folHlink"/>
+  <p:clrMap bg1="dk1" tx1="lt1" bg2="dk2" tx2="lt2" accent1="accent1" accent2="accent2" accent3="accent3" accent4="accent4" accent5="accent5" accent6="accent6" hlink="hlink" folHlink="folHlink"/>
   <p:sldLayoutIdLst>
-    <p:sldLayoutId id="2147483649" r:id="rId1"/>
+    <p:sldLayoutId id="2147483651" r:id="rId1"/>
+    <p:sldLayoutId id="2147483652" r:id="rId2"/>
+    <p:sldLayoutId id="2147483653" r:id="rId3"/>
+    <p:sldLayoutId id="2147483654" r:id="rId4"/>
+    <p:sldLayoutId id="2147483655" r:id="rId5"/>
+    <p:sldLayoutId id="2147483656" r:id="rId6"/>
+    <p:sldLayoutId id="2147483657" r:id="rId7"/>
+    <p:sldLayoutId id="2147483658" r:id="rId8"/>
+    <p:sldLayoutId id="2147483659" r:id="rId9"/>
+    <p:sldLayoutId id="2147483660" r:id="rId10"/>
+    <p:sldLayoutId id="2147483661" r:id="rId11"/>
+    <p:sldLayoutId id="2147483662" r:id="rId12"/>
   </p:sldLayoutIdLst>
   <p:hf sldNum="0" hdr="0" ftr="0" dt="0"/>
   <p:txStyles>
     <p:titleStyle>
-      <a:lvl1pPr algn="ctr" defTabSz="914400" rtl="0" eaLnBrk="1" latinLnBrk="0" hangingPunct="1">
+      <a:lvl1pPr algn="l" defTabSz="914400" rtl="0" eaLnBrk="1" latinLnBrk="1" hangingPunct="1">
+        <a:lnSpc>
+          <a:spcPct val="90000"/>
+        </a:lnSpc>
         <a:spcBef>
           <a:spcPct val="0"/>
         </a:spcBef>
@@ -1418,13 +4059,16 @@
       </a:lvl1pPr>
     </p:titleStyle>
     <p:bodyStyle>
-      <a:lvl1pPr marL="342900" indent="-342900" algn="l" defTabSz="914400" rtl="0" eaLnBrk="1" latinLnBrk="0" hangingPunct="1">
+      <a:lvl1pPr marL="228600" indent="-228600" algn="l" defTabSz="914400" rtl="0" eaLnBrk="1" latinLnBrk="1" hangingPunct="1">
+        <a:lnSpc>
+          <a:spcPct val="90000"/>
+        </a:lnSpc>
         <a:spcBef>
-          <a:spcPct val="20000"/>
+          <a:spcPts val="1000"/>
         </a:spcBef>
-        <a:buFont typeface="Arial" pitchFamily="34" charset="0"/>
+        <a:buFont typeface="Arial" panose="020B0604020202020204" pitchFamily="34" charset="0"/>
         <a:buChar char="•"/>
-        <a:defRPr sz="3200" kern="1200">
+        <a:defRPr sz="2800" kern="1200">
           <a:solidFill>
             <a:schemeClr val="tx1"/>
           </a:solidFill>
@@ -1433,26 +4077,14 @@
           <a:cs typeface="+mn-cs"/>
         </a:defRPr>
       </a:lvl1pPr>
-      <a:lvl2pPr marL="742950" indent="-285750" algn="l" defTabSz="914400" rtl="0" eaLnBrk="1" latinLnBrk="0" hangingPunct="1">
+      <a:lvl2pPr marL="685800" indent="-228600" algn="l" defTabSz="914400" rtl="0" eaLnBrk="1" latinLnBrk="1" hangingPunct="1">
+        <a:lnSpc>
+          <a:spcPct val="90000"/>
+        </a:lnSpc>
         <a:spcBef>
-          <a:spcPct val="20000"/>
+          <a:spcPts val="500"/>
         </a:spcBef>
-        <a:buFont typeface="Arial" pitchFamily="34" charset="0"/>
-        <a:buChar char="–"/>
-        <a:defRPr sz="2800" kern="1200">
-          <a:solidFill>
-            <a:schemeClr val="tx1"/>
-          </a:solidFill>
-          <a:latin typeface="+mn-lt"/>
-          <a:ea typeface="+mn-ea"/>
-          <a:cs typeface="+mn-cs"/>
-        </a:defRPr>
-      </a:lvl2pPr>
-      <a:lvl3pPr marL="1143000" indent="-228600" algn="l" defTabSz="914400" rtl="0" eaLnBrk="1" latinLnBrk="0" hangingPunct="1">
-        <a:spcBef>
-          <a:spcPct val="20000"/>
-        </a:spcBef>
-        <a:buFont typeface="Arial" pitchFamily="34" charset="0"/>
+        <a:buFont typeface="Arial" panose="020B0604020202020204" pitchFamily="34" charset="0"/>
         <a:buChar char="•"/>
         <a:defRPr sz="2400" kern="1200">
           <a:solidFill>
@@ -1462,42 +4094,15 @@
           <a:ea typeface="+mn-ea"/>
           <a:cs typeface="+mn-cs"/>
         </a:defRPr>
-      </a:lvl3pPr>
-      <a:lvl4pPr marL="1600200" indent="-228600" algn="l" defTabSz="914400" rtl="0" eaLnBrk="1" latinLnBrk="0" hangingPunct="1">
+      </a:lvl2pPr>
+      <a:lvl3pPr marL="1143000" indent="-228600" algn="l" defTabSz="914400" rtl="0" eaLnBrk="1" latinLnBrk="1" hangingPunct="1">
+        <a:lnSpc>
+          <a:spcPct val="90000"/>
+        </a:lnSpc>
         <a:spcBef>
-          <a:spcPct val="20000"/>
+          <a:spcPts val="500"/>
         </a:spcBef>
-        <a:buFont typeface="Arial" pitchFamily="34" charset="0"/>
-        <a:buChar char="–"/>
-        <a:defRPr sz="2000" kern="1200">
-          <a:solidFill>
-            <a:schemeClr val="tx1"/>
-          </a:solidFill>
-          <a:latin typeface="+mn-lt"/>
-          <a:ea typeface="+mn-ea"/>
-          <a:cs typeface="+mn-cs"/>
-        </a:defRPr>
-      </a:lvl4pPr>
-      <a:lvl5pPr marL="2057400" indent="-228600" algn="l" defTabSz="914400" rtl="0" eaLnBrk="1" latinLnBrk="0" hangingPunct="1">
-        <a:spcBef>
-          <a:spcPct val="20000"/>
-        </a:spcBef>
-        <a:buFont typeface="Arial" pitchFamily="34" charset="0"/>
-        <a:buChar char="»"/>
-        <a:defRPr sz="2000" kern="1200">
-          <a:solidFill>
-            <a:schemeClr val="tx1"/>
-          </a:solidFill>
-          <a:latin typeface="+mn-lt"/>
-          <a:ea typeface="+mn-ea"/>
-          <a:cs typeface="+mn-cs"/>
-        </a:defRPr>
-      </a:lvl5pPr>
-      <a:lvl6pPr marL="2514600" indent="-228600" algn="l" defTabSz="914400" rtl="0" eaLnBrk="1" latinLnBrk="0" hangingPunct="1">
-        <a:spcBef>
-          <a:spcPct val="20000"/>
-        </a:spcBef>
-        <a:buFont typeface="Arial" pitchFamily="34" charset="0"/>
+        <a:buFont typeface="Arial" panose="020B0604020202020204" pitchFamily="34" charset="0"/>
         <a:buChar char="•"/>
         <a:defRPr sz="2000" kern="1200">
           <a:solidFill>
@@ -1507,14 +4112,71 @@
           <a:ea typeface="+mn-ea"/>
           <a:cs typeface="+mn-cs"/>
         </a:defRPr>
+      </a:lvl3pPr>
+      <a:lvl4pPr marL="1600200" indent="-228600" algn="l" defTabSz="914400" rtl="0" eaLnBrk="1" latinLnBrk="1" hangingPunct="1">
+        <a:lnSpc>
+          <a:spcPct val="90000"/>
+        </a:lnSpc>
+        <a:spcBef>
+          <a:spcPts val="500"/>
+        </a:spcBef>
+        <a:buFont typeface="Arial" panose="020B0604020202020204" pitchFamily="34" charset="0"/>
+        <a:buChar char="•"/>
+        <a:defRPr sz="1800" kern="1200">
+          <a:solidFill>
+            <a:schemeClr val="tx1"/>
+          </a:solidFill>
+          <a:latin typeface="+mn-lt"/>
+          <a:ea typeface="+mn-ea"/>
+          <a:cs typeface="+mn-cs"/>
+        </a:defRPr>
+      </a:lvl4pPr>
+      <a:lvl5pPr marL="2057400" indent="-228600" algn="l" defTabSz="914400" rtl="0" eaLnBrk="1" latinLnBrk="1" hangingPunct="1">
+        <a:lnSpc>
+          <a:spcPct val="90000"/>
+        </a:lnSpc>
+        <a:spcBef>
+          <a:spcPts val="500"/>
+        </a:spcBef>
+        <a:buFont typeface="Arial" panose="020B0604020202020204" pitchFamily="34" charset="0"/>
+        <a:buChar char="•"/>
+        <a:defRPr sz="1800" kern="1200">
+          <a:solidFill>
+            <a:schemeClr val="tx1"/>
+          </a:solidFill>
+          <a:latin typeface="+mn-lt"/>
+          <a:ea typeface="+mn-ea"/>
+          <a:cs typeface="+mn-cs"/>
+        </a:defRPr>
+      </a:lvl5pPr>
+      <a:lvl6pPr marL="2514600" indent="-228600" algn="l" defTabSz="914400" rtl="0" eaLnBrk="1" latinLnBrk="1" hangingPunct="1">
+        <a:lnSpc>
+          <a:spcPct val="90000"/>
+        </a:lnSpc>
+        <a:spcBef>
+          <a:spcPts val="500"/>
+        </a:spcBef>
+        <a:buFont typeface="Arial" panose="020B0604020202020204" pitchFamily="34" charset="0"/>
+        <a:buChar char="•"/>
+        <a:defRPr sz="1800" kern="1200">
+          <a:solidFill>
+            <a:schemeClr val="tx1"/>
+          </a:solidFill>
+          <a:latin typeface="+mn-lt"/>
+          <a:ea typeface="+mn-ea"/>
+          <a:cs typeface="+mn-cs"/>
+        </a:defRPr>
       </a:lvl6pPr>
-      <a:lvl7pPr marL="2971800" indent="-228600" algn="l" defTabSz="914400" rtl="0" eaLnBrk="1" latinLnBrk="0" hangingPunct="1">
+      <a:lvl7pPr marL="2971800" indent="-228600" algn="l" defTabSz="914400" rtl="0" eaLnBrk="1" latinLnBrk="1" hangingPunct="1">
+        <a:lnSpc>
+          <a:spcPct val="90000"/>
+        </a:lnSpc>
         <a:spcBef>
-          <a:spcPct val="20000"/>
+          <a:spcPts val="500"/>
         </a:spcBef>
-        <a:buFont typeface="Arial" pitchFamily="34" charset="0"/>
+        <a:buFont typeface="Arial" panose="020B0604020202020204" pitchFamily="34" charset="0"/>
         <a:buChar char="•"/>
-        <a:defRPr sz="2000" kern="1200">
+        <a:defRPr sz="1800" kern="1200">
           <a:solidFill>
             <a:schemeClr val="tx1"/>
           </a:solidFill>
@@ -1523,13 +4185,16 @@
           <a:cs typeface="+mn-cs"/>
         </a:defRPr>
       </a:lvl7pPr>
-      <a:lvl8pPr marL="3429000" indent="-228600" algn="l" defTabSz="914400" rtl="0" eaLnBrk="1" latinLnBrk="0" hangingPunct="1">
+      <a:lvl8pPr marL="3429000" indent="-228600" algn="l" defTabSz="914400" rtl="0" eaLnBrk="1" latinLnBrk="1" hangingPunct="1">
+        <a:lnSpc>
+          <a:spcPct val="90000"/>
+        </a:lnSpc>
         <a:spcBef>
-          <a:spcPct val="20000"/>
+          <a:spcPts val="500"/>
         </a:spcBef>
-        <a:buFont typeface="Arial" pitchFamily="34" charset="0"/>
+        <a:buFont typeface="Arial" panose="020B0604020202020204" pitchFamily="34" charset="0"/>
         <a:buChar char="•"/>
-        <a:defRPr sz="2000" kern="1200">
+        <a:defRPr sz="1800" kern="1200">
           <a:solidFill>
             <a:schemeClr val="tx1"/>
           </a:solidFill>
@@ -1538,13 +4203,16 @@
           <a:cs typeface="+mn-cs"/>
         </a:defRPr>
       </a:lvl8pPr>
-      <a:lvl9pPr marL="3886200" indent="-228600" algn="l" defTabSz="914400" rtl="0" eaLnBrk="1" latinLnBrk="0" hangingPunct="1">
+      <a:lvl9pPr marL="3886200" indent="-228600" algn="l" defTabSz="914400" rtl="0" eaLnBrk="1" latinLnBrk="1" hangingPunct="1">
+        <a:lnSpc>
+          <a:spcPct val="90000"/>
+        </a:lnSpc>
         <a:spcBef>
-          <a:spcPct val="20000"/>
+          <a:spcPts val="500"/>
         </a:spcBef>
-        <a:buFont typeface="Arial" pitchFamily="34" charset="0"/>
+        <a:buFont typeface="Arial" panose="020B0604020202020204" pitchFamily="34" charset="0"/>
         <a:buChar char="•"/>
-        <a:defRPr sz="2000" kern="1200">
+        <a:defRPr sz="1800" kern="1200">
           <a:solidFill>
             <a:schemeClr val="tx1"/>
           </a:solidFill>
@@ -1558,7 +4226,7 @@
       <a:defPPr>
         <a:defRPr lang="en-US"/>
       </a:defPPr>
-      <a:lvl1pPr marL="0" algn="l" defTabSz="914400" rtl="0" eaLnBrk="1" latinLnBrk="0" hangingPunct="1">
+      <a:lvl1pPr marL="0" algn="l" defTabSz="914400" rtl="0" eaLnBrk="1" latinLnBrk="1" hangingPunct="1">
         <a:defRPr sz="1800" kern="1200">
           <a:solidFill>
             <a:schemeClr val="tx1"/>
@@ -1568,7 +4236,7 @@
           <a:cs typeface="+mn-cs"/>
         </a:defRPr>
       </a:lvl1pPr>
-      <a:lvl2pPr marL="457200" algn="l" defTabSz="914400" rtl="0" eaLnBrk="1" latinLnBrk="0" hangingPunct="1">
+      <a:lvl2pPr marL="457200" algn="l" defTabSz="914400" rtl="0" eaLnBrk="1" latinLnBrk="1" hangingPunct="1">
         <a:defRPr sz="1800" kern="1200">
           <a:solidFill>
             <a:schemeClr val="tx1"/>
@@ -1578,7 +4246,7 @@
           <a:cs typeface="+mn-cs"/>
         </a:defRPr>
       </a:lvl2pPr>
-      <a:lvl3pPr marL="914400" algn="l" defTabSz="914400" rtl="0" eaLnBrk="1" latinLnBrk="0" hangingPunct="1">
+      <a:lvl3pPr marL="914400" algn="l" defTabSz="914400" rtl="0" eaLnBrk="1" latinLnBrk="1" hangingPunct="1">
         <a:defRPr sz="1800" kern="1200">
           <a:solidFill>
             <a:schemeClr val="tx1"/>
@@ -1588,7 +4256,7 @@
           <a:cs typeface="+mn-cs"/>
         </a:defRPr>
       </a:lvl3pPr>
-      <a:lvl4pPr marL="1371600" algn="l" defTabSz="914400" rtl="0" eaLnBrk="1" latinLnBrk="0" hangingPunct="1">
+      <a:lvl4pPr marL="1371600" algn="l" defTabSz="914400" rtl="0" eaLnBrk="1" latinLnBrk="1" hangingPunct="1">
         <a:defRPr sz="1800" kern="1200">
           <a:solidFill>
             <a:schemeClr val="tx1"/>
@@ -1598,7 +4266,7 @@
           <a:cs typeface="+mn-cs"/>
         </a:defRPr>
       </a:lvl4pPr>
-      <a:lvl5pPr marL="1828800" algn="l" defTabSz="914400" rtl="0" eaLnBrk="1" latinLnBrk="0" hangingPunct="1">
+      <a:lvl5pPr marL="1828800" algn="l" defTabSz="914400" rtl="0" eaLnBrk="1" latinLnBrk="1" hangingPunct="1">
         <a:defRPr sz="1800" kern="1200">
           <a:solidFill>
             <a:schemeClr val="tx1"/>
@@ -1608,7 +4276,7 @@
           <a:cs typeface="+mn-cs"/>
         </a:defRPr>
       </a:lvl5pPr>
-      <a:lvl6pPr marL="2286000" algn="l" defTabSz="914400" rtl="0" eaLnBrk="1" latinLnBrk="0" hangingPunct="1">
+      <a:lvl6pPr marL="2286000" algn="l" defTabSz="914400" rtl="0" eaLnBrk="1" latinLnBrk="1" hangingPunct="1">
         <a:defRPr sz="1800" kern="1200">
           <a:solidFill>
             <a:schemeClr val="tx1"/>
@@ -1618,7 +4286,7 @@
           <a:cs typeface="+mn-cs"/>
         </a:defRPr>
       </a:lvl6pPr>
-      <a:lvl7pPr marL="2743200" algn="l" defTabSz="914400" rtl="0" eaLnBrk="1" latinLnBrk="0" hangingPunct="1">
+      <a:lvl7pPr marL="2743200" algn="l" defTabSz="914400" rtl="0" eaLnBrk="1" latinLnBrk="1" hangingPunct="1">
         <a:defRPr sz="1800" kern="1200">
           <a:solidFill>
             <a:schemeClr val="tx1"/>
@@ -1628,7 +4296,7 @@
           <a:cs typeface="+mn-cs"/>
         </a:defRPr>
       </a:lvl7pPr>
-      <a:lvl8pPr marL="3200400" algn="l" defTabSz="914400" rtl="0" eaLnBrk="1" latinLnBrk="0" hangingPunct="1">
+      <a:lvl8pPr marL="3200400" algn="l" defTabSz="914400" rtl="0" eaLnBrk="1" latinLnBrk="1" hangingPunct="1">
         <a:defRPr sz="1800" kern="1200">
           <a:solidFill>
             <a:schemeClr val="tx1"/>
@@ -1638,7 +4306,7 @@
           <a:cs typeface="+mn-cs"/>
         </a:defRPr>
       </a:lvl8pPr>
-      <a:lvl9pPr marL="3657600" algn="l" defTabSz="914400" rtl="0" eaLnBrk="1" latinLnBrk="0" hangingPunct="1">
+      <a:lvl9pPr marL="3657600" algn="l" defTabSz="914400" rtl="0" eaLnBrk="1" latinLnBrk="1" hangingPunct="1">
         <a:defRPr sz="1800" kern="1200">
           <a:solidFill>
             <a:schemeClr val="tx1"/>
@@ -1908,6 +4576,628 @@
 
 <file path=ppt/slides/slide10.xml><?xml version="1.0" encoding="utf-8"?>
 <p:sld xmlns:a="http://schemas.openxmlformats.org/drawingml/2006/main" xmlns:r="http://schemas.openxmlformats.org/officeDocument/2006/relationships" xmlns:p="http://schemas.openxmlformats.org/presentationml/2006/main">
+  <p:cSld name="Slide 9">
+    <p:bg>
+      <p:bgPr>
+        <a:solidFill>
+          <a:srgbClr val="0B0B14"/>
+        </a:solidFill>
+        <a:effectLst/>
+      </p:bgPr>
+    </p:bg>
+    <p:spTree>
+      <p:nvGrpSpPr>
+        <p:cNvPr id="1" name=""/>
+        <p:cNvGrpSpPr/>
+        <p:nvPr/>
+      </p:nvGrpSpPr>
+      <p:grpSpPr>
+        <a:xfrm>
+          <a:off x="0" y="0"/>
+          <a:ext cx="0" cy="0"/>
+          <a:chOff x="0" y="0"/>
+          <a:chExt cx="0" cy="0"/>
+        </a:xfrm>
+      </p:grpSpPr>
+      <p:sp>
+        <p:nvSpPr>
+          <p:cNvPr id="2" name="Shape 0"/>
+          <p:cNvSpPr/>
+          <p:nvPr/>
+        </p:nvSpPr>
+        <p:spPr>
+          <a:xfrm>
+            <a:off x="0" y="0"/>
+            <a:ext cx="137160" cy="6858000"/>
+          </a:xfrm>
+          <a:prstGeom prst="rect">
+            <a:avLst/>
+          </a:prstGeom>
+          <a:solidFill>
+            <a:srgbClr val="8B5CF6"/>
+          </a:solidFill>
+          <a:ln w="12700">
+            <a:solidFill>
+              <a:srgbClr val="8B5CF6"/>
+            </a:solidFill>
+            <a:prstDash val="solid"/>
+          </a:ln>
+        </p:spPr>
+      </p:sp>
+      <p:sp>
+        <p:nvSpPr>
+          <p:cNvPr id="3" name="Text 1"/>
+          <p:cNvSpPr/>
+          <p:nvPr/>
+        </p:nvSpPr>
+        <p:spPr>
+          <a:xfrm>
+            <a:off x="548640" y="320040"/>
+            <a:ext cx="5486400" cy="457200"/>
+          </a:xfrm>
+          <a:prstGeom prst="rect">
+            <a:avLst/>
+          </a:prstGeom>
+          <a:noFill/>
+          <a:ln/>
+        </p:spPr>
+        <p:txBody>
+          <a:bodyPr wrap="square" rtlCol="0" anchor="ctr"/>
+          <a:lstStyle/>
+          <a:p>
+            <a:pPr marL="0" indent="0">
+              <a:buNone/>
+            </a:pPr>
+            <a:r>
+              <a:rPr lang="en-US" sz="2200" b="1" dirty="0">
+                <a:solidFill>
+                  <a:srgbClr val="8B5CF6"/>
+                </a:solidFill>
+                <a:latin typeface="Malgun Gothic" pitchFamily="34" charset="0"/>
+                <a:ea typeface="Malgun Gothic" pitchFamily="34" charset="-122"/>
+                <a:cs typeface="Malgun Gothic" pitchFamily="34" charset="-120"/>
+              </a:rPr>
+              <a:t>2026-05-12 (화)</a:t>
+            </a:r>
+            <a:endParaRPr lang="en-US" sz="2200" dirty="0"/>
+          </a:p>
+        </p:txBody>
+      </p:sp>
+      <p:sp>
+        <p:nvSpPr>
+          <p:cNvPr id="4" name="Text 2"/>
+          <p:cNvSpPr/>
+          <p:nvPr/>
+        </p:nvSpPr>
+        <p:spPr>
+          <a:xfrm>
+            <a:off x="548640" y="777240"/>
+            <a:ext cx="7772400" cy="457200"/>
+          </a:xfrm>
+          <a:prstGeom prst="rect">
+            <a:avLst/>
+          </a:prstGeom>
+          <a:noFill/>
+          <a:ln/>
+        </p:spPr>
+        <p:txBody>
+          <a:bodyPr wrap="square" rtlCol="0" anchor="ctr"/>
+          <a:lstStyle/>
+          <a:p>
+            <a:pPr marL="0" indent="0">
+              <a:buNone/>
+            </a:pPr>
+            <a:r>
+              <a:rPr lang="en-US" sz="1600" dirty="0">
+                <a:solidFill>
+                  <a:srgbClr val="FFFFFF"/>
+                </a:solidFill>
+                <a:latin typeface="Malgun Gothic" pitchFamily="34" charset="0"/>
+                <a:ea typeface="Malgun Gothic" pitchFamily="34" charset="-122"/>
+                <a:cs typeface="Malgun Gothic" pitchFamily="34" charset="-120"/>
+              </a:rPr>
+              <a:t>문제집·랭킹 도입 + 서버 두 번 되살리기</a:t>
+            </a:r>
+            <a:endParaRPr lang="en-US" sz="1600" dirty="0"/>
+          </a:p>
+        </p:txBody>
+      </p:sp>
+      <p:sp>
+        <p:nvSpPr>
+          <p:cNvPr id="5" name="Text 3"/>
+          <p:cNvSpPr/>
+          <p:nvPr/>
+        </p:nvSpPr>
+        <p:spPr>
+          <a:xfrm>
+            <a:off x="6858000" y="411480"/>
+            <a:ext cx="4846320" cy="365760"/>
+          </a:xfrm>
+          <a:prstGeom prst="rect">
+            <a:avLst/>
+          </a:prstGeom>
+          <a:noFill/>
+          <a:ln/>
+        </p:spPr>
+        <p:txBody>
+          <a:bodyPr wrap="square" rtlCol="0" anchor="ctr"/>
+          <a:lstStyle/>
+          <a:p>
+            <a:pPr marL="0" indent="0" algn="r">
+              <a:buNone/>
+            </a:pPr>
+            <a:r>
+              <a:rPr lang="en-US" sz="1100" dirty="0">
+                <a:solidFill>
+                  <a:srgbClr val="8888A0"/>
+                </a:solidFill>
+                <a:latin typeface="Malgun Gothic" pitchFamily="34" charset="0"/>
+                <a:ea typeface="Malgun Gothic" pitchFamily="34" charset="-122"/>
+                <a:cs typeface="Malgun Gothic" pitchFamily="34" charset="-120"/>
+              </a:rPr>
+              <a:t>커밋 8건  ·  배도훈, 이현준</a:t>
+            </a:r>
+            <a:endParaRPr lang="en-US" sz="1100" dirty="0"/>
+          </a:p>
+        </p:txBody>
+      </p:sp>
+      <p:sp>
+        <p:nvSpPr>
+          <p:cNvPr id="6" name="Text 4"/>
+          <p:cNvSpPr/>
+          <p:nvPr/>
+        </p:nvSpPr>
+        <p:spPr>
+          <a:xfrm>
+            <a:off x="548640" y="1463040"/>
+            <a:ext cx="5943600" cy="320040"/>
+          </a:xfrm>
+          <a:prstGeom prst="rect">
+            <a:avLst/>
+          </a:prstGeom>
+          <a:noFill/>
+          <a:ln/>
+        </p:spPr>
+        <p:txBody>
+          <a:bodyPr wrap="square" rtlCol="0" anchor="ctr"/>
+          <a:lstStyle/>
+          <a:p>
+            <a:pPr marL="0" indent="0">
+              <a:buNone/>
+            </a:pPr>
+            <a:r>
+              <a:rPr lang="en-US" sz="1400" b="1" dirty="0">
+                <a:solidFill>
+                  <a:srgbClr val="3B82F6"/>
+                </a:solidFill>
+                <a:latin typeface="Malgun Gothic" pitchFamily="34" charset="0"/>
+                <a:ea typeface="Malgun Gothic" pitchFamily="34" charset="-122"/>
+                <a:cs typeface="Malgun Gothic" pitchFamily="34" charset="-120"/>
+              </a:rPr>
+              <a:t>오늘의 목표</a:t>
+            </a:r>
+            <a:endParaRPr lang="en-US" sz="1400" dirty="0"/>
+          </a:p>
+        </p:txBody>
+      </p:sp>
+      <p:sp>
+        <p:nvSpPr>
+          <p:cNvPr id="7" name="Text 5"/>
+          <p:cNvSpPr/>
+          <p:nvPr/>
+        </p:nvSpPr>
+        <p:spPr>
+          <a:xfrm>
+            <a:off x="548640" y="1783080"/>
+            <a:ext cx="5943600" cy="822960"/>
+          </a:xfrm>
+          <a:prstGeom prst="rect">
+            <a:avLst/>
+          </a:prstGeom>
+          <a:noFill/>
+          <a:ln/>
+        </p:spPr>
+        <p:txBody>
+          <a:bodyPr wrap="square" rtlCol="0" anchor="t"/>
+          <a:lstStyle/>
+          <a:p>
+            <a:pPr marL="0" indent="0">
+              <a:buNone/>
+            </a:pPr>
+            <a:r>
+              <a:rPr lang="en-US" sz="1200" dirty="0">
+                <a:solidFill>
+                  <a:srgbClr val="FFFFFF"/>
+                </a:solidFill>
+                <a:latin typeface="Malgun Gothic" pitchFamily="34" charset="0"/>
+                <a:ea typeface="Malgun Gothic" pitchFamily="34" charset="-122"/>
+                <a:cs typeface="Malgun Gothic" pitchFamily="34" charset="-120"/>
+              </a:rPr>
+              <a:t>8개 카테고리 문제집, 무작위/비공개 배틀 랭킹.</a:t>
+            </a:r>
+            <a:endParaRPr lang="en-US" sz="1200" dirty="0"/>
+          </a:p>
+        </p:txBody>
+      </p:sp>
+      <p:sp>
+        <p:nvSpPr>
+          <p:cNvPr id="8" name="Text 6"/>
+          <p:cNvSpPr/>
+          <p:nvPr/>
+        </p:nvSpPr>
+        <p:spPr>
+          <a:xfrm>
+            <a:off x="548640" y="2743200"/>
+            <a:ext cx="5943600" cy="320040"/>
+          </a:xfrm>
+          <a:prstGeom prst="rect">
+            <a:avLst/>
+          </a:prstGeom>
+          <a:noFill/>
+          <a:ln/>
+        </p:spPr>
+        <p:txBody>
+          <a:bodyPr wrap="square" rtlCol="0" anchor="ctr"/>
+          <a:lstStyle/>
+          <a:p>
+            <a:pPr marL="0" indent="0">
+              <a:buNone/>
+            </a:pPr>
+            <a:r>
+              <a:rPr lang="en-US" sz="1400" b="1" dirty="0">
+                <a:solidFill>
+                  <a:srgbClr val="3B82F6"/>
+                </a:solidFill>
+                <a:latin typeface="Malgun Gothic" pitchFamily="34" charset="0"/>
+                <a:ea typeface="Malgun Gothic" pitchFamily="34" charset="-122"/>
+                <a:cs typeface="Malgun Gothic" pitchFamily="34" charset="-120"/>
+              </a:rPr>
+              <a:t>진행 과정 · 사고</a:t>
+            </a:r>
+            <a:endParaRPr lang="en-US" sz="1400" dirty="0"/>
+          </a:p>
+        </p:txBody>
+      </p:sp>
+      <p:sp>
+        <p:nvSpPr>
+          <p:cNvPr id="9" name="Text 7"/>
+          <p:cNvSpPr/>
+          <p:nvPr/>
+        </p:nvSpPr>
+        <p:spPr>
+          <a:xfrm>
+            <a:off x="548640" y="3063240"/>
+            <a:ext cx="5943600" cy="2011680"/>
+          </a:xfrm>
+          <a:prstGeom prst="rect">
+            <a:avLst/>
+          </a:prstGeom>
+          <a:noFill/>
+          <a:ln/>
+        </p:spPr>
+        <p:txBody>
+          <a:bodyPr wrap="square" rtlCol="0" anchor="t"/>
+          <a:lstStyle/>
+          <a:p>
+            <a:pPr marL="342900" indent="-342900">
+              <a:spcAft>
+                <a:spcPts val="400"/>
+              </a:spcAft>
+              <a:buSzPct val="100000"/>
+              <a:buChar char="●"/>
+            </a:pPr>
+            <a:r>
+              <a:rPr lang="en-US" sz="1100" dirty="0">
+                <a:solidFill>
+                  <a:srgbClr val="FFFFFF"/>
+                </a:solidFill>
+                <a:latin typeface="Malgun Gothic" pitchFamily="34" charset="0"/>
+                <a:ea typeface="Malgun Gothic" pitchFamily="34" charset="-122"/>
+                <a:cs typeface="Malgun Gothic" pitchFamily="34" charset="-120"/>
+              </a:rPr>
+              <a:t>App.jsx +1,612행 — 문제집 콘텐츠 일괄 추가</a:t>
+            </a:r>
+            <a:endParaRPr lang="en-US" sz="1100" dirty="0"/>
+          </a:p>
+          <a:p>
+            <a:pPr marL="342900" indent="-342900">
+              <a:spcAft>
+                <a:spcPts val="400"/>
+              </a:spcAft>
+              <a:buSzPct val="100000"/>
+              <a:buChar char="●"/>
+            </a:pPr>
+            <a:r>
+              <a:rPr lang="en-US" sz="1100" dirty="0">
+                <a:solidFill>
+                  <a:srgbClr val="FFFFFF"/>
+                </a:solidFill>
+                <a:latin typeface="Malgun Gothic" pitchFamily="34" charset="0"/>
+                <a:ea typeface="Malgun Gothic" pitchFamily="34" charset="-122"/>
+                <a:cs typeface="Malgun Gothic" pitchFamily="34" charset="-120"/>
+              </a:rPr>
+              <a:t>서버 다운 → 1차(+136행)·2차(+19행) 복구</a:t>
+            </a:r>
+            <a:endParaRPr lang="en-US" sz="1100" dirty="0"/>
+          </a:p>
+          <a:p>
+            <a:pPr marL="342900" indent="-342900">
+              <a:spcAft>
+                <a:spcPts val="400"/>
+              </a:spcAft>
+              <a:buSzPct val="100000"/>
+              <a:buChar char="●"/>
+            </a:pPr>
+            <a:r>
+              <a:rPr lang="en-US" sz="1100" dirty="0">
+                <a:solidFill>
+                  <a:srgbClr val="FFFFFF"/>
+                </a:solidFill>
+                <a:latin typeface="Malgun Gothic" pitchFamily="34" charset="0"/>
+                <a:ea typeface="Malgun Gothic" pitchFamily="34" charset="-122"/>
+                <a:cs typeface="Malgun Gothic" pitchFamily="34" charset="-120"/>
+              </a:rPr>
+              <a:t>원인: Express 라우트 등록 순서 (구체 → 일반이어야 함)</a:t>
+            </a:r>
+            <a:endParaRPr lang="en-US" sz="1100" dirty="0"/>
+          </a:p>
+        </p:txBody>
+      </p:sp>
+      <p:sp>
+        <p:nvSpPr>
+          <p:cNvPr id="10" name="Shape 8"/>
+          <p:cNvSpPr/>
+          <p:nvPr/>
+        </p:nvSpPr>
+        <p:spPr>
+          <a:xfrm>
+            <a:off x="548640" y="5212080"/>
+            <a:ext cx="5943600" cy="1097280"/>
+          </a:xfrm>
+          <a:prstGeom prst="roundRect">
+            <a:avLst>
+              <a:gd name="adj" fmla="val 6667"/>
+            </a:avLst>
+          </a:prstGeom>
+          <a:solidFill>
+            <a:srgbClr val="1A1A2E"/>
+          </a:solidFill>
+          <a:ln w="12700">
+            <a:solidFill>
+              <a:srgbClr val="8B5CF6"/>
+            </a:solidFill>
+            <a:prstDash val="solid"/>
+          </a:ln>
+        </p:spPr>
+      </p:sp>
+      <p:sp>
+        <p:nvSpPr>
+          <p:cNvPr id="11" name="Text 9"/>
+          <p:cNvSpPr/>
+          <p:nvPr/>
+        </p:nvSpPr>
+        <p:spPr>
+          <a:xfrm>
+            <a:off x="731520" y="5285232"/>
+            <a:ext cx="5577840" cy="274320"/>
+          </a:xfrm>
+          <a:prstGeom prst="rect">
+            <a:avLst/>
+          </a:prstGeom>
+          <a:noFill/>
+          <a:ln/>
+        </p:spPr>
+        <p:txBody>
+          <a:bodyPr wrap="square" rtlCol="0" anchor="ctr"/>
+          <a:lstStyle/>
+          <a:p>
+            <a:pPr marL="0" indent="0">
+              <a:buNone/>
+            </a:pPr>
+            <a:r>
+              <a:rPr lang="en-US" sz="1100" b="1" dirty="0">
+                <a:solidFill>
+                  <a:srgbClr val="8B5CF6"/>
+                </a:solidFill>
+                <a:latin typeface="Malgun Gothic" pitchFamily="34" charset="0"/>
+                <a:ea typeface="Malgun Gothic" pitchFamily="34" charset="-122"/>
+                <a:cs typeface="Malgun Gothic" pitchFamily="34" charset="-120"/>
+              </a:rPr>
+              <a:t>알게 된 것</a:t>
+            </a:r>
+            <a:endParaRPr lang="en-US" sz="1100" dirty="0"/>
+          </a:p>
+        </p:txBody>
+      </p:sp>
+      <p:sp>
+        <p:nvSpPr>
+          <p:cNvPr id="12" name="Text 10"/>
+          <p:cNvSpPr/>
+          <p:nvPr/>
+        </p:nvSpPr>
+        <p:spPr>
+          <a:xfrm>
+            <a:off x="731520" y="5559552"/>
+            <a:ext cx="5577840" cy="731520"/>
+          </a:xfrm>
+          <a:prstGeom prst="rect">
+            <a:avLst/>
+          </a:prstGeom>
+          <a:noFill/>
+          <a:ln/>
+        </p:spPr>
+        <p:txBody>
+          <a:bodyPr wrap="square" rtlCol="0" anchor="t"/>
+          <a:lstStyle/>
+          <a:p>
+            <a:pPr marL="0" indent="0">
+              <a:buNone/>
+            </a:pPr>
+            <a:r>
+              <a:rPr lang="en-US" sz="1100" i="1" dirty="0">
+                <a:solidFill>
+                  <a:srgbClr val="FFFFFF"/>
+                </a:solidFill>
+                <a:latin typeface="Malgun Gothic" pitchFamily="34" charset="0"/>
+                <a:ea typeface="Malgun Gothic" pitchFamily="34" charset="-122"/>
+                <a:cs typeface="Malgun Gothic" pitchFamily="34" charset="-120"/>
+              </a:rPr>
+              <a:t>로그를 켜고 천천히 보면 "어디서 죽었는지"는 거의 항상 알 수 있다.</a:t>
+            </a:r>
+            <a:endParaRPr lang="en-US" sz="1100" dirty="0"/>
+          </a:p>
+        </p:txBody>
+      </p:sp>
+      <p:pic>
+        <p:nvPicPr>
+          <p:cNvPr id="13" name="Image 0" descr="C:\Users\USER\LasLasgang\nine-tailed-fox\연구일지\screenshots\workbook.png"/>
+          <p:cNvPicPr>
+            <a:picLocks noChangeAspect="1"/>
+          </p:cNvPicPr>
+          <p:nvPr/>
+        </p:nvPicPr>
+        <p:blipFill>
+          <a:blip r:embed="rId3"/>
+          <a:srcRect/>
+          <a:stretch/>
+        </p:blipFill>
+        <p:spPr>
+          <a:xfrm>
+            <a:off x="6766560" y="1463040"/>
+            <a:ext cx="5029200" cy="3310128"/>
+          </a:xfrm>
+          <a:prstGeom prst="rect">
+            <a:avLst/>
+          </a:prstGeom>
+        </p:spPr>
+      </p:pic>
+      <p:sp>
+        <p:nvSpPr>
+          <p:cNvPr id="14" name="Text 11"/>
+          <p:cNvSpPr/>
+          <p:nvPr/>
+        </p:nvSpPr>
+        <p:spPr>
+          <a:xfrm>
+            <a:off x="6766560" y="4800600"/>
+            <a:ext cx="5029200" cy="274320"/>
+          </a:xfrm>
+          <a:prstGeom prst="rect">
+            <a:avLst/>
+          </a:prstGeom>
+          <a:noFill/>
+          <a:ln/>
+        </p:spPr>
+        <p:txBody>
+          <a:bodyPr wrap="square" rtlCol="0" anchor="ctr"/>
+          <a:lstStyle/>
+          <a:p>
+            <a:pPr marL="0" indent="0" algn="ctr">
+              <a:buNone/>
+            </a:pPr>
+            <a:r>
+              <a:rPr lang="en-US" sz="1000" i="1" dirty="0">
+                <a:solidFill>
+                  <a:srgbClr val="8888A0"/>
+                </a:solidFill>
+                <a:latin typeface="Malgun Gothic" pitchFamily="34" charset="0"/>
+                <a:ea typeface="Malgun Gothic" pitchFamily="34" charset="-122"/>
+                <a:cs typeface="Malgun Gothic" pitchFamily="34" charset="-120"/>
+              </a:rPr>
+              <a:t>▲ workbook (Puppeteer 캡쳐)</a:t>
+            </a:r>
+            <a:endParaRPr lang="en-US" sz="1000" dirty="0"/>
+          </a:p>
+        </p:txBody>
+      </p:sp>
+      <p:sp>
+        <p:nvSpPr>
+          <p:cNvPr id="15" name="Text 12"/>
+          <p:cNvSpPr/>
+          <p:nvPr/>
+        </p:nvSpPr>
+        <p:spPr>
+          <a:xfrm>
+            <a:off x="457200" y="6446520"/>
+            <a:ext cx="8229600" cy="274320"/>
+          </a:xfrm>
+          <a:prstGeom prst="rect">
+            <a:avLst/>
+          </a:prstGeom>
+          <a:noFill/>
+          <a:ln/>
+        </p:spPr>
+        <p:txBody>
+          <a:bodyPr wrap="square" rtlCol="0" anchor="ctr"/>
+          <a:lstStyle/>
+          <a:p>
+            <a:pPr marL="0" indent="0">
+              <a:buNone/>
+            </a:pPr>
+            <a:r>
+              <a:rPr lang="en-US" sz="1000" dirty="0">
+                <a:solidFill>
+                  <a:srgbClr val="8888A0"/>
+                </a:solidFill>
+                <a:latin typeface="Malgun Gothic" pitchFamily="34" charset="0"/>
+                <a:ea typeface="Malgun Gothic" pitchFamily="34" charset="-122"/>
+                <a:cs typeface="Malgun Gothic" pitchFamily="34" charset="-120"/>
+              </a:rPr>
+              <a:t>Paradox — C언어 학습 플랫폼  ·  이현준 / 배도훈</a:t>
+            </a:r>
+            <a:endParaRPr lang="en-US" sz="1000" dirty="0"/>
+          </a:p>
+        </p:txBody>
+      </p:sp>
+      <p:sp>
+        <p:nvSpPr>
+          <p:cNvPr id="16" name="Text 13"/>
+          <p:cNvSpPr/>
+          <p:nvPr/>
+        </p:nvSpPr>
+        <p:spPr>
+          <a:xfrm>
+            <a:off x="10972800" y="6446520"/>
+            <a:ext cx="914400" cy="274320"/>
+          </a:xfrm>
+          <a:prstGeom prst="rect">
+            <a:avLst/>
+          </a:prstGeom>
+          <a:noFill/>
+          <a:ln/>
+        </p:spPr>
+        <p:txBody>
+          <a:bodyPr wrap="square" rtlCol="0" anchor="ctr"/>
+          <a:lstStyle/>
+          <a:p>
+            <a:pPr marL="0" indent="0" algn="r">
+              <a:buNone/>
+            </a:pPr>
+            <a:r>
+              <a:rPr lang="en-US" sz="1000" dirty="0">
+                <a:solidFill>
+                  <a:srgbClr val="8888A0"/>
+                </a:solidFill>
+                <a:latin typeface="Malgun Gothic" pitchFamily="34" charset="0"/>
+                <a:ea typeface="Malgun Gothic" pitchFamily="34" charset="-122"/>
+                <a:cs typeface="Malgun Gothic" pitchFamily="34" charset="-120"/>
+              </a:rPr>
+              <a:t>9 / 12</a:t>
+            </a:r>
+            <a:endParaRPr lang="en-US" sz="1000" dirty="0"/>
+          </a:p>
+        </p:txBody>
+      </p:sp>
+    </p:spTree>
+  </p:cSld>
+  <p:clrMapOvr>
+    <a:masterClrMapping/>
+  </p:clrMapOvr>
+</p:sld>
+</file>
+
+<file path=ppt/slides/slide11.xml><?xml version="1.0" encoding="utf-8"?>
+<p:sld xmlns:a="http://schemas.openxmlformats.org/drawingml/2006/main" xmlns:r="http://schemas.openxmlformats.org/officeDocument/2006/relationships" xmlns:p="http://schemas.openxmlformats.org/presentationml/2006/main">
   <p:cSld name="Slide 10">
     <p:bg>
       <p:bgPr>
@@ -2528,7 +5818,7 @@
 </p:sld>
 </file>
 
-<file path=ppt/slides/slide11.xml><?xml version="1.0" encoding="utf-8"?>
+<file path=ppt/slides/slide12.xml><?xml version="1.0" encoding="utf-8"?>
 <p:sld xmlns:a="http://schemas.openxmlformats.org/drawingml/2006/main" xmlns:r="http://schemas.openxmlformats.org/officeDocument/2006/relationships" xmlns:p="http://schemas.openxmlformats.org/presentationml/2006/main">
   <p:cSld name="Slide 11">
     <p:bg>
@@ -3150,7 +6440,7 @@
 </p:sld>
 </file>
 
-<file path=ppt/slides/slide12.xml><?xml version="1.0" encoding="utf-8"?>
+<file path=ppt/slides/slide13.xml><?xml version="1.0" encoding="utf-8"?>
 <p:sld xmlns:a="http://schemas.openxmlformats.org/drawingml/2006/main" xmlns:r="http://schemas.openxmlformats.org/officeDocument/2006/relationships" xmlns:p="http://schemas.openxmlformats.org/presentationml/2006/main">
   <p:cSld name="Slide 12">
     <p:bg>
@@ -4044,7 +7334,7 @@
 </p:sld>
 </file>
 
-<file path=ppt/slides/slide13.xml><?xml version="1.0" encoding="utf-8"?>
+<file path=ppt/slides/slide14.xml><?xml version="1.0" encoding="utf-8"?>
 <p:sld xmlns:a="http://schemas.openxmlformats.org/drawingml/2006/main" xmlns:r="http://schemas.openxmlformats.org/officeDocument/2006/relationships" xmlns:p="http://schemas.openxmlformats.org/presentationml/2006/main">
   <p:cSld>
     <p:bg>
@@ -4273,6 +7563,499 @@
 
 <file path=ppt/slides/slide2.xml><?xml version="1.0" encoding="utf-8"?>
 <p:sld xmlns:a="http://schemas.openxmlformats.org/drawingml/2006/main" xmlns:r="http://schemas.openxmlformats.org/officeDocument/2006/relationships" xmlns:p="http://schemas.openxmlformats.org/presentationml/2006/main">
+  <p:cSld>
+    <p:spTree>
+      <p:nvGrpSpPr>
+        <p:cNvPr id="1" name=""/>
+        <p:cNvGrpSpPr/>
+        <p:nvPr/>
+      </p:nvGrpSpPr>
+      <p:grpSpPr>
+        <a:xfrm>
+          <a:off x="0" y="0"/>
+          <a:ext cx="0" cy="0"/>
+          <a:chOff x="0" y="0"/>
+          <a:chExt cx="0" cy="0"/>
+        </a:xfrm>
+      </p:grpSpPr>
+      <p:sp>
+        <p:nvSpPr>
+          <p:cNvPr id="2" name="Shape 0"/>
+          <p:cNvSpPr/>
+          <p:nvPr/>
+        </p:nvSpPr>
+        <p:spPr>
+          <a:xfrm>
+            <a:off x="0" y="0"/>
+            <a:ext cx="137160" cy="6858000"/>
+          </a:xfrm>
+          <a:prstGeom prst="rect">
+            <a:avLst/>
+          </a:prstGeom>
+          <a:solidFill>
+            <a:srgbClr val="8B5CF6"/>
+          </a:solidFill>
+          <a:ln w="12700">
+            <a:solidFill>
+              <a:srgbClr val="8B5CF6"/>
+            </a:solidFill>
+            <a:prstDash val="solid"/>
+          </a:ln>
+        </p:spPr>
+      </p:sp>
+      <p:sp>
+        <p:nvSpPr>
+          <p:cNvPr id="3" name="Text 1"/>
+          <p:cNvSpPr/>
+          <p:nvPr/>
+        </p:nvSpPr>
+        <p:spPr>
+          <a:xfrm>
+            <a:off x="548640" y="365760"/>
+            <a:ext cx="10972800" cy="640080"/>
+          </a:xfrm>
+          <a:prstGeom prst="rect">
+            <a:avLst/>
+          </a:prstGeom>
+          <a:noFill/>
+          <a:ln/>
+        </p:spPr>
+        <p:txBody>
+          <a:bodyPr wrap="square" rtlCol="0" anchor="ctr"/>
+          <a:lstStyle/>
+          <a:p>
+            <a:pPr marL="0" indent="0">
+              <a:buNone/>
+            </a:pPr>
+            <a:r>
+              <a:rPr lang="ko-KR" altLang="en-US" sz="2800" b="1" dirty="0">
+                <a:solidFill>
+                  <a:srgbClr val="FFFFFF"/>
+                </a:solidFill>
+                <a:latin typeface="Malgun Gothic" pitchFamily="34" charset="0"/>
+                <a:ea typeface="Malgun Gothic" pitchFamily="34" charset="-122"/>
+              </a:rPr>
+              <a:t>목차</a:t>
+            </a:r>
+            <a:endParaRPr lang="en-US" sz="2800" dirty="0"/>
+          </a:p>
+        </p:txBody>
+      </p:sp>
+      <p:sp>
+        <p:nvSpPr>
+          <p:cNvPr id="4" name="Text 2"/>
+          <p:cNvSpPr/>
+          <p:nvPr/>
+        </p:nvSpPr>
+        <p:spPr>
+          <a:xfrm>
+            <a:off x="548640" y="960120"/>
+            <a:ext cx="10972800" cy="365760"/>
+          </a:xfrm>
+          <a:prstGeom prst="rect">
+            <a:avLst/>
+          </a:prstGeom>
+          <a:noFill/>
+          <a:ln/>
+        </p:spPr>
+        <p:txBody>
+          <a:bodyPr wrap="square" rtlCol="0" anchor="ctr"/>
+          <a:lstStyle/>
+          <a:p>
+            <a:pPr marL="0" indent="0">
+              <a:buNone/>
+            </a:pPr>
+            <a:endParaRPr lang="en-US" sz="1400" dirty="0"/>
+          </a:p>
+        </p:txBody>
+      </p:sp>
+      <p:sp>
+        <p:nvSpPr>
+          <p:cNvPr id="5" name="Text 3"/>
+          <p:cNvSpPr/>
+          <p:nvPr/>
+        </p:nvSpPr>
+        <p:spPr>
+          <a:xfrm>
+            <a:off x="548640" y="1463040"/>
+            <a:ext cx="10972800" cy="365760"/>
+          </a:xfrm>
+          <a:prstGeom prst="rect">
+            <a:avLst/>
+          </a:prstGeom>
+          <a:noFill/>
+          <a:ln/>
+        </p:spPr>
+        <p:txBody>
+          <a:bodyPr wrap="square" rtlCol="0" anchor="ctr"/>
+          <a:lstStyle/>
+          <a:p>
+            <a:pPr marL="0" indent="0">
+              <a:buNone/>
+            </a:pPr>
+            <a:r>
+              <a:rPr lang="ko-KR" altLang="en-US" b="1" dirty="0">
+                <a:solidFill>
+                  <a:srgbClr val="8B5CF6"/>
+                </a:solidFill>
+                <a:latin typeface="Malgun Gothic" pitchFamily="34" charset="0"/>
+                <a:ea typeface="Malgun Gothic" pitchFamily="34" charset="-122"/>
+              </a:rPr>
+              <a:t>１．프로젝트개요</a:t>
+            </a:r>
+            <a:endParaRPr lang="en-US" sz="1800" dirty="0"/>
+          </a:p>
+        </p:txBody>
+      </p:sp>
+      <p:sp>
+        <p:nvSpPr>
+          <p:cNvPr id="6" name="Text 4"/>
+          <p:cNvSpPr/>
+          <p:nvPr/>
+        </p:nvSpPr>
+        <p:spPr>
+          <a:xfrm>
+            <a:off x="731520" y="1874520"/>
+            <a:ext cx="10789920" cy="822960"/>
+          </a:xfrm>
+          <a:prstGeom prst="rect">
+            <a:avLst/>
+          </a:prstGeom>
+          <a:noFill/>
+          <a:ln/>
+        </p:spPr>
+        <p:txBody>
+          <a:bodyPr wrap="square" rtlCol="0" anchor="t"/>
+          <a:lstStyle/>
+          <a:p>
+            <a:pPr marL="0" indent="0">
+              <a:buNone/>
+            </a:pPr>
+            <a:r>
+              <a:rPr lang="ko-KR" altLang="en-US" sz="1400" dirty="0">
+                <a:solidFill>
+                  <a:srgbClr val="FFFFFF"/>
+                </a:solidFill>
+                <a:latin typeface="Malgun Gothic" pitchFamily="34" charset="0"/>
+                <a:ea typeface="Malgun Gothic" pitchFamily="34" charset="-122"/>
+              </a:rPr>
+              <a:t>프로젝트소개</a:t>
+            </a:r>
+            <a:endParaRPr lang="en-US" sz="1400" dirty="0"/>
+          </a:p>
+        </p:txBody>
+      </p:sp>
+      <p:sp>
+        <p:nvSpPr>
+          <p:cNvPr id="7" name="Text 5"/>
+          <p:cNvSpPr/>
+          <p:nvPr/>
+        </p:nvSpPr>
+        <p:spPr>
+          <a:xfrm>
+            <a:off x="548640" y="2743200"/>
+            <a:ext cx="10972800" cy="365760"/>
+          </a:xfrm>
+          <a:prstGeom prst="rect">
+            <a:avLst/>
+          </a:prstGeom>
+          <a:noFill/>
+          <a:ln/>
+        </p:spPr>
+        <p:txBody>
+          <a:bodyPr wrap="square" rtlCol="0" anchor="ctr"/>
+          <a:lstStyle/>
+          <a:p>
+            <a:pPr marL="0" indent="0">
+              <a:buNone/>
+            </a:pPr>
+            <a:r>
+              <a:rPr lang="ko-KR" altLang="en-US" b="1" dirty="0">
+                <a:solidFill>
+                  <a:srgbClr val="8B5CF6"/>
+                </a:solidFill>
+                <a:latin typeface="Malgun Gothic" pitchFamily="34" charset="0"/>
+                <a:ea typeface="Malgun Gothic" pitchFamily="34" charset="-122"/>
+              </a:rPr>
+              <a:t>２．개발　타임라인</a:t>
+            </a:r>
+            <a:endParaRPr lang="en-US" sz="1800" dirty="0"/>
+          </a:p>
+        </p:txBody>
+      </p:sp>
+      <p:sp>
+        <p:nvSpPr>
+          <p:cNvPr id="8" name="Text 6"/>
+          <p:cNvSpPr/>
+          <p:nvPr/>
+        </p:nvSpPr>
+        <p:spPr>
+          <a:xfrm>
+            <a:off x="731520" y="3348990"/>
+            <a:ext cx="10789920" cy="822960"/>
+          </a:xfrm>
+          <a:prstGeom prst="rect">
+            <a:avLst/>
+          </a:prstGeom>
+          <a:noFill/>
+          <a:ln/>
+        </p:spPr>
+        <p:txBody>
+          <a:bodyPr wrap="square" rtlCol="0" anchor="t"/>
+          <a:lstStyle/>
+          <a:p>
+            <a:pPr marL="0" indent="0">
+              <a:buNone/>
+            </a:pPr>
+            <a:r>
+              <a:rPr lang="ko-KR" altLang="en-US" sz="1400" dirty="0">
+                <a:solidFill>
+                  <a:srgbClr val="FFFFFF"/>
+                </a:solidFill>
+                <a:latin typeface="Malgun Gothic" pitchFamily="34" charset="0"/>
+                <a:ea typeface="Malgun Gothic" pitchFamily="34" charset="-122"/>
+              </a:rPr>
+              <a:t>개발과정</a:t>
+            </a:r>
+            <a:endParaRPr lang="en-US" sz="1400" dirty="0"/>
+          </a:p>
+        </p:txBody>
+      </p:sp>
+      <p:sp>
+        <p:nvSpPr>
+          <p:cNvPr id="9" name="Text 7"/>
+          <p:cNvSpPr/>
+          <p:nvPr/>
+        </p:nvSpPr>
+        <p:spPr>
+          <a:xfrm>
+            <a:off x="-681071" y="3863340"/>
+            <a:ext cx="10972800" cy="365760"/>
+          </a:xfrm>
+          <a:prstGeom prst="rect">
+            <a:avLst/>
+          </a:prstGeom>
+          <a:noFill/>
+          <a:ln/>
+        </p:spPr>
+        <p:txBody>
+          <a:bodyPr wrap="square" rtlCol="0" anchor="ctr"/>
+          <a:lstStyle/>
+          <a:p>
+            <a:pPr marL="0" indent="0">
+              <a:buNone/>
+            </a:pPr>
+            <a:endParaRPr lang="en-US" sz="1800" dirty="0"/>
+          </a:p>
+        </p:txBody>
+      </p:sp>
+      <p:sp>
+        <p:nvSpPr>
+          <p:cNvPr id="10" name="Text 8"/>
+          <p:cNvSpPr/>
+          <p:nvPr/>
+        </p:nvSpPr>
+        <p:spPr>
+          <a:xfrm>
+            <a:off x="731520" y="4869180"/>
+            <a:ext cx="10789920" cy="822960"/>
+          </a:xfrm>
+          <a:prstGeom prst="rect">
+            <a:avLst/>
+          </a:prstGeom>
+          <a:noFill/>
+          <a:ln/>
+        </p:spPr>
+        <p:txBody>
+          <a:bodyPr wrap="square" rtlCol="0" anchor="t"/>
+          <a:lstStyle/>
+          <a:p>
+            <a:pPr marL="0" indent="0">
+              <a:buNone/>
+            </a:pPr>
+            <a:r>
+              <a:rPr lang="ko-KR" altLang="en-US" sz="1400" dirty="0">
+                <a:solidFill>
+                  <a:srgbClr val="FFFFFF"/>
+                </a:solidFill>
+                <a:latin typeface="Malgun Gothic" pitchFamily="34" charset="0"/>
+                <a:ea typeface="Malgun Gothic" pitchFamily="34" charset="-122"/>
+              </a:rPr>
+              <a:t>프로젝트를　진행하며　</a:t>
+            </a:r>
+            <a:r>
+              <a:rPr lang="ko-KR" altLang="en-US" sz="1400" dirty="0" err="1">
+                <a:solidFill>
+                  <a:srgbClr val="FFFFFF"/>
+                </a:solidFill>
+                <a:latin typeface="Malgun Gothic" pitchFamily="34" charset="0"/>
+                <a:ea typeface="Malgun Gothic" pitchFamily="34" charset="-122"/>
+              </a:rPr>
+              <a:t>느낀점</a:t>
+            </a:r>
+            <a:endParaRPr lang="en-US" sz="1400" dirty="0"/>
+          </a:p>
+        </p:txBody>
+      </p:sp>
+      <p:sp>
+        <p:nvSpPr>
+          <p:cNvPr id="11" name="Text 9"/>
+          <p:cNvSpPr/>
+          <p:nvPr/>
+        </p:nvSpPr>
+        <p:spPr>
+          <a:xfrm>
+            <a:off x="548640" y="4126230"/>
+            <a:ext cx="10972800" cy="365760"/>
+          </a:xfrm>
+          <a:prstGeom prst="rect">
+            <a:avLst/>
+          </a:prstGeom>
+          <a:noFill/>
+          <a:ln/>
+        </p:spPr>
+        <p:txBody>
+          <a:bodyPr wrap="square" rtlCol="0" anchor="ctr"/>
+          <a:lstStyle/>
+          <a:p>
+            <a:pPr marL="0" indent="0">
+              <a:buNone/>
+            </a:pPr>
+            <a:r>
+              <a:rPr lang="ko-KR" altLang="en-US" b="1">
+                <a:solidFill>
+                  <a:srgbClr val="8B5CF6"/>
+                </a:solidFill>
+                <a:latin typeface="Malgun Gothic" pitchFamily="34" charset="0"/>
+                <a:ea typeface="Malgun Gothic" pitchFamily="34" charset="-122"/>
+              </a:rPr>
+              <a:t>３．느낀점</a:t>
+            </a:r>
+            <a:endParaRPr lang="en-US" sz="1800" dirty="0"/>
+          </a:p>
+        </p:txBody>
+      </p:sp>
+      <p:sp>
+        <p:nvSpPr>
+          <p:cNvPr id="12" name="Text 10"/>
+          <p:cNvSpPr/>
+          <p:nvPr/>
+        </p:nvSpPr>
+        <p:spPr>
+          <a:xfrm>
+            <a:off x="731520" y="5440680"/>
+            <a:ext cx="10789920" cy="822960"/>
+          </a:xfrm>
+          <a:prstGeom prst="rect">
+            <a:avLst/>
+          </a:prstGeom>
+          <a:noFill/>
+          <a:ln/>
+        </p:spPr>
+        <p:txBody>
+          <a:bodyPr wrap="square" rtlCol="0" anchor="t"/>
+          <a:lstStyle/>
+          <a:p>
+            <a:pPr marL="0" indent="0">
+              <a:buNone/>
+            </a:pPr>
+            <a:endParaRPr lang="en-US" sz="1400" dirty="0"/>
+          </a:p>
+        </p:txBody>
+      </p:sp>
+      <p:sp>
+        <p:nvSpPr>
+          <p:cNvPr id="13" name="Text 11"/>
+          <p:cNvSpPr/>
+          <p:nvPr/>
+        </p:nvSpPr>
+        <p:spPr>
+          <a:xfrm>
+            <a:off x="457200" y="6446520"/>
+            <a:ext cx="8229600" cy="274320"/>
+          </a:xfrm>
+          <a:prstGeom prst="rect">
+            <a:avLst/>
+          </a:prstGeom>
+          <a:noFill/>
+          <a:ln/>
+        </p:spPr>
+        <p:txBody>
+          <a:bodyPr wrap="square" rtlCol="0" anchor="ctr"/>
+          <a:lstStyle/>
+          <a:p>
+            <a:pPr marL="0" indent="0">
+              <a:buNone/>
+            </a:pPr>
+            <a:r>
+              <a:rPr lang="en-US" sz="1000" dirty="0">
+                <a:solidFill>
+                  <a:srgbClr val="8888A0"/>
+                </a:solidFill>
+                <a:latin typeface="Malgun Gothic" pitchFamily="34" charset="0"/>
+                <a:ea typeface="Malgun Gothic" pitchFamily="34" charset="-122"/>
+                <a:cs typeface="Malgun Gothic" pitchFamily="34" charset="-120"/>
+              </a:rPr>
+              <a:t>Paradox — C언어 학습 플랫폼  ·  이현준 / 배도훈</a:t>
+            </a:r>
+            <a:endParaRPr lang="en-US" sz="1000" dirty="0"/>
+          </a:p>
+        </p:txBody>
+      </p:sp>
+      <p:sp>
+        <p:nvSpPr>
+          <p:cNvPr id="14" name="Text 12"/>
+          <p:cNvSpPr/>
+          <p:nvPr/>
+        </p:nvSpPr>
+        <p:spPr>
+          <a:xfrm>
+            <a:off x="10972800" y="6446520"/>
+            <a:ext cx="914400" cy="274320"/>
+          </a:xfrm>
+          <a:prstGeom prst="rect">
+            <a:avLst/>
+          </a:prstGeom>
+          <a:noFill/>
+          <a:ln/>
+        </p:spPr>
+        <p:txBody>
+          <a:bodyPr wrap="square" rtlCol="0" anchor="ctr"/>
+          <a:lstStyle/>
+          <a:p>
+            <a:pPr marL="0" indent="0" algn="r">
+              <a:buNone/>
+            </a:pPr>
+            <a:r>
+              <a:rPr lang="en-US" sz="1000" dirty="0">
+                <a:solidFill>
+                  <a:srgbClr val="8888A0"/>
+                </a:solidFill>
+                <a:latin typeface="Malgun Gothic" pitchFamily="34" charset="0"/>
+                <a:ea typeface="Malgun Gothic" pitchFamily="34" charset="-122"/>
+                <a:cs typeface="Malgun Gothic" pitchFamily="34" charset="-120"/>
+              </a:rPr>
+              <a:t>2 / 12</a:t>
+            </a:r>
+            <a:endParaRPr lang="en-US" sz="1000" dirty="0"/>
+          </a:p>
+        </p:txBody>
+      </p:sp>
+    </p:spTree>
+    <p:extLst>
+      <p:ext uri="{BB962C8B-B14F-4D97-AF65-F5344CB8AC3E}">
+        <p14:creationId xmlns:p14="http://schemas.microsoft.com/office/powerpoint/2010/main" val="4111333331"/>
+      </p:ext>
+    </p:extLst>
+  </p:cSld>
+  <p:clrMapOvr>
+    <a:masterClrMapping/>
+  </p:clrMapOvr>
+</p:sld>
+</file>
+
+<file path=ppt/slides/slide3.xml><?xml version="1.0" encoding="utf-8"?>
+<p:sld xmlns:a="http://schemas.openxmlformats.org/drawingml/2006/main" xmlns:r="http://schemas.openxmlformats.org/officeDocument/2006/relationships" xmlns:p="http://schemas.openxmlformats.org/presentationml/2006/main">
   <p:cSld name="Slide 2">
     <p:bg>
       <p:bgPr>
@@ -4814,7 +8597,7 @@
 </p:sld>
 </file>
 
-<file path=ppt/slides/slide3.xml><?xml version="1.0" encoding="utf-8"?>
+<file path=ppt/slides/slide4.xml><?xml version="1.0" encoding="utf-8"?>
 <p:sld xmlns:a="http://schemas.openxmlformats.org/drawingml/2006/main" xmlns:r="http://schemas.openxmlformats.org/officeDocument/2006/relationships" xmlns:p="http://schemas.openxmlformats.org/presentationml/2006/main">
   <p:cSld name="Slide 3">
     <p:bg>
@@ -6659,7 +10442,7 @@
 </p:sld>
 </file>
 
-<file path=ppt/slides/slide4.xml><?xml version="1.0" encoding="utf-8"?>
+<file path=ppt/slides/slide5.xml><?xml version="1.0" encoding="utf-8"?>
 <p:sld xmlns:a="http://schemas.openxmlformats.org/drawingml/2006/main" xmlns:r="http://schemas.openxmlformats.org/officeDocument/2006/relationships" xmlns:p="http://schemas.openxmlformats.org/presentationml/2006/main">
   <p:cSld name="Slide 4">
     <p:bg>
@@ -7281,7 +11064,7 @@
 </p:sld>
 </file>
 
-<file path=ppt/slides/slide5.xml><?xml version="1.0" encoding="utf-8"?>
+<file path=ppt/slides/slide6.xml><?xml version="1.0" encoding="utf-8"?>
 <p:sld xmlns:a="http://schemas.openxmlformats.org/drawingml/2006/main" xmlns:r="http://schemas.openxmlformats.org/officeDocument/2006/relationships" xmlns:p="http://schemas.openxmlformats.org/presentationml/2006/main">
   <p:cSld name="Slide 5">
     <p:bg>
@@ -7903,7 +11686,7 @@
 </p:sld>
 </file>
 
-<file path=ppt/slides/slide6.xml><?xml version="1.0" encoding="utf-8"?>
+<file path=ppt/slides/slide7.xml><?xml version="1.0" encoding="utf-8"?>
 <p:sld xmlns:a="http://schemas.openxmlformats.org/drawingml/2006/main" xmlns:r="http://schemas.openxmlformats.org/officeDocument/2006/relationships" xmlns:p="http://schemas.openxmlformats.org/presentationml/2006/main">
   <p:cSld name="Slide 6">
     <p:bg>
@@ -8536,7 +12319,7 @@
 </p:sld>
 </file>
 
-<file path=ppt/slides/slide7.xml><?xml version="1.0" encoding="utf-8"?>
+<file path=ppt/slides/slide8.xml><?xml version="1.0" encoding="utf-8"?>
 <p:sld xmlns:a="http://schemas.openxmlformats.org/drawingml/2006/main" xmlns:r="http://schemas.openxmlformats.org/officeDocument/2006/relationships" xmlns:p="http://schemas.openxmlformats.org/presentationml/2006/main">
   <p:cSld name="Slide 7">
     <p:bg>
@@ -9158,7 +12941,7 @@
 </p:sld>
 </file>
 
-<file path=ppt/slides/slide8.xml><?xml version="1.0" encoding="utf-8"?>
+<file path=ppt/slides/slide9.xml><?xml version="1.0" encoding="utf-8"?>
 <p:sld xmlns:a="http://schemas.openxmlformats.org/drawingml/2006/main" xmlns:r="http://schemas.openxmlformats.org/officeDocument/2006/relationships" xmlns:p="http://schemas.openxmlformats.org/presentationml/2006/main">
   <p:cSld name="Slide 8">
     <p:bg>
@@ -9780,632 +13563,10 @@
 </p:sld>
 </file>
 
-<file path=ppt/slides/slide9.xml><?xml version="1.0" encoding="utf-8"?>
-<p:sld xmlns:a="http://schemas.openxmlformats.org/drawingml/2006/main" xmlns:r="http://schemas.openxmlformats.org/officeDocument/2006/relationships" xmlns:p="http://schemas.openxmlformats.org/presentationml/2006/main">
-  <p:cSld name="Slide 9">
-    <p:bg>
-      <p:bgPr>
-        <a:solidFill>
-          <a:srgbClr val="0B0B14"/>
-        </a:solidFill>
-        <a:effectLst/>
-      </p:bgPr>
-    </p:bg>
-    <p:spTree>
-      <p:nvGrpSpPr>
-        <p:cNvPr id="1" name=""/>
-        <p:cNvGrpSpPr/>
-        <p:nvPr/>
-      </p:nvGrpSpPr>
-      <p:grpSpPr>
-        <a:xfrm>
-          <a:off x="0" y="0"/>
-          <a:ext cx="0" cy="0"/>
-          <a:chOff x="0" y="0"/>
-          <a:chExt cx="0" cy="0"/>
-        </a:xfrm>
-      </p:grpSpPr>
-      <p:sp>
-        <p:nvSpPr>
-          <p:cNvPr id="2" name="Shape 0"/>
-          <p:cNvSpPr/>
-          <p:nvPr/>
-        </p:nvSpPr>
-        <p:spPr>
-          <a:xfrm>
-            <a:off x="0" y="0"/>
-            <a:ext cx="137160" cy="6858000"/>
-          </a:xfrm>
-          <a:prstGeom prst="rect">
-            <a:avLst/>
-          </a:prstGeom>
-          <a:solidFill>
-            <a:srgbClr val="8B5CF6"/>
-          </a:solidFill>
-          <a:ln w="12700">
-            <a:solidFill>
-              <a:srgbClr val="8B5CF6"/>
-            </a:solidFill>
-            <a:prstDash val="solid"/>
-          </a:ln>
-        </p:spPr>
-      </p:sp>
-      <p:sp>
-        <p:nvSpPr>
-          <p:cNvPr id="3" name="Text 1"/>
-          <p:cNvSpPr/>
-          <p:nvPr/>
-        </p:nvSpPr>
-        <p:spPr>
-          <a:xfrm>
-            <a:off x="548640" y="320040"/>
-            <a:ext cx="5486400" cy="457200"/>
-          </a:xfrm>
-          <a:prstGeom prst="rect">
-            <a:avLst/>
-          </a:prstGeom>
-          <a:noFill/>
-          <a:ln/>
-        </p:spPr>
-        <p:txBody>
-          <a:bodyPr wrap="square" rtlCol="0" anchor="ctr"/>
-          <a:lstStyle/>
-          <a:p>
-            <a:pPr marL="0" indent="0">
-              <a:buNone/>
-            </a:pPr>
-            <a:r>
-              <a:rPr lang="en-US" sz="2200" b="1" dirty="0">
-                <a:solidFill>
-                  <a:srgbClr val="8B5CF6"/>
-                </a:solidFill>
-                <a:latin typeface="Malgun Gothic" pitchFamily="34" charset="0"/>
-                <a:ea typeface="Malgun Gothic" pitchFamily="34" charset="-122"/>
-                <a:cs typeface="Malgun Gothic" pitchFamily="34" charset="-120"/>
-              </a:rPr>
-              <a:t>2026-05-12 (화)</a:t>
-            </a:r>
-            <a:endParaRPr lang="en-US" sz="2200" dirty="0"/>
-          </a:p>
-        </p:txBody>
-      </p:sp>
-      <p:sp>
-        <p:nvSpPr>
-          <p:cNvPr id="4" name="Text 2"/>
-          <p:cNvSpPr/>
-          <p:nvPr/>
-        </p:nvSpPr>
-        <p:spPr>
-          <a:xfrm>
-            <a:off x="548640" y="777240"/>
-            <a:ext cx="7772400" cy="457200"/>
-          </a:xfrm>
-          <a:prstGeom prst="rect">
-            <a:avLst/>
-          </a:prstGeom>
-          <a:noFill/>
-          <a:ln/>
-        </p:spPr>
-        <p:txBody>
-          <a:bodyPr wrap="square" rtlCol="0" anchor="ctr"/>
-          <a:lstStyle/>
-          <a:p>
-            <a:pPr marL="0" indent="0">
-              <a:buNone/>
-            </a:pPr>
-            <a:r>
-              <a:rPr lang="en-US" sz="1600" dirty="0">
-                <a:solidFill>
-                  <a:srgbClr val="FFFFFF"/>
-                </a:solidFill>
-                <a:latin typeface="Malgun Gothic" pitchFamily="34" charset="0"/>
-                <a:ea typeface="Malgun Gothic" pitchFamily="34" charset="-122"/>
-                <a:cs typeface="Malgun Gothic" pitchFamily="34" charset="-120"/>
-              </a:rPr>
-              <a:t>문제집·랭킹 도입 + 서버 두 번 되살리기</a:t>
-            </a:r>
-            <a:endParaRPr lang="en-US" sz="1600" dirty="0"/>
-          </a:p>
-        </p:txBody>
-      </p:sp>
-      <p:sp>
-        <p:nvSpPr>
-          <p:cNvPr id="5" name="Text 3"/>
-          <p:cNvSpPr/>
-          <p:nvPr/>
-        </p:nvSpPr>
-        <p:spPr>
-          <a:xfrm>
-            <a:off x="6858000" y="411480"/>
-            <a:ext cx="4846320" cy="365760"/>
-          </a:xfrm>
-          <a:prstGeom prst="rect">
-            <a:avLst/>
-          </a:prstGeom>
-          <a:noFill/>
-          <a:ln/>
-        </p:spPr>
-        <p:txBody>
-          <a:bodyPr wrap="square" rtlCol="0" anchor="ctr"/>
-          <a:lstStyle/>
-          <a:p>
-            <a:pPr marL="0" indent="0" algn="r">
-              <a:buNone/>
-            </a:pPr>
-            <a:r>
-              <a:rPr lang="en-US" sz="1100" dirty="0">
-                <a:solidFill>
-                  <a:srgbClr val="8888A0"/>
-                </a:solidFill>
-                <a:latin typeface="Malgun Gothic" pitchFamily="34" charset="0"/>
-                <a:ea typeface="Malgun Gothic" pitchFamily="34" charset="-122"/>
-                <a:cs typeface="Malgun Gothic" pitchFamily="34" charset="-120"/>
-              </a:rPr>
-              <a:t>커밋 8건  ·  배도훈, 이현준</a:t>
-            </a:r>
-            <a:endParaRPr lang="en-US" sz="1100" dirty="0"/>
-          </a:p>
-        </p:txBody>
-      </p:sp>
-      <p:sp>
-        <p:nvSpPr>
-          <p:cNvPr id="6" name="Text 4"/>
-          <p:cNvSpPr/>
-          <p:nvPr/>
-        </p:nvSpPr>
-        <p:spPr>
-          <a:xfrm>
-            <a:off x="548640" y="1463040"/>
-            <a:ext cx="5943600" cy="320040"/>
-          </a:xfrm>
-          <a:prstGeom prst="rect">
-            <a:avLst/>
-          </a:prstGeom>
-          <a:noFill/>
-          <a:ln/>
-        </p:spPr>
-        <p:txBody>
-          <a:bodyPr wrap="square" rtlCol="0" anchor="ctr"/>
-          <a:lstStyle/>
-          <a:p>
-            <a:pPr marL="0" indent="0">
-              <a:buNone/>
-            </a:pPr>
-            <a:r>
-              <a:rPr lang="en-US" sz="1400" b="1" dirty="0">
-                <a:solidFill>
-                  <a:srgbClr val="3B82F6"/>
-                </a:solidFill>
-                <a:latin typeface="Malgun Gothic" pitchFamily="34" charset="0"/>
-                <a:ea typeface="Malgun Gothic" pitchFamily="34" charset="-122"/>
-                <a:cs typeface="Malgun Gothic" pitchFamily="34" charset="-120"/>
-              </a:rPr>
-              <a:t>오늘의 목표</a:t>
-            </a:r>
-            <a:endParaRPr lang="en-US" sz="1400" dirty="0"/>
-          </a:p>
-        </p:txBody>
-      </p:sp>
-      <p:sp>
-        <p:nvSpPr>
-          <p:cNvPr id="7" name="Text 5"/>
-          <p:cNvSpPr/>
-          <p:nvPr/>
-        </p:nvSpPr>
-        <p:spPr>
-          <a:xfrm>
-            <a:off x="548640" y="1783080"/>
-            <a:ext cx="5943600" cy="822960"/>
-          </a:xfrm>
-          <a:prstGeom prst="rect">
-            <a:avLst/>
-          </a:prstGeom>
-          <a:noFill/>
-          <a:ln/>
-        </p:spPr>
-        <p:txBody>
-          <a:bodyPr wrap="square" rtlCol="0" anchor="t"/>
-          <a:lstStyle/>
-          <a:p>
-            <a:pPr marL="0" indent="0">
-              <a:buNone/>
-            </a:pPr>
-            <a:r>
-              <a:rPr lang="en-US" sz="1200" dirty="0">
-                <a:solidFill>
-                  <a:srgbClr val="FFFFFF"/>
-                </a:solidFill>
-                <a:latin typeface="Malgun Gothic" pitchFamily="34" charset="0"/>
-                <a:ea typeface="Malgun Gothic" pitchFamily="34" charset="-122"/>
-                <a:cs typeface="Malgun Gothic" pitchFamily="34" charset="-120"/>
-              </a:rPr>
-              <a:t>8개 카테고리 문제집, 무작위/비공개 배틀 랭킹.</a:t>
-            </a:r>
-            <a:endParaRPr lang="en-US" sz="1200" dirty="0"/>
-          </a:p>
-        </p:txBody>
-      </p:sp>
-      <p:sp>
-        <p:nvSpPr>
-          <p:cNvPr id="8" name="Text 6"/>
-          <p:cNvSpPr/>
-          <p:nvPr/>
-        </p:nvSpPr>
-        <p:spPr>
-          <a:xfrm>
-            <a:off x="548640" y="2743200"/>
-            <a:ext cx="5943600" cy="320040"/>
-          </a:xfrm>
-          <a:prstGeom prst="rect">
-            <a:avLst/>
-          </a:prstGeom>
-          <a:noFill/>
-          <a:ln/>
-        </p:spPr>
-        <p:txBody>
-          <a:bodyPr wrap="square" rtlCol="0" anchor="ctr"/>
-          <a:lstStyle/>
-          <a:p>
-            <a:pPr marL="0" indent="0">
-              <a:buNone/>
-            </a:pPr>
-            <a:r>
-              <a:rPr lang="en-US" sz="1400" b="1" dirty="0">
-                <a:solidFill>
-                  <a:srgbClr val="3B82F6"/>
-                </a:solidFill>
-                <a:latin typeface="Malgun Gothic" pitchFamily="34" charset="0"/>
-                <a:ea typeface="Malgun Gothic" pitchFamily="34" charset="-122"/>
-                <a:cs typeface="Malgun Gothic" pitchFamily="34" charset="-120"/>
-              </a:rPr>
-              <a:t>진행 과정 · 사고</a:t>
-            </a:r>
-            <a:endParaRPr lang="en-US" sz="1400" dirty="0"/>
-          </a:p>
-        </p:txBody>
-      </p:sp>
-      <p:sp>
-        <p:nvSpPr>
-          <p:cNvPr id="9" name="Text 7"/>
-          <p:cNvSpPr/>
-          <p:nvPr/>
-        </p:nvSpPr>
-        <p:spPr>
-          <a:xfrm>
-            <a:off x="548640" y="3063240"/>
-            <a:ext cx="5943600" cy="2011680"/>
-          </a:xfrm>
-          <a:prstGeom prst="rect">
-            <a:avLst/>
-          </a:prstGeom>
-          <a:noFill/>
-          <a:ln/>
-        </p:spPr>
-        <p:txBody>
-          <a:bodyPr wrap="square" rtlCol="0" anchor="t"/>
-          <a:lstStyle/>
-          <a:p>
-            <a:pPr marL="342900" indent="-342900">
-              <a:spcAft>
-                <a:spcPts val="400"/>
-              </a:spcAft>
-              <a:buSzPct val="100000"/>
-              <a:buChar char="●"/>
-            </a:pPr>
-            <a:r>
-              <a:rPr lang="en-US" sz="1100" dirty="0">
-                <a:solidFill>
-                  <a:srgbClr val="FFFFFF"/>
-                </a:solidFill>
-                <a:latin typeface="Malgun Gothic" pitchFamily="34" charset="0"/>
-                <a:ea typeface="Malgun Gothic" pitchFamily="34" charset="-122"/>
-                <a:cs typeface="Malgun Gothic" pitchFamily="34" charset="-120"/>
-              </a:rPr>
-              <a:t>App.jsx +1,612행 — 문제집 콘텐츠 일괄 추가</a:t>
-            </a:r>
-            <a:endParaRPr lang="en-US" sz="1100" dirty="0"/>
-          </a:p>
-          <a:p>
-            <a:pPr marL="342900" indent="-342900">
-              <a:spcAft>
-                <a:spcPts val="400"/>
-              </a:spcAft>
-              <a:buSzPct val="100000"/>
-              <a:buChar char="●"/>
-            </a:pPr>
-            <a:r>
-              <a:rPr lang="en-US" sz="1100" dirty="0">
-                <a:solidFill>
-                  <a:srgbClr val="FFFFFF"/>
-                </a:solidFill>
-                <a:latin typeface="Malgun Gothic" pitchFamily="34" charset="0"/>
-                <a:ea typeface="Malgun Gothic" pitchFamily="34" charset="-122"/>
-                <a:cs typeface="Malgun Gothic" pitchFamily="34" charset="-120"/>
-              </a:rPr>
-              <a:t>서버 다운 → 1차(+136행)·2차(+19행) 복구</a:t>
-            </a:r>
-            <a:endParaRPr lang="en-US" sz="1100" dirty="0"/>
-          </a:p>
-          <a:p>
-            <a:pPr marL="342900" indent="-342900">
-              <a:spcAft>
-                <a:spcPts val="400"/>
-              </a:spcAft>
-              <a:buSzPct val="100000"/>
-              <a:buChar char="●"/>
-            </a:pPr>
-            <a:r>
-              <a:rPr lang="en-US" sz="1100" dirty="0">
-                <a:solidFill>
-                  <a:srgbClr val="FFFFFF"/>
-                </a:solidFill>
-                <a:latin typeface="Malgun Gothic" pitchFamily="34" charset="0"/>
-                <a:ea typeface="Malgun Gothic" pitchFamily="34" charset="-122"/>
-                <a:cs typeface="Malgun Gothic" pitchFamily="34" charset="-120"/>
-              </a:rPr>
-              <a:t>원인: Express 라우트 등록 순서 (구체 → 일반이어야 함)</a:t>
-            </a:r>
-            <a:endParaRPr lang="en-US" sz="1100" dirty="0"/>
-          </a:p>
-        </p:txBody>
-      </p:sp>
-      <p:sp>
-        <p:nvSpPr>
-          <p:cNvPr id="10" name="Shape 8"/>
-          <p:cNvSpPr/>
-          <p:nvPr/>
-        </p:nvSpPr>
-        <p:spPr>
-          <a:xfrm>
-            <a:off x="548640" y="5212080"/>
-            <a:ext cx="5943600" cy="1097280"/>
-          </a:xfrm>
-          <a:prstGeom prst="roundRect">
-            <a:avLst>
-              <a:gd name="adj" fmla="val 6667"/>
-            </a:avLst>
-          </a:prstGeom>
-          <a:solidFill>
-            <a:srgbClr val="1A1A2E"/>
-          </a:solidFill>
-          <a:ln w="12700">
-            <a:solidFill>
-              <a:srgbClr val="8B5CF6"/>
-            </a:solidFill>
-            <a:prstDash val="solid"/>
-          </a:ln>
-        </p:spPr>
-      </p:sp>
-      <p:sp>
-        <p:nvSpPr>
-          <p:cNvPr id="11" name="Text 9"/>
-          <p:cNvSpPr/>
-          <p:nvPr/>
-        </p:nvSpPr>
-        <p:spPr>
-          <a:xfrm>
-            <a:off x="731520" y="5285232"/>
-            <a:ext cx="5577840" cy="274320"/>
-          </a:xfrm>
-          <a:prstGeom prst="rect">
-            <a:avLst/>
-          </a:prstGeom>
-          <a:noFill/>
-          <a:ln/>
-        </p:spPr>
-        <p:txBody>
-          <a:bodyPr wrap="square" rtlCol="0" anchor="ctr"/>
-          <a:lstStyle/>
-          <a:p>
-            <a:pPr marL="0" indent="0">
-              <a:buNone/>
-            </a:pPr>
-            <a:r>
-              <a:rPr lang="en-US" sz="1100" b="1" dirty="0">
-                <a:solidFill>
-                  <a:srgbClr val="8B5CF6"/>
-                </a:solidFill>
-                <a:latin typeface="Malgun Gothic" pitchFamily="34" charset="0"/>
-                <a:ea typeface="Malgun Gothic" pitchFamily="34" charset="-122"/>
-                <a:cs typeface="Malgun Gothic" pitchFamily="34" charset="-120"/>
-              </a:rPr>
-              <a:t>알게 된 것</a:t>
-            </a:r>
-            <a:endParaRPr lang="en-US" sz="1100" dirty="0"/>
-          </a:p>
-        </p:txBody>
-      </p:sp>
-      <p:sp>
-        <p:nvSpPr>
-          <p:cNvPr id="12" name="Text 10"/>
-          <p:cNvSpPr/>
-          <p:nvPr/>
-        </p:nvSpPr>
-        <p:spPr>
-          <a:xfrm>
-            <a:off x="731520" y="5559552"/>
-            <a:ext cx="5577840" cy="731520"/>
-          </a:xfrm>
-          <a:prstGeom prst="rect">
-            <a:avLst/>
-          </a:prstGeom>
-          <a:noFill/>
-          <a:ln/>
-        </p:spPr>
-        <p:txBody>
-          <a:bodyPr wrap="square" rtlCol="0" anchor="t"/>
-          <a:lstStyle/>
-          <a:p>
-            <a:pPr marL="0" indent="0">
-              <a:buNone/>
-            </a:pPr>
-            <a:r>
-              <a:rPr lang="en-US" sz="1100" i="1" dirty="0">
-                <a:solidFill>
-                  <a:srgbClr val="FFFFFF"/>
-                </a:solidFill>
-                <a:latin typeface="Malgun Gothic" pitchFamily="34" charset="0"/>
-                <a:ea typeface="Malgun Gothic" pitchFamily="34" charset="-122"/>
-                <a:cs typeface="Malgun Gothic" pitchFamily="34" charset="-120"/>
-              </a:rPr>
-              <a:t>로그를 켜고 천천히 보면 "어디서 죽었는지"는 거의 항상 알 수 있다.</a:t>
-            </a:r>
-            <a:endParaRPr lang="en-US" sz="1100" dirty="0"/>
-          </a:p>
-        </p:txBody>
-      </p:sp>
-      <p:pic>
-        <p:nvPicPr>
-          <p:cNvPr id="13" name="Image 0" descr="C:\Users\USER\LasLasgang\nine-tailed-fox\연구일지\screenshots\workbook.png"/>
-          <p:cNvPicPr>
-            <a:picLocks noChangeAspect="1"/>
-          </p:cNvPicPr>
-          <p:nvPr/>
-        </p:nvPicPr>
-        <p:blipFill>
-          <a:blip r:embed="rId3"/>
-          <a:srcRect/>
-          <a:stretch/>
-        </p:blipFill>
-        <p:spPr>
-          <a:xfrm>
-            <a:off x="6766560" y="1463040"/>
-            <a:ext cx="5029200" cy="3310128"/>
-          </a:xfrm>
-          <a:prstGeom prst="rect">
-            <a:avLst/>
-          </a:prstGeom>
-        </p:spPr>
-      </p:pic>
-      <p:sp>
-        <p:nvSpPr>
-          <p:cNvPr id="14" name="Text 11"/>
-          <p:cNvSpPr/>
-          <p:nvPr/>
-        </p:nvSpPr>
-        <p:spPr>
-          <a:xfrm>
-            <a:off x="6766560" y="4800600"/>
-            <a:ext cx="5029200" cy="274320"/>
-          </a:xfrm>
-          <a:prstGeom prst="rect">
-            <a:avLst/>
-          </a:prstGeom>
-          <a:noFill/>
-          <a:ln/>
-        </p:spPr>
-        <p:txBody>
-          <a:bodyPr wrap="square" rtlCol="0" anchor="ctr"/>
-          <a:lstStyle/>
-          <a:p>
-            <a:pPr marL="0" indent="0" algn="ctr">
-              <a:buNone/>
-            </a:pPr>
-            <a:r>
-              <a:rPr lang="en-US" sz="1000" i="1" dirty="0">
-                <a:solidFill>
-                  <a:srgbClr val="8888A0"/>
-                </a:solidFill>
-                <a:latin typeface="Malgun Gothic" pitchFamily="34" charset="0"/>
-                <a:ea typeface="Malgun Gothic" pitchFamily="34" charset="-122"/>
-                <a:cs typeface="Malgun Gothic" pitchFamily="34" charset="-120"/>
-              </a:rPr>
-              <a:t>▲ workbook (Puppeteer 캡쳐)</a:t>
-            </a:r>
-            <a:endParaRPr lang="en-US" sz="1000" dirty="0"/>
-          </a:p>
-        </p:txBody>
-      </p:sp>
-      <p:sp>
-        <p:nvSpPr>
-          <p:cNvPr id="15" name="Text 12"/>
-          <p:cNvSpPr/>
-          <p:nvPr/>
-        </p:nvSpPr>
-        <p:spPr>
-          <a:xfrm>
-            <a:off x="457200" y="6446520"/>
-            <a:ext cx="8229600" cy="274320"/>
-          </a:xfrm>
-          <a:prstGeom prst="rect">
-            <a:avLst/>
-          </a:prstGeom>
-          <a:noFill/>
-          <a:ln/>
-        </p:spPr>
-        <p:txBody>
-          <a:bodyPr wrap="square" rtlCol="0" anchor="ctr"/>
-          <a:lstStyle/>
-          <a:p>
-            <a:pPr marL="0" indent="0">
-              <a:buNone/>
-            </a:pPr>
-            <a:r>
-              <a:rPr lang="en-US" sz="1000" dirty="0">
-                <a:solidFill>
-                  <a:srgbClr val="8888A0"/>
-                </a:solidFill>
-                <a:latin typeface="Malgun Gothic" pitchFamily="34" charset="0"/>
-                <a:ea typeface="Malgun Gothic" pitchFamily="34" charset="-122"/>
-                <a:cs typeface="Malgun Gothic" pitchFamily="34" charset="-120"/>
-              </a:rPr>
-              <a:t>Paradox — C언어 학습 플랫폼  ·  이현준 / 배도훈</a:t>
-            </a:r>
-            <a:endParaRPr lang="en-US" sz="1000" dirty="0"/>
-          </a:p>
-        </p:txBody>
-      </p:sp>
-      <p:sp>
-        <p:nvSpPr>
-          <p:cNvPr id="16" name="Text 13"/>
-          <p:cNvSpPr/>
-          <p:nvPr/>
-        </p:nvSpPr>
-        <p:spPr>
-          <a:xfrm>
-            <a:off x="10972800" y="6446520"/>
-            <a:ext cx="914400" cy="274320"/>
-          </a:xfrm>
-          <a:prstGeom prst="rect">
-            <a:avLst/>
-          </a:prstGeom>
-          <a:noFill/>
-          <a:ln/>
-        </p:spPr>
-        <p:txBody>
-          <a:bodyPr wrap="square" rtlCol="0" anchor="ctr"/>
-          <a:lstStyle/>
-          <a:p>
-            <a:pPr marL="0" indent="0" algn="r">
-              <a:buNone/>
-            </a:pPr>
-            <a:r>
-              <a:rPr lang="en-US" sz="1000" dirty="0">
-                <a:solidFill>
-                  <a:srgbClr val="8888A0"/>
-                </a:solidFill>
-                <a:latin typeface="Malgun Gothic" pitchFamily="34" charset="0"/>
-                <a:ea typeface="Malgun Gothic" pitchFamily="34" charset="-122"/>
-                <a:cs typeface="Malgun Gothic" pitchFamily="34" charset="-120"/>
-              </a:rPr>
-              <a:t>9 / 12</a:t>
-            </a:r>
-            <a:endParaRPr lang="en-US" sz="1000" dirty="0"/>
-          </a:p>
-        </p:txBody>
-      </p:sp>
-    </p:spTree>
-  </p:cSld>
-  <p:clrMapOvr>
-    <a:masterClrMapping/>
-  </p:clrMapOvr>
-</p:sld>
-</file>
-
 <file path=ppt/theme/theme1.xml><?xml version="1.0" encoding="utf-8"?>
 <a:theme xmlns:a="http://schemas.openxmlformats.org/drawingml/2006/main" name="Office Theme">
   <a:themeElements>
-    <a:clrScheme name="Office">
+    <a:clrScheme name="Office 테마">
       <a:dk1>
         <a:sysClr val="windowText" lastClr="000000"/>
       </a:dk1>
@@ -10419,22 +13580,22 @@
         <a:srgbClr val="E7E6E6"/>
       </a:lt2>
       <a:accent1>
-        <a:srgbClr val="4472C4"/>
+        <a:srgbClr val="29AF8C"/>
       </a:accent1>
       <a:accent2>
-        <a:srgbClr val="ED7D31"/>
+        <a:srgbClr val="97BE49"/>
       </a:accent2>
       <a:accent3>
-        <a:srgbClr val="A5A5A5"/>
+        <a:srgbClr val="3D9CCC"/>
       </a:accent3>
       <a:accent4>
-        <a:srgbClr val="FFC000"/>
+        <a:srgbClr val="7C60C6"/>
       </a:accent4>
       <a:accent5>
-        <a:srgbClr val="5B9BD5"/>
+        <a:srgbClr val="C9492C"/>
       </a:accent5>
       <a:accent6>
-        <a:srgbClr val="70AD47"/>
+        <a:srgbClr val="D58C2E"/>
       </a:accent6>
       <a:hlink>
         <a:srgbClr val="0563C1"/>
@@ -10443,7 +13604,7 @@
         <a:srgbClr val="954F72"/>
       </a:folHlink>
     </a:clrScheme>
-    <a:fontScheme name="Office">
+    <a:fontScheme name="Office 테마">
       <a:majorFont>
         <a:latin typeface="Calibri Light" panose="020F0302020204030204"/>
         <a:ea typeface=""/>
@@ -10478,23 +13639,6 @@
         <a:font script="Viet" typeface="Times New Roman"/>
         <a:font script="Uigh" typeface="Microsoft Uighur"/>
         <a:font script="Geor" typeface="Sylfaen"/>
-        <a:font script="Armn" typeface="Arial"/>
-        <a:font script="Bugi" typeface="Leelawadee UI"/>
-        <a:font script="Bopo" typeface="Microsoft JhengHei"/>
-        <a:font script="Java" typeface="Javanese Text"/>
-        <a:font script="Lisu" typeface="Segoe UI"/>
-        <a:font script="Mymr" typeface="Myanmar Text"/>
-        <a:font script="Nkoo" typeface="Ebrima"/>
-        <a:font script="Olck" typeface="Nirmala UI"/>
-        <a:font script="Osma" typeface="Ebrima"/>
-        <a:font script="Phag" typeface="Phagspa"/>
-        <a:font script="Syrn" typeface="Estrangelo Edessa"/>
-        <a:font script="Syrj" typeface="Estrangelo Edessa"/>
-        <a:font script="Syre" typeface="Estrangelo Edessa"/>
-        <a:font script="Sora" typeface="Nirmala UI"/>
-        <a:font script="Tale" typeface="Microsoft Tai Le"/>
-        <a:font script="Talu" typeface="Microsoft New Tai Lue"/>
-        <a:font script="Tfng" typeface="Ebrima"/>
       </a:majorFont>
       <a:minorFont>
         <a:latin typeface="Calibri" panose="020F0502020204030204"/>
@@ -10530,26 +13674,9 @@
         <a:font script="Viet" typeface="Arial"/>
         <a:font script="Uigh" typeface="Microsoft Uighur"/>
         <a:font script="Geor" typeface="Sylfaen"/>
-        <a:font script="Armn" typeface="Arial"/>
-        <a:font script="Bugi" typeface="Leelawadee UI"/>
-        <a:font script="Bopo" typeface="Microsoft JhengHei"/>
-        <a:font script="Java" typeface="Javanese Text"/>
-        <a:font script="Lisu" typeface="Segoe UI"/>
-        <a:font script="Mymr" typeface="Myanmar Text"/>
-        <a:font script="Nkoo" typeface="Ebrima"/>
-        <a:font script="Olck" typeface="Nirmala UI"/>
-        <a:font script="Osma" typeface="Ebrima"/>
-        <a:font script="Phag" typeface="Phagspa"/>
-        <a:font script="Syrn" typeface="Estrangelo Edessa"/>
-        <a:font script="Syrj" typeface="Estrangelo Edessa"/>
-        <a:font script="Syre" typeface="Estrangelo Edessa"/>
-        <a:font script="Sora" typeface="Nirmala UI"/>
-        <a:font script="Tale" typeface="Microsoft Tai Le"/>
-        <a:font script="Talu" typeface="Microsoft New Tai Lue"/>
-        <a:font script="Tfng" typeface="Ebrima"/>
       </a:minorFont>
     </a:fontScheme>
-    <a:fmtScheme name="Office">
+    <a:fmtScheme name="Office 테마">
       <a:fillStyleLst>
         <a:solidFill>
           <a:schemeClr val="phClr"/>
@@ -10691,7 +13818,7 @@
   <a:extraClrSchemeLst/>
   <a:extLst>
     <a:ext uri="{05A4C25C-085E-4340-85A3-A5531E510DB2}">
-      <thm15:themeFamily xmlns:thm15="http://schemas.microsoft.com/office/thememl/2012/main" name="Office Theme" id="{62F939B6-93AF-4DB8-9C6B-D6C7DFDC589F}" vid="{4A3C46E8-61CC-4603-A589-7422A47A8E4A}"/>
+      <thm15:themeFamily xmlns:thm15="http://schemas.microsoft.com/office/thememl/2012/main" name="Office Theme" id="{62F939B6-93AF-4DB8-9C6B-D6C7DFDC589F}" vid="{3E4F19A7-A959-40BB-972C-4880BAF8EB09}"/>
     </a:ext>
   </a:extLst>
 </a:theme>
